--- a/CylindericalCoordinates/KeyResults.pptx
+++ b/CylindericalCoordinates/KeyResults.pptx
@@ -108,6 +108,11 @@
       </a:defRPr>
     </a:lvl9pPr>
   </p:defaultTextStyle>
+  <p:extLst>
+    <p:ext uri="{EFAFB233-063F-42B5-8137-9DF3F51BA10A}">
+      <p15:sldGuideLst xmlns:p15="http://schemas.microsoft.com/office/powerpoint/2012/main"/>
+    </p:ext>
+  </p:extLst>
 </p:presentation>
 </file>
 
@@ -3481,8 +3486,8 @@
           </a:p>
         </p:txBody>
       </p:sp>
-      <mc:AlternateContent xmlns:mc="http://schemas.openxmlformats.org/markup-compatibility/2006">
-        <mc:Choice xmlns:a14="http://schemas.microsoft.com/office/drawing/2010/main" Requires="a14">
+      <mc:AlternateContent xmlns:mc="http://schemas.openxmlformats.org/markup-compatibility/2006" xmlns:a14="http://schemas.microsoft.com/office/drawing/2010/main">
+        <mc:Choice Requires="a14">
           <p:sp>
             <p:nvSpPr>
               <p:cNvPr id="10" name="文本框 9"/>
@@ -3505,6 +3510,7 @@
               </a:bodyPr>
               <a:lstStyle/>
               <a:p>
+                <a:pPr/>
                 <a14:m>
                   <m:oMathPara xmlns:m="http://schemas.openxmlformats.org/officeDocument/2006/math">
                     <m:oMathParaPr>
@@ -3796,7 +3802,7 @@
             </p:txBody>
           </p:sp>
         </mc:Choice>
-        <mc:Fallback>
+        <mc:Fallback xmlns="">
           <p:sp>
             <p:nvSpPr>
               <p:cNvPr id="10" name="文本框 9"/>
@@ -3835,8 +3841,8 @@
           </p:sp>
         </mc:Fallback>
       </mc:AlternateContent>
-      <mc:AlternateContent xmlns:mc="http://schemas.openxmlformats.org/markup-compatibility/2006">
-        <mc:Choice xmlns:a14="http://schemas.microsoft.com/office/drawing/2010/main" Requires="a14">
+      <mc:AlternateContent xmlns:mc="http://schemas.openxmlformats.org/markup-compatibility/2006" xmlns:a14="http://schemas.microsoft.com/office/drawing/2010/main">
+        <mc:Choice Requires="a14">
           <p:sp>
             <p:nvSpPr>
               <p:cNvPr id="11" name="矩形 10"/>
@@ -3904,15 +3910,7 @@
                     <a:ea typeface="微软雅黑" panose="020B0503020204020204" pitchFamily="34" charset="-122"/>
                     <a:cs typeface="Arial" panose="020B0604020202020204" pitchFamily="34" charset="0"/>
                   </a:rPr>
-                  <a:t> if FVM coefficient and De-dimensiona</a:t>
-                </a:r>
-                <a:r>
-                  <a:rPr lang="en-US" b="1" dirty="0" smtClean="0">
-                    <a:latin typeface="Arial" panose="020B0604020202020204" pitchFamily="34" charset="0"/>
-                    <a:ea typeface="微软雅黑" panose="020B0503020204020204" pitchFamily="34" charset="-122"/>
-                    <a:cs typeface="Arial" panose="020B0604020202020204" pitchFamily="34" charset="0"/>
-                  </a:rPr>
-                  <a:t>l Operation is correct</a:t>
+                  <a:t> if FVM coefficient and De-dimensional Operation is correct</a:t>
                 </a:r>
                 <a:endParaRPr lang="en-US" b="1" dirty="0">
                   <a:latin typeface="Arial" panose="020B0604020202020204" pitchFamily="34" charset="0"/>
@@ -3923,7 +3921,7 @@
             </p:txBody>
           </p:sp>
         </mc:Choice>
-        <mc:Fallback>
+        <mc:Fallback xmlns="">
           <p:sp>
             <p:nvSpPr>
               <p:cNvPr id="11" name="矩形 10"/>
@@ -4050,8 +4048,8 @@
           </a:p>
         </p:txBody>
       </p:sp>
-      <mc:AlternateContent xmlns:mc="http://schemas.openxmlformats.org/markup-compatibility/2006">
-        <mc:Choice xmlns:a14="http://schemas.microsoft.com/office/drawing/2010/main" Requires="a14">
+      <mc:AlternateContent xmlns:mc="http://schemas.openxmlformats.org/markup-compatibility/2006" xmlns:a14="http://schemas.microsoft.com/office/drawing/2010/main">
+        <mc:Choice Requires="a14">
           <p:sp>
             <p:nvSpPr>
               <p:cNvPr id="17" name="矩形 16"/>
@@ -4073,6 +4071,7 @@
               </a:bodyPr>
               <a:lstStyle/>
               <a:p>
+                <a:pPr/>
                 <a14:m>
                   <m:oMathPara xmlns:m="http://schemas.openxmlformats.org/officeDocument/2006/math">
                     <m:oMathParaPr>
@@ -4241,7 +4240,7 @@
             </p:txBody>
           </p:sp>
         </mc:Choice>
-        <mc:Fallback>
+        <mc:Fallback xmlns="">
           <p:sp>
             <p:nvSpPr>
               <p:cNvPr id="17" name="矩形 16"/>
@@ -4280,8 +4279,8 @@
           </p:sp>
         </mc:Fallback>
       </mc:AlternateContent>
-      <mc:AlternateContent xmlns:mc="http://schemas.openxmlformats.org/markup-compatibility/2006">
-        <mc:Choice xmlns:a14="http://schemas.microsoft.com/office/drawing/2010/main" Requires="a14">
+      <mc:AlternateContent xmlns:mc="http://schemas.openxmlformats.org/markup-compatibility/2006" xmlns:a14="http://schemas.microsoft.com/office/drawing/2010/main">
+        <mc:Choice Requires="a14">
           <p:sp>
             <p:nvSpPr>
               <p:cNvPr id="18" name="矩形 17"/>
@@ -4303,6 +4302,7 @@
               </a:bodyPr>
               <a:lstStyle/>
               <a:p>
+                <a:pPr/>
                 <a14:m>
                   <m:oMathPara xmlns:m="http://schemas.openxmlformats.org/officeDocument/2006/math">
                     <m:oMathParaPr>
@@ -4473,7 +4473,7 @@
             </p:txBody>
           </p:sp>
         </mc:Choice>
-        <mc:Fallback>
+        <mc:Fallback xmlns="">
           <p:sp>
             <p:nvSpPr>
               <p:cNvPr id="18" name="矩形 17"/>
@@ -4552,8 +4552,8 @@
           </a:p>
         </p:txBody>
       </p:sp>
-      <mc:AlternateContent xmlns:mc="http://schemas.openxmlformats.org/markup-compatibility/2006">
-        <mc:Choice xmlns:a14="http://schemas.microsoft.com/office/drawing/2010/main" Requires="a14">
+      <mc:AlternateContent xmlns:mc="http://schemas.openxmlformats.org/markup-compatibility/2006" xmlns:a14="http://schemas.microsoft.com/office/drawing/2010/main">
+        <mc:Choice Requires="a14">
           <p:sp>
             <p:nvSpPr>
               <p:cNvPr id="20" name="矩形 19"/>
@@ -4575,6 +4575,7 @@
               </a:bodyPr>
               <a:lstStyle/>
               <a:p>
+                <a:pPr/>
                 <a14:m>
                   <m:oMathPara xmlns:m="http://schemas.openxmlformats.org/officeDocument/2006/math">
                     <m:oMathParaPr>
@@ -4797,7 +4798,7 @@
             </p:txBody>
           </p:sp>
         </mc:Choice>
-        <mc:Fallback>
+        <mc:Fallback xmlns="">
           <p:sp>
             <p:nvSpPr>
               <p:cNvPr id="20" name="矩形 19"/>
@@ -4944,8 +4945,8 @@
           </a:p>
         </p:txBody>
       </p:sp>
-      <mc:AlternateContent xmlns:mc="http://schemas.openxmlformats.org/markup-compatibility/2006">
-        <mc:Choice xmlns:a14="http://schemas.microsoft.com/office/drawing/2010/main" Requires="a14">
+      <mc:AlternateContent xmlns:mc="http://schemas.openxmlformats.org/markup-compatibility/2006" xmlns:a14="http://schemas.microsoft.com/office/drawing/2010/main">
+        <mc:Choice Requires="a14">
           <p:sp>
             <p:nvSpPr>
               <p:cNvPr id="6" name="矩形 5"/>
@@ -4973,23 +4974,7 @@
                     <a:ea typeface="微软雅黑" panose="020B0503020204020204" pitchFamily="34" charset="-122"/>
                     <a:cs typeface="Arial" panose="020B0604020202020204" pitchFamily="34" charset="0"/>
                   </a:rPr>
-                  <a:t>to verify </a:t>
-                </a:r>
-                <a:r>
-                  <a:rPr lang="en-US" b="1" dirty="0" smtClean="0">
-                    <a:latin typeface="Arial" panose="020B0604020202020204" pitchFamily="34" charset="0"/>
-                    <a:ea typeface="微软雅黑" panose="020B0503020204020204" pitchFamily="34" charset="-122"/>
-                    <a:cs typeface="Arial" panose="020B0604020202020204" pitchFamily="34" charset="0"/>
-                  </a:rPr>
-                  <a:t>the validity of </a:t>
-                </a:r>
-                <a:r>
-                  <a:rPr lang="en-US" b="1" dirty="0" smtClean="0">
-                    <a:latin typeface="Arial" panose="020B0604020202020204" pitchFamily="34" charset="0"/>
-                    <a:ea typeface="微软雅黑" panose="020B0503020204020204" pitchFamily="34" charset="-122"/>
-                    <a:cs typeface="Arial" panose="020B0604020202020204" pitchFamily="34" charset="0"/>
-                  </a:rPr>
-                  <a:t>the </a:t>
+                  <a:t>to verify the validity of the </a:t>
                 </a:r>
                 <a:r>
                   <a:rPr lang="en-US" b="1" dirty="0" err="1" smtClean="0">
@@ -5044,7 +5029,7 @@
             </p:txBody>
           </p:sp>
         </mc:Choice>
-        <mc:Fallback>
+        <mc:Fallback xmlns="">
           <p:sp>
             <p:nvSpPr>
               <p:cNvPr id="6" name="矩形 5"/>
@@ -5162,8 +5147,8 @@
           </a:p>
         </p:txBody>
       </p:sp>
-      <mc:AlternateContent xmlns:mc="http://schemas.openxmlformats.org/markup-compatibility/2006">
-        <mc:Choice xmlns:a14="http://schemas.microsoft.com/office/drawing/2010/main" Requires="a14">
+      <mc:AlternateContent xmlns:mc="http://schemas.openxmlformats.org/markup-compatibility/2006" xmlns:a14="http://schemas.microsoft.com/office/drawing/2010/main">
+        <mc:Choice Requires="a14">
           <p:sp>
             <p:nvSpPr>
               <p:cNvPr id="7" name="文本框 6"/>
@@ -5186,6 +5171,7 @@
               </a:bodyPr>
               <a:lstStyle/>
               <a:p>
+                <a:pPr/>
                 <a14:m>
                   <m:oMathPara xmlns:m="http://schemas.openxmlformats.org/officeDocument/2006/math">
                     <m:oMathParaPr>
@@ -5260,7 +5246,7 @@
             </p:txBody>
           </p:sp>
         </mc:Choice>
-        <mc:Fallback>
+        <mc:Fallback xmlns="">
           <p:sp>
             <p:nvSpPr>
               <p:cNvPr id="7" name="文本框 6"/>
@@ -5450,8 +5436,8 @@
           </a:p>
         </p:txBody>
       </p:sp>
-      <mc:AlternateContent xmlns:mc="http://schemas.openxmlformats.org/markup-compatibility/2006">
-        <mc:Choice xmlns:a14="http://schemas.microsoft.com/office/drawing/2010/main" Requires="a14">
+      <mc:AlternateContent xmlns:mc="http://schemas.openxmlformats.org/markup-compatibility/2006" xmlns:a14="http://schemas.microsoft.com/office/drawing/2010/main">
+        <mc:Choice Requires="a14">
           <p:sp>
             <p:nvSpPr>
               <p:cNvPr id="13" name="矩形 12"/>
@@ -5537,7 +5523,7 @@
             </p:txBody>
           </p:sp>
         </mc:Choice>
-        <mc:Fallback>
+        <mc:Fallback xmlns="">
           <p:sp>
             <p:nvSpPr>
               <p:cNvPr id="13" name="矩形 12"/>
@@ -5558,6 +5544,755 @@
                 <a:blip r:embed="rId8"/>
                 <a:stretch>
                   <a:fillRect t="-9836" r="-1250" b="-22951"/>
+                </a:stretch>
+              </a:blipFill>
+            </p:spPr>
+            <p:txBody>
+              <a:bodyPr/>
+              <a:lstStyle/>
+              <a:p>
+                <a:r>
+                  <a:rPr lang="en-US">
+                    <a:noFill/>
+                  </a:rPr>
+                  <a:t> </a:t>
+                </a:r>
+              </a:p>
+            </p:txBody>
+          </p:sp>
+        </mc:Fallback>
+      </mc:AlternateContent>
+      <mc:AlternateContent xmlns:mc="http://schemas.openxmlformats.org/markup-compatibility/2006">
+        <mc:Choice xmlns:a14="http://schemas.microsoft.com/office/drawing/2010/main" Requires="a14">
+          <p:sp>
+            <p:nvSpPr>
+              <p:cNvPr id="14" name="矩形 13"/>
+              <p:cNvSpPr/>
+              <p:nvPr/>
+            </p:nvSpPr>
+            <p:spPr>
+              <a:xfrm>
+                <a:off x="6210366" y="4600508"/>
+                <a:ext cx="1888466" cy="564835"/>
+              </a:xfrm>
+              <a:prstGeom prst="rect">
+                <a:avLst/>
+              </a:prstGeom>
+            </p:spPr>
+            <p:txBody>
+              <a:bodyPr wrap="none">
+                <a:spAutoFit/>
+              </a:bodyPr>
+              <a:lstStyle/>
+              <a:p>
+                <a:pPr/>
+                <a14:m>
+                  <m:oMathPara xmlns:m="http://schemas.openxmlformats.org/officeDocument/2006/math">
+                    <m:oMathParaPr>
+                      <m:jc m:val="centerGroup"/>
+                    </m:oMathParaPr>
+                    <m:oMath xmlns:m="http://schemas.openxmlformats.org/officeDocument/2006/math">
+                      <m:sSub>
+                        <m:sSubPr>
+                          <m:ctrlPr>
+                            <a:rPr lang="en-US" b="0" i="1" smtClean="0">
+                              <a:latin typeface="Cambria Math" panose="02040503050406030204" pitchFamily="18" charset="0"/>
+                            </a:rPr>
+                          </m:ctrlPr>
+                        </m:sSubPr>
+                        <m:e>
+                          <m:r>
+                            <a:rPr lang="en-US" b="0" i="1" smtClean="0">
+                              <a:latin typeface="Cambria Math" panose="02040503050406030204" pitchFamily="18" charset="0"/>
+                            </a:rPr>
+                            <m:t>𝑈</m:t>
+                          </m:r>
+                        </m:e>
+                        <m:sub>
+                          <m:r>
+                            <m:rPr>
+                              <m:sty m:val="p"/>
+                            </m:rPr>
+                            <a:rPr lang="en-US" b="0" i="0" smtClean="0">
+                              <a:latin typeface="Cambria Math" panose="02040503050406030204" pitchFamily="18" charset="0"/>
+                            </a:rPr>
+                            <m:t>Θ</m:t>
+                          </m:r>
+                          <m:r>
+                            <a:rPr lang="en-US" b="0" i="0" smtClean="0">
+                              <a:latin typeface="Cambria Math" panose="02040503050406030204" pitchFamily="18" charset="0"/>
+                            </a:rPr>
+                            <m:t>,</m:t>
+                          </m:r>
+                          <m:r>
+                            <m:rPr>
+                              <m:sty m:val="p"/>
+                            </m:rPr>
+                            <a:rPr lang="en-US" b="0" i="0" smtClean="0">
+                              <a:latin typeface="Cambria Math" panose="02040503050406030204" pitchFamily="18" charset="0"/>
+                            </a:rPr>
+                            <m:t>TH</m:t>
+                          </m:r>
+                        </m:sub>
+                      </m:sSub>
+                      <m:r>
+                        <a:rPr lang="en-US" b="0" i="1" smtClean="0">
+                          <a:latin typeface="Cambria Math" panose="02040503050406030204" pitchFamily="18" charset="0"/>
+                        </a:rPr>
+                        <m:t>=</m:t>
+                      </m:r>
+                      <m:f>
+                        <m:fPr>
+                          <m:ctrlPr>
+                            <a:rPr lang="en-US" b="0" i="1" smtClean="0">
+                              <a:latin typeface="Cambria Math" panose="02040503050406030204" pitchFamily="18" charset="0"/>
+                            </a:rPr>
+                          </m:ctrlPr>
+                        </m:fPr>
+                        <m:num>
+                          <m:sSub>
+                            <m:sSubPr>
+                              <m:ctrlPr>
+                                <a:rPr lang="en-US" b="0" i="1" smtClean="0">
+                                  <a:latin typeface="Cambria Math" panose="02040503050406030204" pitchFamily="18" charset="0"/>
+                                </a:rPr>
+                              </m:ctrlPr>
+                            </m:sSubPr>
+                            <m:e>
+                              <m:r>
+                                <a:rPr lang="en-US" b="0" i="1" smtClean="0">
+                                  <a:latin typeface="Cambria Math" panose="02040503050406030204" pitchFamily="18" charset="0"/>
+                                </a:rPr>
+                                <m:t>𝑐</m:t>
+                              </m:r>
+                            </m:e>
+                            <m:sub>
+                              <m:r>
+                                <a:rPr lang="en-US" b="0" i="1" smtClean="0">
+                                  <a:latin typeface="Cambria Math" panose="02040503050406030204" pitchFamily="18" charset="0"/>
+                                </a:rPr>
+                                <m:t>1</m:t>
+                              </m:r>
+                            </m:sub>
+                          </m:sSub>
+                        </m:num>
+                        <m:den>
+                          <m:acc>
+                            <m:accPr>
+                              <m:chr m:val="̂"/>
+                              <m:ctrlPr>
+                                <a:rPr lang="en-US" b="0" i="1" smtClean="0">
+                                  <a:latin typeface="Cambria Math" panose="02040503050406030204" pitchFamily="18" charset="0"/>
+                                </a:rPr>
+                              </m:ctrlPr>
+                            </m:accPr>
+                            <m:e>
+                              <m:r>
+                                <a:rPr lang="en-US" b="0" i="1" smtClean="0">
+                                  <a:latin typeface="Cambria Math" panose="02040503050406030204" pitchFamily="18" charset="0"/>
+                                </a:rPr>
+                                <m:t>𝑟</m:t>
+                              </m:r>
+                            </m:e>
+                          </m:acc>
+                        </m:den>
+                      </m:f>
+                      <m:r>
+                        <a:rPr lang="en-US" b="0" i="1" smtClean="0">
+                          <a:latin typeface="Cambria Math" panose="02040503050406030204" pitchFamily="18" charset="0"/>
+                        </a:rPr>
+                        <m:t>+</m:t>
+                      </m:r>
+                      <m:sSub>
+                        <m:sSubPr>
+                          <m:ctrlPr>
+                            <a:rPr lang="en-US" b="0" i="1" smtClean="0">
+                              <a:latin typeface="Cambria Math" panose="02040503050406030204" pitchFamily="18" charset="0"/>
+                            </a:rPr>
+                          </m:ctrlPr>
+                        </m:sSubPr>
+                        <m:e>
+                          <m:r>
+                            <a:rPr lang="en-US" b="0" i="1" smtClean="0">
+                              <a:latin typeface="Cambria Math" panose="02040503050406030204" pitchFamily="18" charset="0"/>
+                            </a:rPr>
+                            <m:t>𝑐</m:t>
+                          </m:r>
+                        </m:e>
+                        <m:sub>
+                          <m:r>
+                            <a:rPr lang="en-US" b="0" i="1" smtClean="0">
+                              <a:latin typeface="Cambria Math" panose="02040503050406030204" pitchFamily="18" charset="0"/>
+                            </a:rPr>
+                            <m:t>2</m:t>
+                          </m:r>
+                        </m:sub>
+                      </m:sSub>
+                      <m:acc>
+                        <m:accPr>
+                          <m:chr m:val="̂"/>
+                          <m:ctrlPr>
+                            <a:rPr lang="en-US" b="0" i="1" smtClean="0">
+                              <a:latin typeface="Cambria Math" panose="02040503050406030204" pitchFamily="18" charset="0"/>
+                            </a:rPr>
+                          </m:ctrlPr>
+                        </m:accPr>
+                        <m:e>
+                          <m:r>
+                            <a:rPr lang="en-US" b="0" i="1" smtClean="0">
+                              <a:latin typeface="Cambria Math" panose="02040503050406030204" pitchFamily="18" charset="0"/>
+                            </a:rPr>
+                            <m:t>𝑟</m:t>
+                          </m:r>
+                        </m:e>
+                      </m:acc>
+                    </m:oMath>
+                  </m:oMathPara>
+                </a14:m>
+                <a:endParaRPr lang="en-US" dirty="0"/>
+              </a:p>
+            </p:txBody>
+          </p:sp>
+        </mc:Choice>
+        <mc:Fallback>
+          <p:sp>
+            <p:nvSpPr>
+              <p:cNvPr id="14" name="矩形 13"/>
+              <p:cNvSpPr>
+                <a:spLocks noRot="1" noChangeAspect="1" noMove="1" noResize="1" noEditPoints="1" noAdjustHandles="1" noChangeArrowheads="1" noChangeShapeType="1" noTextEdit="1"/>
+              </p:cNvSpPr>
+              <p:nvPr/>
+            </p:nvSpPr>
+            <p:spPr>
+              <a:xfrm>
+                <a:off x="6210366" y="4600508"/>
+                <a:ext cx="1888466" cy="564835"/>
+              </a:xfrm>
+              <a:prstGeom prst="rect">
+                <a:avLst/>
+              </a:prstGeom>
+              <a:blipFill>
+                <a:blip r:embed="rId9"/>
+                <a:stretch>
+                  <a:fillRect/>
+                </a:stretch>
+              </a:blipFill>
+            </p:spPr>
+            <p:txBody>
+              <a:bodyPr/>
+              <a:lstStyle/>
+              <a:p>
+                <a:r>
+                  <a:rPr lang="en-US">
+                    <a:noFill/>
+                  </a:rPr>
+                  <a:t> </a:t>
+                </a:r>
+              </a:p>
+            </p:txBody>
+          </p:sp>
+        </mc:Fallback>
+      </mc:AlternateContent>
+      <mc:AlternateContent xmlns:mc="http://schemas.openxmlformats.org/markup-compatibility/2006">
+        <mc:Choice xmlns:a14="http://schemas.microsoft.com/office/drawing/2010/main" Requires="a14">
+          <p:sp>
+            <p:nvSpPr>
+              <p:cNvPr id="17" name="矩形 16"/>
+              <p:cNvSpPr/>
+              <p:nvPr/>
+            </p:nvSpPr>
+            <p:spPr>
+              <a:xfrm>
+                <a:off x="7680508" y="5165985"/>
+                <a:ext cx="1597617" cy="708207"/>
+              </a:xfrm>
+              <a:prstGeom prst="rect">
+                <a:avLst/>
+              </a:prstGeom>
+            </p:spPr>
+            <p:txBody>
+              <a:bodyPr wrap="none">
+                <a:spAutoFit/>
+              </a:bodyPr>
+              <a:lstStyle/>
+              <a:p>
+                <a:pPr/>
+                <a14:m>
+                  <m:oMathPara xmlns:m="http://schemas.openxmlformats.org/officeDocument/2006/math">
+                    <m:oMathParaPr>
+                      <m:jc m:val="centerGroup"/>
+                    </m:oMathParaPr>
+                    <m:oMath xmlns:m="http://schemas.openxmlformats.org/officeDocument/2006/math">
+                      <m:sSub>
+                        <m:sSubPr>
+                          <m:ctrlPr>
+                            <a:rPr lang="en-US" b="0" i="1" smtClean="0">
+                              <a:latin typeface="Cambria Math" panose="02040503050406030204" pitchFamily="18" charset="0"/>
+                            </a:rPr>
+                          </m:ctrlPr>
+                        </m:sSubPr>
+                        <m:e>
+                          <m:r>
+                            <a:rPr lang="en-US" b="0" i="1" smtClean="0">
+                              <a:latin typeface="Cambria Math" panose="02040503050406030204" pitchFamily="18" charset="0"/>
+                            </a:rPr>
+                            <m:t>𝑐</m:t>
+                          </m:r>
+                        </m:e>
+                        <m:sub>
+                          <m:r>
+                            <a:rPr lang="en-US" b="0" i="1" smtClean="0">
+                              <a:latin typeface="Cambria Math" panose="02040503050406030204" pitchFamily="18" charset="0"/>
+                            </a:rPr>
+                            <m:t>1</m:t>
+                          </m:r>
+                        </m:sub>
+                      </m:sSub>
+                      <m:r>
+                        <a:rPr lang="en-US" b="0" i="1" smtClean="0">
+                          <a:latin typeface="Cambria Math" panose="02040503050406030204" pitchFamily="18" charset="0"/>
+                        </a:rPr>
+                        <m:t>=</m:t>
+                      </m:r>
+                      <m:f>
+                        <m:fPr>
+                          <m:ctrlPr>
+                            <a:rPr lang="en-US" b="0" i="1" smtClean="0">
+                              <a:latin typeface="Cambria Math" panose="02040503050406030204" pitchFamily="18" charset="0"/>
+                            </a:rPr>
+                          </m:ctrlPr>
+                        </m:fPr>
+                        <m:num>
+                          <m:r>
+                            <m:rPr>
+                              <m:sty m:val="p"/>
+                            </m:rPr>
+                            <a:rPr lang="en-US" b="0" i="0" smtClean="0">
+                              <a:latin typeface="Cambria Math" panose="02040503050406030204" pitchFamily="18" charset="0"/>
+                            </a:rPr>
+                            <m:t>Δ</m:t>
+                          </m:r>
+                          <m:r>
+                            <a:rPr lang="en-US" b="0" i="1" smtClean="0">
+                              <a:latin typeface="Cambria Math" panose="02040503050406030204" pitchFamily="18" charset="0"/>
+                            </a:rPr>
+                            <m:t>𝑅</m:t>
+                          </m:r>
+                          <m:sSub>
+                            <m:sSubPr>
+                              <m:ctrlPr>
+                                <a:rPr lang="en-US" b="0" i="1" smtClean="0">
+                                  <a:latin typeface="Cambria Math" panose="02040503050406030204" pitchFamily="18" charset="0"/>
+                                </a:rPr>
+                              </m:ctrlPr>
+                            </m:sSubPr>
+                            <m:e>
+                              <m:r>
+                                <a:rPr lang="en-US" b="0" i="1" smtClean="0">
+                                  <a:latin typeface="Cambria Math" panose="02040503050406030204" pitchFamily="18" charset="0"/>
+                                </a:rPr>
+                                <m:t>𝑅</m:t>
+                              </m:r>
+                            </m:e>
+                            <m:sub>
+                              <m:r>
+                                <a:rPr lang="en-US" b="0" i="1" smtClean="0">
+                                  <a:latin typeface="Cambria Math" panose="02040503050406030204" pitchFamily="18" charset="0"/>
+                                </a:rPr>
+                                <m:t>𝑠</m:t>
+                              </m:r>
+                            </m:sub>
+                          </m:sSub>
+                        </m:num>
+                        <m:den>
+                          <m:sSubSup>
+                            <m:sSubSupPr>
+                              <m:ctrlPr>
+                                <a:rPr lang="en-US" b="0" i="1" smtClean="0">
+                                  <a:latin typeface="Cambria Math" panose="02040503050406030204" pitchFamily="18" charset="0"/>
+                                </a:rPr>
+                              </m:ctrlPr>
+                            </m:sSubSupPr>
+                            <m:e>
+                              <m:r>
+                                <a:rPr lang="en-US" b="0" i="1" smtClean="0">
+                                  <a:latin typeface="Cambria Math" panose="02040503050406030204" pitchFamily="18" charset="0"/>
+                                </a:rPr>
+                                <m:t>𝑅</m:t>
+                              </m:r>
+                            </m:e>
+                            <m:sub>
+                              <m:r>
+                                <a:rPr lang="en-US" b="0" i="1" smtClean="0">
+                                  <a:latin typeface="Cambria Math" panose="02040503050406030204" pitchFamily="18" charset="0"/>
+                                </a:rPr>
+                                <m:t>𝑠</m:t>
+                              </m:r>
+                            </m:sub>
+                            <m:sup>
+                              <m:r>
+                                <a:rPr lang="en-US" b="0" i="1" smtClean="0">
+                                  <a:latin typeface="Cambria Math" panose="02040503050406030204" pitchFamily="18" charset="0"/>
+                                </a:rPr>
+                                <m:t>2</m:t>
+                              </m:r>
+                            </m:sup>
+                          </m:sSubSup>
+                          <m:r>
+                            <a:rPr lang="en-US" b="0" i="1" smtClean="0">
+                              <a:latin typeface="Cambria Math" panose="02040503050406030204" pitchFamily="18" charset="0"/>
+                            </a:rPr>
+                            <m:t>−</m:t>
+                          </m:r>
+                          <m:sSubSup>
+                            <m:sSubSupPr>
+                              <m:ctrlPr>
+                                <a:rPr lang="en-US" b="0" i="1" smtClean="0">
+                                  <a:latin typeface="Cambria Math" panose="02040503050406030204" pitchFamily="18" charset="0"/>
+                                </a:rPr>
+                              </m:ctrlPr>
+                            </m:sSubSupPr>
+                            <m:e>
+                              <m:r>
+                                <a:rPr lang="en-US" b="0" i="1" smtClean="0">
+                                  <a:latin typeface="Cambria Math" panose="02040503050406030204" pitchFamily="18" charset="0"/>
+                                </a:rPr>
+                                <m:t>𝑅</m:t>
+                              </m:r>
+                            </m:e>
+                            <m:sub>
+                              <m:r>
+                                <a:rPr lang="en-US" b="0" i="1" smtClean="0">
+                                  <a:latin typeface="Cambria Math" panose="02040503050406030204" pitchFamily="18" charset="0"/>
+                                </a:rPr>
+                                <m:t>h</m:t>
+                              </m:r>
+                            </m:sub>
+                            <m:sup>
+                              <m:r>
+                                <a:rPr lang="en-US" b="0" i="1" smtClean="0">
+                                  <a:latin typeface="Cambria Math" panose="02040503050406030204" pitchFamily="18" charset="0"/>
+                                </a:rPr>
+                                <m:t>2</m:t>
+                              </m:r>
+                            </m:sup>
+                          </m:sSubSup>
+                        </m:den>
+                      </m:f>
+                    </m:oMath>
+                  </m:oMathPara>
+                </a14:m>
+                <a:endParaRPr lang="en-US" dirty="0"/>
+              </a:p>
+            </p:txBody>
+          </p:sp>
+        </mc:Choice>
+        <mc:Fallback>
+          <p:sp>
+            <p:nvSpPr>
+              <p:cNvPr id="17" name="矩形 16"/>
+              <p:cNvSpPr>
+                <a:spLocks noRot="1" noChangeAspect="1" noMove="1" noResize="1" noEditPoints="1" noAdjustHandles="1" noChangeArrowheads="1" noChangeShapeType="1" noTextEdit="1"/>
+              </p:cNvSpPr>
+              <p:nvPr/>
+            </p:nvSpPr>
+            <p:spPr>
+              <a:xfrm>
+                <a:off x="7680508" y="5165985"/>
+                <a:ext cx="1597617" cy="708207"/>
+              </a:xfrm>
+              <a:prstGeom prst="rect">
+                <a:avLst/>
+              </a:prstGeom>
+              <a:blipFill>
+                <a:blip r:embed="rId10"/>
+                <a:stretch>
+                  <a:fillRect/>
+                </a:stretch>
+              </a:blipFill>
+            </p:spPr>
+            <p:txBody>
+              <a:bodyPr/>
+              <a:lstStyle/>
+              <a:p>
+                <a:r>
+                  <a:rPr lang="en-US">
+                    <a:noFill/>
+                  </a:rPr>
+                  <a:t> </a:t>
+                </a:r>
+              </a:p>
+            </p:txBody>
+          </p:sp>
+        </mc:Fallback>
+      </mc:AlternateContent>
+      <mc:AlternateContent xmlns:mc="http://schemas.openxmlformats.org/markup-compatibility/2006">
+        <mc:Choice xmlns:a14="http://schemas.microsoft.com/office/drawing/2010/main" Requires="a14">
+          <p:sp>
+            <p:nvSpPr>
+              <p:cNvPr id="18" name="矩形 17"/>
+              <p:cNvSpPr/>
+              <p:nvPr/>
+            </p:nvSpPr>
+            <p:spPr>
+              <a:xfrm>
+                <a:off x="9181652" y="5076327"/>
+                <a:ext cx="1875770" cy="726353"/>
+              </a:xfrm>
+              <a:prstGeom prst="rect">
+                <a:avLst/>
+              </a:prstGeom>
+            </p:spPr>
+            <p:txBody>
+              <a:bodyPr wrap="none">
+                <a:spAutoFit/>
+              </a:bodyPr>
+              <a:lstStyle/>
+              <a:p>
+                <a:pPr/>
+                <a14:m>
+                  <m:oMathPara xmlns:m="http://schemas.openxmlformats.org/officeDocument/2006/math">
+                    <m:oMathParaPr>
+                      <m:jc m:val="centerGroup"/>
+                    </m:oMathParaPr>
+                    <m:oMath xmlns:m="http://schemas.openxmlformats.org/officeDocument/2006/math">
+                      <m:sSub>
+                        <m:sSubPr>
+                          <m:ctrlPr>
+                            <a:rPr lang="en-US" b="0" i="1" smtClean="0">
+                              <a:latin typeface="Cambria Math" panose="02040503050406030204" pitchFamily="18" charset="0"/>
+                            </a:rPr>
+                          </m:ctrlPr>
+                        </m:sSubPr>
+                        <m:e>
+                          <m:r>
+                            <a:rPr lang="en-US" b="0" i="1" smtClean="0">
+                              <a:latin typeface="Cambria Math" panose="02040503050406030204" pitchFamily="18" charset="0"/>
+                            </a:rPr>
+                            <m:t>𝑐</m:t>
+                          </m:r>
+                        </m:e>
+                        <m:sub>
+                          <m:r>
+                            <a:rPr lang="en-US" b="0" i="1" smtClean="0">
+                              <a:latin typeface="Cambria Math" panose="02040503050406030204" pitchFamily="18" charset="0"/>
+                            </a:rPr>
+                            <m:t>2</m:t>
+                          </m:r>
+                        </m:sub>
+                      </m:sSub>
+                      <m:r>
+                        <a:rPr lang="en-US" b="0" i="1" smtClean="0">
+                          <a:latin typeface="Cambria Math" panose="02040503050406030204" pitchFamily="18" charset="0"/>
+                        </a:rPr>
+                        <m:t>=</m:t>
+                      </m:r>
+                      <m:f>
+                        <m:fPr>
+                          <m:ctrlPr>
+                            <a:rPr lang="en-US" b="0" i="1" smtClean="0">
+                              <a:latin typeface="Cambria Math" panose="02040503050406030204" pitchFamily="18" charset="0"/>
+                            </a:rPr>
+                          </m:ctrlPr>
+                        </m:fPr>
+                        <m:num>
+                          <m:r>
+                            <a:rPr lang="en-US" b="0" i="1" smtClean="0">
+                              <a:latin typeface="Cambria Math" panose="02040503050406030204" pitchFamily="18" charset="0"/>
+                            </a:rPr>
+                            <m:t>1</m:t>
+                          </m:r>
+                        </m:num>
+                        <m:den>
+                          <m:r>
+                            <m:rPr>
+                              <m:sty m:val="p"/>
+                            </m:rPr>
+                            <a:rPr lang="en-US" b="0" i="0" smtClean="0">
+                              <a:latin typeface="Cambria Math" panose="02040503050406030204" pitchFamily="18" charset="0"/>
+                            </a:rPr>
+                            <m:t>Δ</m:t>
+                          </m:r>
+                          <m:r>
+                            <a:rPr lang="en-US" b="0" i="1" smtClean="0">
+                              <a:latin typeface="Cambria Math" panose="02040503050406030204" pitchFamily="18" charset="0"/>
+                            </a:rPr>
+                            <m:t>𝑅</m:t>
+                          </m:r>
+                        </m:den>
+                      </m:f>
+                      <m:f>
+                        <m:fPr>
+                          <m:ctrlPr>
+                            <a:rPr lang="en-US" b="0" i="1" smtClean="0">
+                              <a:latin typeface="Cambria Math" panose="02040503050406030204" pitchFamily="18" charset="0"/>
+                            </a:rPr>
+                          </m:ctrlPr>
+                        </m:fPr>
+                        <m:num>
+                          <m:sSub>
+                            <m:sSubPr>
+                              <m:ctrlPr>
+                                <a:rPr lang="en-US" b="0" i="1" smtClean="0">
+                                  <a:latin typeface="Cambria Math" panose="02040503050406030204" pitchFamily="18" charset="0"/>
+                                </a:rPr>
+                              </m:ctrlPr>
+                            </m:sSubPr>
+                            <m:e>
+                              <m:r>
+                                <a:rPr lang="en-US" b="0" i="1" smtClean="0">
+                                  <a:latin typeface="Cambria Math" panose="02040503050406030204" pitchFamily="18" charset="0"/>
+                                </a:rPr>
+                                <m:t>𝑅</m:t>
+                              </m:r>
+                            </m:e>
+                            <m:sub>
+                              <m:r>
+                                <a:rPr lang="en-US" b="0" i="1" smtClean="0">
+                                  <a:latin typeface="Cambria Math" panose="02040503050406030204" pitchFamily="18" charset="0"/>
+                                </a:rPr>
+                                <m:t>𝑠</m:t>
+                              </m:r>
+                            </m:sub>
+                          </m:sSub>
+                          <m:sSubSup>
+                            <m:sSubSupPr>
+                              <m:ctrlPr>
+                                <a:rPr lang="en-US" b="0" i="1" smtClean="0">
+                                  <a:latin typeface="Cambria Math" panose="02040503050406030204" pitchFamily="18" charset="0"/>
+                                </a:rPr>
+                              </m:ctrlPr>
+                            </m:sSubSupPr>
+                            <m:e>
+                              <m:r>
+                                <a:rPr lang="en-US" b="0" i="1" smtClean="0">
+                                  <a:latin typeface="Cambria Math" panose="02040503050406030204" pitchFamily="18" charset="0"/>
+                                </a:rPr>
+                                <m:t>𝑅</m:t>
+                              </m:r>
+                            </m:e>
+                            <m:sub>
+                              <m:r>
+                                <a:rPr lang="en-US" b="0" i="1" smtClean="0">
+                                  <a:latin typeface="Cambria Math" panose="02040503050406030204" pitchFamily="18" charset="0"/>
+                                </a:rPr>
+                                <m:t>h</m:t>
+                              </m:r>
+                            </m:sub>
+                            <m:sup>
+                              <m:r>
+                                <a:rPr lang="en-US" b="0" i="1" smtClean="0">
+                                  <a:latin typeface="Cambria Math" panose="02040503050406030204" pitchFamily="18" charset="0"/>
+                                </a:rPr>
+                                <m:t>2</m:t>
+                              </m:r>
+                            </m:sup>
+                          </m:sSubSup>
+                        </m:num>
+                        <m:den>
+                          <m:sSubSup>
+                            <m:sSubSupPr>
+                              <m:ctrlPr>
+                                <a:rPr lang="en-US" b="0" i="1" smtClean="0">
+                                  <a:latin typeface="Cambria Math" panose="02040503050406030204" pitchFamily="18" charset="0"/>
+                                </a:rPr>
+                              </m:ctrlPr>
+                            </m:sSubSupPr>
+                            <m:e>
+                              <m:r>
+                                <a:rPr lang="en-US" b="0" i="1" smtClean="0">
+                                  <a:latin typeface="Cambria Math" panose="02040503050406030204" pitchFamily="18" charset="0"/>
+                                </a:rPr>
+                                <m:t>𝑅</m:t>
+                              </m:r>
+                            </m:e>
+                            <m:sub>
+                              <m:r>
+                                <a:rPr lang="en-US" b="0" i="1" smtClean="0">
+                                  <a:latin typeface="Cambria Math" panose="02040503050406030204" pitchFamily="18" charset="0"/>
+                                </a:rPr>
+                                <m:t>𝑠</m:t>
+                              </m:r>
+                            </m:sub>
+                            <m:sup>
+                              <m:r>
+                                <a:rPr lang="en-US" b="0" i="1" smtClean="0">
+                                  <a:latin typeface="Cambria Math" panose="02040503050406030204" pitchFamily="18" charset="0"/>
+                                </a:rPr>
+                                <m:t>2</m:t>
+                              </m:r>
+                            </m:sup>
+                          </m:sSubSup>
+                          <m:r>
+                            <a:rPr lang="en-US" b="0" i="1" smtClean="0">
+                              <a:latin typeface="Cambria Math" panose="02040503050406030204" pitchFamily="18" charset="0"/>
+                            </a:rPr>
+                            <m:t>−</m:t>
+                          </m:r>
+                          <m:sSubSup>
+                            <m:sSubSupPr>
+                              <m:ctrlPr>
+                                <a:rPr lang="en-US" b="0" i="1" smtClean="0">
+                                  <a:latin typeface="Cambria Math" panose="02040503050406030204" pitchFamily="18" charset="0"/>
+                                </a:rPr>
+                              </m:ctrlPr>
+                            </m:sSubSupPr>
+                            <m:e>
+                              <m:r>
+                                <a:rPr lang="en-US" b="0" i="1" smtClean="0">
+                                  <a:latin typeface="Cambria Math" panose="02040503050406030204" pitchFamily="18" charset="0"/>
+                                </a:rPr>
+                                <m:t>𝑅</m:t>
+                              </m:r>
+                            </m:e>
+                            <m:sub>
+                              <m:r>
+                                <a:rPr lang="en-US" b="0" i="1" smtClean="0">
+                                  <a:latin typeface="Cambria Math" panose="02040503050406030204" pitchFamily="18" charset="0"/>
+                                </a:rPr>
+                                <m:t>h</m:t>
+                              </m:r>
+                            </m:sub>
+                            <m:sup>
+                              <m:r>
+                                <a:rPr lang="en-US" b="0" i="1" smtClean="0">
+                                  <a:latin typeface="Cambria Math" panose="02040503050406030204" pitchFamily="18" charset="0"/>
+                                </a:rPr>
+                                <m:t>2</m:t>
+                              </m:r>
+                            </m:sup>
+                          </m:sSubSup>
+                        </m:den>
+                      </m:f>
+                    </m:oMath>
+                  </m:oMathPara>
+                </a14:m>
+                <a:endParaRPr lang="en-US" dirty="0"/>
+              </a:p>
+            </p:txBody>
+          </p:sp>
+        </mc:Choice>
+        <mc:Fallback>
+          <p:sp>
+            <p:nvSpPr>
+              <p:cNvPr id="18" name="矩形 17"/>
+              <p:cNvSpPr>
+                <a:spLocks noRot="1" noChangeAspect="1" noMove="1" noResize="1" noEditPoints="1" noAdjustHandles="1" noChangeArrowheads="1" noChangeShapeType="1" noTextEdit="1"/>
+              </p:cNvSpPr>
+              <p:nvPr/>
+            </p:nvSpPr>
+            <p:spPr>
+              <a:xfrm>
+                <a:off x="9181652" y="5076327"/>
+                <a:ext cx="1875770" cy="726353"/>
+              </a:xfrm>
+              <a:prstGeom prst="rect">
+                <a:avLst/>
+              </a:prstGeom>
+              <a:blipFill>
+                <a:blip r:embed="rId11"/>
+                <a:stretch>
+                  <a:fillRect/>
                 </a:stretch>
               </a:blipFill>
             </p:spPr>

--- a/CylindericalCoordinates/KeyResults.pptx
+++ b/CylindericalCoordinates/KeyResults.pptx
@@ -5,11 +5,13 @@
     <p:sldMasterId id="2147483648" r:id="rId1"/>
   </p:sldMasterIdLst>
   <p:notesMasterIdLst>
-    <p:notesMasterId r:id="rId4"/>
+    <p:notesMasterId r:id="rId6"/>
   </p:notesMasterIdLst>
   <p:sldIdLst>
     <p:sldId id="256" r:id="rId2"/>
     <p:sldId id="257" r:id="rId3"/>
+    <p:sldId id="258" r:id="rId4"/>
+    <p:sldId id="259" r:id="rId5"/>
   </p:sldIdLst>
   <p:sldSz cx="12192000" cy="6858000"/>
   <p:notesSz cx="6858000" cy="9144000"/>
@@ -198,7 +200,7 @@
           <a:p>
             <a:fld id="{6FD21F14-B943-4974-AF6C-853DF08CC6F6}" type="datetimeFigureOut">
               <a:rPr lang="en-US" smtClean="0"/>
-              <a:t>4/13/2026</a:t>
+              <a:t>4/14/2026</a:t>
             </a:fld>
             <a:endParaRPr lang="en-US"/>
           </a:p>
@@ -550,6 +552,174 @@
 </p:notes>
 </file>
 
+<file path=ppt/notesSlides/notesSlide2.xml><?xml version="1.0" encoding="utf-8"?>
+<p:notes xmlns:a="http://schemas.openxmlformats.org/drawingml/2006/main" xmlns:r="http://schemas.openxmlformats.org/officeDocument/2006/relationships" xmlns:p="http://schemas.openxmlformats.org/presentationml/2006/main">
+  <p:cSld>
+    <p:spTree>
+      <p:nvGrpSpPr>
+        <p:cNvPr id="1" name=""/>
+        <p:cNvGrpSpPr/>
+        <p:nvPr/>
+      </p:nvGrpSpPr>
+      <p:grpSpPr>
+        <a:xfrm>
+          <a:off x="0" y="0"/>
+          <a:ext cx="0" cy="0"/>
+          <a:chOff x="0" y="0"/>
+          <a:chExt cx="0" cy="0"/>
+        </a:xfrm>
+      </p:grpSpPr>
+      <p:sp>
+        <p:nvSpPr>
+          <p:cNvPr id="2" name="幻灯片图像占位符 1"/>
+          <p:cNvSpPr>
+            <a:spLocks noGrp="1" noRot="1" noChangeAspect="1"/>
+          </p:cNvSpPr>
+          <p:nvPr>
+            <p:ph type="sldImg"/>
+          </p:nvPr>
+        </p:nvSpPr>
+        <p:spPr/>
+      </p:sp>
+      <p:sp>
+        <p:nvSpPr>
+          <p:cNvPr id="3" name="备注占位符 2"/>
+          <p:cNvSpPr>
+            <a:spLocks noGrp="1"/>
+          </p:cNvSpPr>
+          <p:nvPr>
+            <p:ph type="body" idx="1"/>
+          </p:nvPr>
+        </p:nvSpPr>
+        <p:spPr/>
+        <p:txBody>
+          <a:bodyPr/>
+          <a:lstStyle/>
+          <a:p>
+            <a:endParaRPr lang="en-US" dirty="0"/>
+          </a:p>
+        </p:txBody>
+      </p:sp>
+      <p:sp>
+        <p:nvSpPr>
+          <p:cNvPr id="4" name="灯片编号占位符 3"/>
+          <p:cNvSpPr>
+            <a:spLocks noGrp="1"/>
+          </p:cNvSpPr>
+          <p:nvPr>
+            <p:ph type="sldNum" sz="quarter" idx="10"/>
+          </p:nvPr>
+        </p:nvSpPr>
+        <p:spPr/>
+        <p:txBody>
+          <a:bodyPr/>
+          <a:lstStyle/>
+          <a:p>
+            <a:fld id="{CBC3B015-18F1-43D5-A014-E13F769175C4}" type="slidenum">
+              <a:rPr lang="en-US" smtClean="0"/>
+              <a:t>2</a:t>
+            </a:fld>
+            <a:endParaRPr lang="en-US"/>
+          </a:p>
+        </p:txBody>
+      </p:sp>
+    </p:spTree>
+    <p:extLst>
+      <p:ext uri="{BB962C8B-B14F-4D97-AF65-F5344CB8AC3E}">
+        <p14:creationId xmlns:p14="http://schemas.microsoft.com/office/powerpoint/2010/main" val="2723734591"/>
+      </p:ext>
+    </p:extLst>
+  </p:cSld>
+  <p:clrMapOvr>
+    <a:masterClrMapping/>
+  </p:clrMapOvr>
+</p:notes>
+</file>
+
+<file path=ppt/notesSlides/notesSlide3.xml><?xml version="1.0" encoding="utf-8"?>
+<p:notes xmlns:a="http://schemas.openxmlformats.org/drawingml/2006/main" xmlns:r="http://schemas.openxmlformats.org/officeDocument/2006/relationships" xmlns:p="http://schemas.openxmlformats.org/presentationml/2006/main">
+  <p:cSld>
+    <p:spTree>
+      <p:nvGrpSpPr>
+        <p:cNvPr id="1" name=""/>
+        <p:cNvGrpSpPr/>
+        <p:nvPr/>
+      </p:nvGrpSpPr>
+      <p:grpSpPr>
+        <a:xfrm>
+          <a:off x="0" y="0"/>
+          <a:ext cx="0" cy="0"/>
+          <a:chOff x="0" y="0"/>
+          <a:chExt cx="0" cy="0"/>
+        </a:xfrm>
+      </p:grpSpPr>
+      <p:sp>
+        <p:nvSpPr>
+          <p:cNvPr id="2" name="幻灯片图像占位符 1"/>
+          <p:cNvSpPr>
+            <a:spLocks noGrp="1" noRot="1" noChangeAspect="1"/>
+          </p:cNvSpPr>
+          <p:nvPr>
+            <p:ph type="sldImg"/>
+          </p:nvPr>
+        </p:nvSpPr>
+        <p:spPr/>
+      </p:sp>
+      <p:sp>
+        <p:nvSpPr>
+          <p:cNvPr id="3" name="备注占位符 2"/>
+          <p:cNvSpPr>
+            <a:spLocks noGrp="1"/>
+          </p:cNvSpPr>
+          <p:nvPr>
+            <p:ph type="body" idx="1"/>
+          </p:nvPr>
+        </p:nvSpPr>
+        <p:spPr/>
+        <p:txBody>
+          <a:bodyPr/>
+          <a:lstStyle/>
+          <a:p>
+            <a:endParaRPr lang="en-US" dirty="0"/>
+          </a:p>
+        </p:txBody>
+      </p:sp>
+      <p:sp>
+        <p:nvSpPr>
+          <p:cNvPr id="4" name="灯片编号占位符 3"/>
+          <p:cNvSpPr>
+            <a:spLocks noGrp="1"/>
+          </p:cNvSpPr>
+          <p:nvPr>
+            <p:ph type="sldNum" sz="quarter" idx="10"/>
+          </p:nvPr>
+        </p:nvSpPr>
+        <p:spPr/>
+        <p:txBody>
+          <a:bodyPr/>
+          <a:lstStyle/>
+          <a:p>
+            <a:fld id="{CBC3B015-18F1-43D5-A014-E13F769175C4}" type="slidenum">
+              <a:rPr lang="en-US" smtClean="0"/>
+              <a:t>3</a:t>
+            </a:fld>
+            <a:endParaRPr lang="en-US"/>
+          </a:p>
+        </p:txBody>
+      </p:sp>
+    </p:spTree>
+    <p:extLst>
+      <p:ext uri="{BB962C8B-B14F-4D97-AF65-F5344CB8AC3E}">
+        <p14:creationId xmlns:p14="http://schemas.microsoft.com/office/powerpoint/2010/main" val="4131133183"/>
+      </p:ext>
+    </p:extLst>
+  </p:cSld>
+  <p:clrMapOvr>
+    <a:masterClrMapping/>
+  </p:clrMapOvr>
+</p:notes>
+</file>
+
 <file path=ppt/slideLayouts/slideLayout1.xml><?xml version="1.0" encoding="utf-8"?>
 <p:sldLayout xmlns:a="http://schemas.openxmlformats.org/drawingml/2006/main" xmlns:r="http://schemas.openxmlformats.org/officeDocument/2006/relationships" xmlns:p="http://schemas.openxmlformats.org/presentationml/2006/main" type="title" preserve="1">
   <p:cSld name="标题幻灯片">
@@ -681,7 +851,7 @@
           <a:p>
             <a:fld id="{D11745D4-1722-44D0-992A-94FF939BE44E}" type="datetimeFigureOut">
               <a:rPr lang="en-US" smtClean="0"/>
-              <a:t>4/13/2026</a:t>
+              <a:t>4/14/2026</a:t>
             </a:fld>
             <a:endParaRPr lang="en-US"/>
           </a:p>
@@ -851,7 +1021,7 @@
           <a:p>
             <a:fld id="{D11745D4-1722-44D0-992A-94FF939BE44E}" type="datetimeFigureOut">
               <a:rPr lang="en-US" smtClean="0"/>
-              <a:t>4/13/2026</a:t>
+              <a:t>4/14/2026</a:t>
             </a:fld>
             <a:endParaRPr lang="en-US"/>
           </a:p>
@@ -1031,7 +1201,7 @@
           <a:p>
             <a:fld id="{D11745D4-1722-44D0-992A-94FF939BE44E}" type="datetimeFigureOut">
               <a:rPr lang="en-US" smtClean="0"/>
-              <a:t>4/13/2026</a:t>
+              <a:t>4/14/2026</a:t>
             </a:fld>
             <a:endParaRPr lang="en-US"/>
           </a:p>
@@ -1201,7 +1371,7 @@
           <a:p>
             <a:fld id="{D11745D4-1722-44D0-992A-94FF939BE44E}" type="datetimeFigureOut">
               <a:rPr lang="en-US" smtClean="0"/>
-              <a:t>4/13/2026</a:t>
+              <a:t>4/14/2026</a:t>
             </a:fld>
             <a:endParaRPr lang="en-US"/>
           </a:p>
@@ -1447,7 +1617,7 @@
           <a:p>
             <a:fld id="{D11745D4-1722-44D0-992A-94FF939BE44E}" type="datetimeFigureOut">
               <a:rPr lang="en-US" smtClean="0"/>
-              <a:t>4/13/2026</a:t>
+              <a:t>4/14/2026</a:t>
             </a:fld>
             <a:endParaRPr lang="en-US"/>
           </a:p>
@@ -1679,7 +1849,7 @@
           <a:p>
             <a:fld id="{D11745D4-1722-44D0-992A-94FF939BE44E}" type="datetimeFigureOut">
               <a:rPr lang="en-US" smtClean="0"/>
-              <a:t>4/13/2026</a:t>
+              <a:t>4/14/2026</a:t>
             </a:fld>
             <a:endParaRPr lang="en-US"/>
           </a:p>
@@ -2046,7 +2216,7 @@
           <a:p>
             <a:fld id="{D11745D4-1722-44D0-992A-94FF939BE44E}" type="datetimeFigureOut">
               <a:rPr lang="en-US" smtClean="0"/>
-              <a:t>4/13/2026</a:t>
+              <a:t>4/14/2026</a:t>
             </a:fld>
             <a:endParaRPr lang="en-US"/>
           </a:p>
@@ -2164,7 +2334,7 @@
           <a:p>
             <a:fld id="{D11745D4-1722-44D0-992A-94FF939BE44E}" type="datetimeFigureOut">
               <a:rPr lang="en-US" smtClean="0"/>
-              <a:t>4/13/2026</a:t>
+              <a:t>4/14/2026</a:t>
             </a:fld>
             <a:endParaRPr lang="en-US"/>
           </a:p>
@@ -2259,7 +2429,7 @@
           <a:p>
             <a:fld id="{D11745D4-1722-44D0-992A-94FF939BE44E}" type="datetimeFigureOut">
               <a:rPr lang="en-US" smtClean="0"/>
-              <a:t>4/13/2026</a:t>
+              <a:t>4/14/2026</a:t>
             </a:fld>
             <a:endParaRPr lang="en-US"/>
           </a:p>
@@ -2536,7 +2706,7 @@
           <a:p>
             <a:fld id="{D11745D4-1722-44D0-992A-94FF939BE44E}" type="datetimeFigureOut">
               <a:rPr lang="en-US" smtClean="0"/>
-              <a:t>4/13/2026</a:t>
+              <a:t>4/14/2026</a:t>
             </a:fld>
             <a:endParaRPr lang="en-US"/>
           </a:p>
@@ -2789,7 +2959,7 @@
           <a:p>
             <a:fld id="{D11745D4-1722-44D0-992A-94FF939BE44E}" type="datetimeFigureOut">
               <a:rPr lang="en-US" smtClean="0"/>
-              <a:t>4/13/2026</a:t>
+              <a:t>4/14/2026</a:t>
             </a:fld>
             <a:endParaRPr lang="en-US"/>
           </a:p>
@@ -3002,7 +3172,7 @@
           <a:p>
             <a:fld id="{D11745D4-1722-44D0-992A-94FF939BE44E}" type="datetimeFigureOut">
               <a:rPr lang="en-US" smtClean="0"/>
-              <a:t>4/13/2026</a:t>
+              <a:t>4/14/2026</a:t>
             </a:fld>
             <a:endParaRPr lang="en-US"/>
           </a:p>
@@ -3761,7 +3931,19 @@
                         <a:rPr lang="en-US" b="0" i="1" smtClean="0">
                           <a:latin typeface="Cambria Math" panose="02040503050406030204" pitchFamily="18" charset="0"/>
                         </a:rPr>
-                        <m:t>=0,</m:t>
+                        <m:t>=</m:t>
+                      </m:r>
+                      <m:r>
+                        <a:rPr lang="en-US" b="0" i="1" smtClean="0">
+                          <a:latin typeface="Cambria Math" panose="02040503050406030204" pitchFamily="18" charset="0"/>
+                        </a:rPr>
+                        <m:t>0</m:t>
+                      </m:r>
+                      <m:r>
+                        <a:rPr lang="en-US" b="0" i="1" smtClean="0">
+                          <a:latin typeface="Cambria Math" panose="02040503050406030204" pitchFamily="18" charset="0"/>
+                        </a:rPr>
+                        <m:t>,</m:t>
                       </m:r>
                       <m:sSub>
                         <m:sSubPr>
@@ -3792,7 +3974,13 @@
                         <a:rPr lang="en-US" b="0" i="1" smtClean="0">
                           <a:latin typeface="Cambria Math" panose="02040503050406030204" pitchFamily="18" charset="0"/>
                         </a:rPr>
-                        <m:t>=0</m:t>
+                        <m:t>=</m:t>
+                      </m:r>
+                      <m:r>
+                        <a:rPr lang="en-US" b="0" i="1" smtClean="0">
+                          <a:latin typeface="Cambria Math" panose="02040503050406030204" pitchFamily="18" charset="0"/>
+                        </a:rPr>
+                        <m:t>0</m:t>
                       </m:r>
                     </m:oMath>
                   </m:oMathPara>
@@ -4876,7 +5064,7 @@
           <p:nvPr/>
         </p:nvPicPr>
         <p:blipFill>
-          <a:blip r:embed="rId2">
+          <a:blip r:embed="rId3">
             <a:extLst>
               <a:ext uri="{28A0092B-C50C-407E-A947-70E740481C1C}">
                 <a14:useLocalDpi xmlns:a14="http://schemas.microsoft.com/office/drawing/2010/main" val="0"/>
@@ -5047,7 +5235,7 @@
                 <a:avLst/>
               </a:prstGeom>
               <a:blipFill>
-                <a:blip r:embed="rId3"/>
+                <a:blip r:embed="rId4"/>
                 <a:stretch>
                   <a:fillRect l="-1597" t="-3289" r="-2595" b="-9211"/>
                 </a:stretch>
@@ -5264,7 +5452,7 @@
                 <a:avLst/>
               </a:prstGeom>
               <a:blipFill>
-                <a:blip r:embed="rId4"/>
+                <a:blip r:embed="rId5"/>
                 <a:stretch>
                   <a:fillRect l="-1622" b="-15217"/>
                 </a:stretch>
@@ -5334,7 +5522,7 @@
           <p:nvPr/>
         </p:nvPicPr>
         <p:blipFill rotWithShape="1">
-          <a:blip r:embed="rId5"/>
+          <a:blip r:embed="rId6"/>
           <a:srcRect t="1" r="1211" b="703"/>
           <a:stretch/>
         </p:blipFill>
@@ -5357,7 +5545,7 @@
           <p:nvPr/>
         </p:nvPicPr>
         <p:blipFill>
-          <a:blip r:embed="rId6"/>
+          <a:blip r:embed="rId7"/>
           <a:stretch>
             <a:fillRect/>
           </a:stretch>
@@ -5381,7 +5569,7 @@
           <p:nvPr/>
         </p:nvPicPr>
         <p:blipFill>
-          <a:blip r:embed="rId7"/>
+          <a:blip r:embed="rId8"/>
           <a:stretch>
             <a:fillRect/>
           </a:stretch>
@@ -5436,8 +5624,8 @@
           </a:p>
         </p:txBody>
       </p:sp>
-      <mc:AlternateContent xmlns:mc="http://schemas.openxmlformats.org/markup-compatibility/2006" xmlns:a14="http://schemas.microsoft.com/office/drawing/2010/main">
-        <mc:Choice Requires="a14">
+      <mc:AlternateContent xmlns:mc="http://schemas.openxmlformats.org/markup-compatibility/2006">
+        <mc:Choice xmlns:a14="http://schemas.microsoft.com/office/drawing/2010/main" Requires="a14">
           <p:sp>
             <p:nvSpPr>
               <p:cNvPr id="13" name="矩形 12"/>
@@ -5447,7 +5635,7 @@
             <p:spPr>
               <a:xfrm>
                 <a:off x="9029508" y="3151737"/>
-                <a:ext cx="2435218" cy="369332"/>
+                <a:ext cx="2486515" cy="369332"/>
               </a:xfrm>
               <a:prstGeom prst="rect">
                 <a:avLst/>
@@ -5497,7 +5685,7 @@
                             <a:ea typeface="微软雅黑" panose="020B0503020204020204" pitchFamily="34" charset="-122"/>
                             <a:cs typeface="Arial" panose="020B0604020202020204" pitchFamily="34" charset="0"/>
                           </a:rPr>
-                          <m:t>𝜽</m:t>
+                          <m:t>𝑹</m:t>
                         </m:r>
                       </m:sub>
                     </m:sSub>
@@ -5523,7 +5711,7 @@
             </p:txBody>
           </p:sp>
         </mc:Choice>
-        <mc:Fallback xmlns="">
+        <mc:Fallback>
           <p:sp>
             <p:nvSpPr>
               <p:cNvPr id="13" name="矩形 12"/>
@@ -5535,15 +5723,15 @@
             <p:spPr>
               <a:xfrm>
                 <a:off x="9029508" y="3151737"/>
-                <a:ext cx="2435218" cy="369332"/>
+                <a:ext cx="2486515" cy="369332"/>
               </a:xfrm>
               <a:prstGeom prst="rect">
                 <a:avLst/>
               </a:prstGeom>
               <a:blipFill>
-                <a:blip r:embed="rId8"/>
+                <a:blip r:embed="rId9"/>
                 <a:stretch>
-                  <a:fillRect t="-9836" r="-1250" b="-22951"/>
+                  <a:fillRect t="-9836" b="-22951"/>
                 </a:stretch>
               </a:blipFill>
             </p:spPr>
@@ -5562,8 +5750,8 @@
           </p:sp>
         </mc:Fallback>
       </mc:AlternateContent>
-      <mc:AlternateContent xmlns:mc="http://schemas.openxmlformats.org/markup-compatibility/2006">
-        <mc:Choice xmlns:a14="http://schemas.microsoft.com/office/drawing/2010/main" Requires="a14">
+      <mc:AlternateContent xmlns:mc="http://schemas.openxmlformats.org/markup-compatibility/2006" xmlns:a14="http://schemas.microsoft.com/office/drawing/2010/main">
+        <mc:Choice Requires="a14">
           <p:sp>
             <p:nvSpPr>
               <p:cNvPr id="14" name="矩形 13"/>
@@ -5754,7 +5942,7 @@
             </p:txBody>
           </p:sp>
         </mc:Choice>
-        <mc:Fallback>
+        <mc:Fallback xmlns="">
           <p:sp>
             <p:nvSpPr>
               <p:cNvPr id="14" name="矩形 13"/>
@@ -5772,7 +5960,7 @@
                 <a:avLst/>
               </a:prstGeom>
               <a:blipFill>
-                <a:blip r:embed="rId9"/>
+                <a:blip r:embed="rId10"/>
                 <a:stretch>
                   <a:fillRect/>
                 </a:stretch>
@@ -5793,8 +5981,8 @@
           </p:sp>
         </mc:Fallback>
       </mc:AlternateContent>
-      <mc:AlternateContent xmlns:mc="http://schemas.openxmlformats.org/markup-compatibility/2006">
-        <mc:Choice xmlns:a14="http://schemas.microsoft.com/office/drawing/2010/main" Requires="a14">
+      <mc:AlternateContent xmlns:mc="http://schemas.openxmlformats.org/markup-compatibility/2006" xmlns:a14="http://schemas.microsoft.com/office/drawing/2010/main">
+        <mc:Choice Requires="a14">
           <p:sp>
             <p:nvSpPr>
               <p:cNvPr id="17" name="矩形 16"/>
@@ -5987,7 +6175,7 @@
             </p:txBody>
           </p:sp>
         </mc:Choice>
-        <mc:Fallback>
+        <mc:Fallback xmlns="">
           <p:sp>
             <p:nvSpPr>
               <p:cNvPr id="17" name="矩形 16"/>
@@ -6005,7 +6193,7 @@
                 <a:avLst/>
               </a:prstGeom>
               <a:blipFill>
-                <a:blip r:embed="rId10"/>
+                <a:blip r:embed="rId11"/>
                 <a:stretch>
                   <a:fillRect/>
                 </a:stretch>
@@ -6026,8 +6214,8 @@
           </p:sp>
         </mc:Fallback>
       </mc:AlternateContent>
-      <mc:AlternateContent xmlns:mc="http://schemas.openxmlformats.org/markup-compatibility/2006">
-        <mc:Choice xmlns:a14="http://schemas.microsoft.com/office/drawing/2010/main" Requires="a14">
+      <mc:AlternateContent xmlns:mc="http://schemas.openxmlformats.org/markup-compatibility/2006" xmlns:a14="http://schemas.microsoft.com/office/drawing/2010/main">
+        <mc:Choice Requires="a14">
           <p:sp>
             <p:nvSpPr>
               <p:cNvPr id="18" name="矩形 17"/>
@@ -6272,7 +6460,7 @@
             </p:txBody>
           </p:sp>
         </mc:Choice>
-        <mc:Fallback>
+        <mc:Fallback xmlns="">
           <p:sp>
             <p:nvSpPr>
               <p:cNvPr id="18" name="矩形 17"/>
@@ -6290,7 +6478,7 @@
                 <a:avLst/>
               </a:prstGeom>
               <a:blipFill>
-                <a:blip r:embed="rId11"/>
+                <a:blip r:embed="rId12"/>
                 <a:stretch>
                   <a:fillRect/>
                 </a:stretch>
@@ -6315,6 +6503,991 @@
     <p:extLst>
       <p:ext uri="{BB962C8B-B14F-4D97-AF65-F5344CB8AC3E}">
         <p14:creationId xmlns:p14="http://schemas.microsoft.com/office/powerpoint/2010/main" val="2566356074"/>
+      </p:ext>
+    </p:extLst>
+  </p:cSld>
+  <p:clrMapOvr>
+    <a:masterClrMapping/>
+  </p:clrMapOvr>
+</p:sld>
+</file>
+
+<file path=ppt/slides/slide3.xml><?xml version="1.0" encoding="utf-8"?>
+<p:sld xmlns:a="http://schemas.openxmlformats.org/drawingml/2006/main" xmlns:r="http://schemas.openxmlformats.org/officeDocument/2006/relationships" xmlns:p="http://schemas.openxmlformats.org/presentationml/2006/main">
+  <p:cSld>
+    <p:spTree>
+      <p:nvGrpSpPr>
+        <p:cNvPr id="1" name=""/>
+        <p:cNvGrpSpPr/>
+        <p:nvPr/>
+      </p:nvGrpSpPr>
+      <p:grpSpPr>
+        <a:xfrm>
+          <a:off x="0" y="0"/>
+          <a:ext cx="0" cy="0"/>
+          <a:chOff x="0" y="0"/>
+          <a:chExt cx="0" cy="0"/>
+        </a:xfrm>
+      </p:grpSpPr>
+      <p:sp>
+        <p:nvSpPr>
+          <p:cNvPr id="4" name="矩形 3"/>
+          <p:cNvSpPr/>
+          <p:nvPr/>
+        </p:nvSpPr>
+        <p:spPr>
+          <a:xfrm>
+            <a:off x="0" y="-91440"/>
+            <a:ext cx="3172472" cy="523220"/>
+          </a:xfrm>
+          <a:prstGeom prst="rect">
+            <a:avLst/>
+          </a:prstGeom>
+        </p:spPr>
+        <p:txBody>
+          <a:bodyPr wrap="none">
+            <a:spAutoFit/>
+          </a:bodyPr>
+          <a:lstStyle/>
+          <a:p>
+            <a:r>
+              <a:rPr lang="en-US" sz="2800" b="1" dirty="0" smtClean="0">
+                <a:latin typeface="微软雅黑" panose="020B0503020204020204" pitchFamily="34" charset="-122"/>
+                <a:ea typeface="微软雅黑" panose="020B0503020204020204" pitchFamily="34" charset="-122"/>
+              </a:rPr>
+              <a:t>De</a:t>
+            </a:r>
+            <a:r>
+              <a:rPr lang="en-US" altLang="zh-CN" sz="2800" b="1" dirty="0" smtClean="0">
+                <a:latin typeface="微软雅黑" panose="020B0503020204020204" pitchFamily="34" charset="-122"/>
+                <a:ea typeface="微软雅黑" panose="020B0503020204020204" pitchFamily="34" charset="-122"/>
+              </a:rPr>
+              <a:t>bug </a:t>
+            </a:r>
+            <a:r>
+              <a:rPr lang="en-US" altLang="zh-CN" sz="2800" b="1" dirty="0" smtClean="0">
+                <a:latin typeface="微软雅黑" panose="020B0503020204020204" pitchFamily="34" charset="-122"/>
+                <a:ea typeface="微软雅黑" panose="020B0503020204020204" pitchFamily="34" charset="-122"/>
+              </a:rPr>
+              <a:t>2P </a:t>
+            </a:r>
+            <a:r>
+              <a:rPr lang="en-US" altLang="zh-CN" sz="2800" b="1" dirty="0" smtClean="0">
+                <a:latin typeface="微软雅黑" panose="020B0503020204020204" pitchFamily="34" charset="-122"/>
+                <a:ea typeface="微软雅黑" panose="020B0503020204020204" pitchFamily="34" charset="-122"/>
+              </a:rPr>
+              <a:t>Result</a:t>
+            </a:r>
+            <a:endParaRPr lang="en-US" sz="2800" b="1" dirty="0">
+              <a:latin typeface="微软雅黑" panose="020B0503020204020204" pitchFamily="34" charset="-122"/>
+              <a:ea typeface="微软雅黑" panose="020B0503020204020204" pitchFamily="34" charset="-122"/>
+            </a:endParaRPr>
+          </a:p>
+        </p:txBody>
+      </p:sp>
+      <p:sp>
+        <p:nvSpPr>
+          <p:cNvPr id="5" name="矩形 4"/>
+          <p:cNvSpPr/>
+          <p:nvPr/>
+        </p:nvSpPr>
+        <p:spPr>
+          <a:xfrm>
+            <a:off x="3220562" y="18091"/>
+            <a:ext cx="8986178" cy="369332"/>
+          </a:xfrm>
+          <a:prstGeom prst="rect">
+            <a:avLst/>
+          </a:prstGeom>
+        </p:spPr>
+        <p:txBody>
+          <a:bodyPr wrap="none">
+            <a:spAutoFit/>
+          </a:bodyPr>
+          <a:lstStyle/>
+          <a:p>
+            <a:r>
+              <a:rPr lang="en-US" b="1" dirty="0" smtClean="0">
+                <a:latin typeface="Arial" panose="020B0604020202020204" pitchFamily="34" charset="0"/>
+                <a:ea typeface="微软雅黑" panose="020B0503020204020204" pitchFamily="34" charset="-122"/>
+                <a:cs typeface="Arial" panose="020B0604020202020204" pitchFamily="34" charset="0"/>
+              </a:rPr>
+              <a:t>Solves Annular Coette (Dimensionless) Momentum Equation under theoretical P</a:t>
+            </a:r>
+            <a:endParaRPr lang="en-US" b="1" dirty="0">
+              <a:latin typeface="Arial" panose="020B0604020202020204" pitchFamily="34" charset="0"/>
+              <a:ea typeface="微软雅黑" panose="020B0503020204020204" pitchFamily="34" charset="-122"/>
+              <a:cs typeface="Arial" panose="020B0604020202020204" pitchFamily="34" charset="0"/>
+            </a:endParaRPr>
+          </a:p>
+        </p:txBody>
+      </p:sp>
+      <mc:AlternateContent xmlns:mc="http://schemas.openxmlformats.org/markup-compatibility/2006">
+        <mc:Choice xmlns:a14="http://schemas.microsoft.com/office/drawing/2010/main" Requires="a14">
+          <p:sp>
+            <p:nvSpPr>
+              <p:cNvPr id="6" name="文本框 5"/>
+              <p:cNvSpPr txBox="1"/>
+              <p:nvPr/>
+            </p:nvSpPr>
+            <p:spPr>
+              <a:xfrm>
+                <a:off x="4563587" y="431780"/>
+                <a:ext cx="7498912" cy="312650"/>
+              </a:xfrm>
+              <a:prstGeom prst="rect">
+                <a:avLst/>
+              </a:prstGeom>
+              <a:noFill/>
+            </p:spPr>
+            <p:txBody>
+              <a:bodyPr wrap="none" lIns="0" tIns="0" rIns="0" bIns="0" rtlCol="0">
+                <a:spAutoFit/>
+              </a:bodyPr>
+              <a:lstStyle/>
+              <a:p>
+                <a:pPr/>
+                <a14:m>
+                  <m:oMathPara xmlns:m="http://schemas.openxmlformats.org/officeDocument/2006/math">
+                    <m:oMathParaPr>
+                      <m:jc m:val="centerGroup"/>
+                    </m:oMathParaPr>
+                    <m:oMath xmlns:m="http://schemas.openxmlformats.org/officeDocument/2006/math">
+                      <m:acc>
+                        <m:accPr>
+                          <m:chr m:val="̃"/>
+                          <m:ctrlPr>
+                            <a:rPr lang="en-US" b="1" i="1" smtClean="0">
+                              <a:latin typeface="Cambria Math" panose="02040503050406030204" pitchFamily="18" charset="0"/>
+                            </a:rPr>
+                          </m:ctrlPr>
+                        </m:accPr>
+                        <m:e>
+                          <m:r>
+                            <a:rPr lang="en-US" b="1" i="1" smtClean="0">
+                              <a:latin typeface="Cambria Math" panose="02040503050406030204" pitchFamily="18" charset="0"/>
+                            </a:rPr>
+                            <m:t>𝑼</m:t>
+                          </m:r>
+                        </m:e>
+                      </m:acc>
+                      <m:r>
+                        <a:rPr lang="en-US" b="0" i="1" smtClean="0">
+                          <a:latin typeface="Cambria Math" panose="02040503050406030204" pitchFamily="18" charset="0"/>
+                        </a:rPr>
+                        <m:t>=</m:t>
+                      </m:r>
+                      <m:r>
+                        <m:rPr>
+                          <m:sty m:val="p"/>
+                        </m:rPr>
+                        <a:rPr lang="en-US" b="0" i="0" smtClean="0">
+                          <a:latin typeface="Cambria Math" panose="02040503050406030204" pitchFamily="18" charset="0"/>
+                        </a:rPr>
+                        <m:t>momentum</m:t>
+                      </m:r>
+                      <m:d>
+                        <m:dPr>
+                          <m:ctrlPr>
+                            <a:rPr lang="en-US" b="0" i="1" smtClean="0">
+                              <a:latin typeface="Cambria Math" panose="02040503050406030204" pitchFamily="18" charset="0"/>
+                            </a:rPr>
+                          </m:ctrlPr>
+                        </m:dPr>
+                        <m:e>
+                          <m:sSubSup>
+                            <m:sSubSupPr>
+                              <m:ctrlPr>
+                                <a:rPr lang="en-US" b="0" i="1" smtClean="0">
+                                  <a:latin typeface="Cambria Math" panose="02040503050406030204" pitchFamily="18" charset="0"/>
+                                </a:rPr>
+                              </m:ctrlPr>
+                            </m:sSubSupPr>
+                            <m:e>
+                              <m:r>
+                                <a:rPr lang="en-US" b="0" i="1" smtClean="0">
+                                  <a:latin typeface="Cambria Math" panose="02040503050406030204" pitchFamily="18" charset="0"/>
+                                </a:rPr>
+                                <m:t>𝑃</m:t>
+                              </m:r>
+                            </m:e>
+                            <m:sub>
+                              <m:r>
+                                <m:rPr>
+                                  <m:sty m:val="p"/>
+                                </m:rPr>
+                                <a:rPr lang="en-US" b="0" i="0" smtClean="0">
+                                  <a:latin typeface="Cambria Math" panose="02040503050406030204" pitchFamily="18" charset="0"/>
+                                </a:rPr>
+                                <m:t>TH</m:t>
+                              </m:r>
+                            </m:sub>
+                            <m:sup>
+                              <m:r>
+                                <a:rPr lang="en-US" b="0" i="1" smtClean="0">
+                                  <a:latin typeface="Cambria Math" panose="02040503050406030204" pitchFamily="18" charset="0"/>
+                                </a:rPr>
+                                <m:t>∗</m:t>
+                              </m:r>
+                            </m:sup>
+                          </m:sSubSup>
+                        </m:e>
+                      </m:d>
+                      <m:r>
+                        <a:rPr lang="en-US" b="0" i="0" smtClean="0">
+                          <a:latin typeface="Cambria Math" panose="02040503050406030204" pitchFamily="18" charset="0"/>
+                        </a:rPr>
+                        <m:t>→</m:t>
+                      </m:r>
+                      <m:sSup>
+                        <m:sSupPr>
+                          <m:ctrlPr>
+                            <a:rPr lang="en-US" b="0" i="1" smtClean="0">
+                              <a:latin typeface="Cambria Math" panose="02040503050406030204" pitchFamily="18" charset="0"/>
+                            </a:rPr>
+                          </m:ctrlPr>
+                        </m:sSupPr>
+                        <m:e>
+                          <m:r>
+                            <a:rPr lang="en-US" b="0" i="1" smtClean="0">
+                              <a:latin typeface="Cambria Math" panose="02040503050406030204" pitchFamily="18" charset="0"/>
+                            </a:rPr>
+                            <m:t>𝑃</m:t>
+                          </m:r>
+                        </m:e>
+                        <m:sup>
+                          <m:r>
+                            <a:rPr lang="en-US" b="0" i="1" smtClean="0">
+                              <a:latin typeface="Cambria Math" panose="02040503050406030204" pitchFamily="18" charset="0"/>
+                            </a:rPr>
+                            <m:t>′</m:t>
+                          </m:r>
+                        </m:sup>
+                      </m:sSup>
+                      <m:r>
+                        <a:rPr lang="en-US" b="0" i="1" smtClean="0">
+                          <a:latin typeface="Cambria Math" panose="02040503050406030204" pitchFamily="18" charset="0"/>
+                        </a:rPr>
+                        <m:t>, </m:t>
+                      </m:r>
+                      <m:sSup>
+                        <m:sSupPr>
+                          <m:ctrlPr>
+                            <a:rPr lang="en-US" b="1" i="1" smtClean="0">
+                              <a:latin typeface="Cambria Math" panose="02040503050406030204" pitchFamily="18" charset="0"/>
+                            </a:rPr>
+                          </m:ctrlPr>
+                        </m:sSupPr>
+                        <m:e>
+                          <m:r>
+                            <a:rPr lang="en-US" b="1" i="1" smtClean="0">
+                              <a:latin typeface="Cambria Math" panose="02040503050406030204" pitchFamily="18" charset="0"/>
+                            </a:rPr>
+                            <m:t>𝑼</m:t>
+                          </m:r>
+                        </m:e>
+                        <m:sup>
+                          <m:r>
+                            <a:rPr lang="en-US" b="1" i="1" smtClean="0">
+                              <a:latin typeface="Cambria Math" panose="02040503050406030204" pitchFamily="18" charset="0"/>
+                            </a:rPr>
+                            <m:t>′</m:t>
+                          </m:r>
+                        </m:sup>
+                      </m:sSup>
+                      <m:r>
+                        <a:rPr lang="en-US" b="0" i="1" smtClean="0">
+                          <a:latin typeface="Cambria Math" panose="02040503050406030204" pitchFamily="18" charset="0"/>
+                        </a:rPr>
+                        <m:t>=</m:t>
+                      </m:r>
+                      <m:r>
+                        <m:rPr>
+                          <m:sty m:val="p"/>
+                        </m:rPr>
+                        <a:rPr lang="en-US" b="0" i="0" smtClean="0">
+                          <a:latin typeface="Cambria Math" panose="02040503050406030204" pitchFamily="18" charset="0"/>
+                        </a:rPr>
+                        <m:t>pressure</m:t>
+                      </m:r>
+                      <m:d>
+                        <m:dPr>
+                          <m:ctrlPr>
+                            <a:rPr lang="en-US" b="0" i="0" smtClean="0">
+                              <a:latin typeface="Cambria Math" panose="02040503050406030204" pitchFamily="18" charset="0"/>
+                            </a:rPr>
+                          </m:ctrlPr>
+                        </m:dPr>
+                        <m:e>
+                          <m:acc>
+                            <m:accPr>
+                              <m:chr m:val="̃"/>
+                              <m:ctrlPr>
+                                <a:rPr lang="en-US" b="0" i="1" smtClean="0">
+                                  <a:latin typeface="Cambria Math" panose="02040503050406030204" pitchFamily="18" charset="0"/>
+                                </a:rPr>
+                              </m:ctrlPr>
+                            </m:accPr>
+                            <m:e>
+                              <m:r>
+                                <a:rPr lang="en-US" b="0" i="1" smtClean="0">
+                                  <a:latin typeface="Cambria Math" panose="02040503050406030204" pitchFamily="18" charset="0"/>
+                                </a:rPr>
+                                <m:t>𝑈</m:t>
+                              </m:r>
+                            </m:e>
+                          </m:acc>
+                        </m:e>
+                      </m:d>
+                      <m:r>
+                        <a:rPr lang="en-US" b="0" i="1" smtClean="0">
+                          <a:latin typeface="Cambria Math" panose="02040503050406030204" pitchFamily="18" charset="0"/>
+                        </a:rPr>
+                        <m:t>→</m:t>
+                      </m:r>
+                      <m:r>
+                        <a:rPr lang="en-US" b="0" i="1" smtClean="0">
+                          <a:latin typeface="Cambria Math" panose="02040503050406030204" pitchFamily="18" charset="0"/>
+                        </a:rPr>
+                        <m:t>𝑃</m:t>
+                      </m:r>
+                      <m:r>
+                        <a:rPr lang="en-US" b="0" i="1" smtClean="0">
+                          <a:latin typeface="Cambria Math" panose="02040503050406030204" pitchFamily="18" charset="0"/>
+                        </a:rPr>
+                        <m:t>=</m:t>
+                      </m:r>
+                      <m:sSubSup>
+                        <m:sSubSupPr>
+                          <m:ctrlPr>
+                            <a:rPr lang="en-US" b="0" i="1" smtClean="0">
+                              <a:latin typeface="Cambria Math" panose="02040503050406030204" pitchFamily="18" charset="0"/>
+                            </a:rPr>
+                          </m:ctrlPr>
+                        </m:sSubSupPr>
+                        <m:e>
+                          <m:r>
+                            <a:rPr lang="en-US" b="0" i="1" smtClean="0">
+                              <a:latin typeface="Cambria Math" panose="02040503050406030204" pitchFamily="18" charset="0"/>
+                            </a:rPr>
+                            <m:t>𝑃</m:t>
+                          </m:r>
+                        </m:e>
+                        <m:sub>
+                          <m:r>
+                            <m:rPr>
+                              <m:sty m:val="p"/>
+                            </m:rPr>
+                            <a:rPr lang="en-US" b="0" i="0" smtClean="0">
+                              <a:latin typeface="Cambria Math" panose="02040503050406030204" pitchFamily="18" charset="0"/>
+                            </a:rPr>
+                            <m:t>TH</m:t>
+                          </m:r>
+                        </m:sub>
+                        <m:sup>
+                          <m:r>
+                            <a:rPr lang="en-US" b="0" i="1" smtClean="0">
+                              <a:latin typeface="Cambria Math" panose="02040503050406030204" pitchFamily="18" charset="0"/>
+                            </a:rPr>
+                            <m:t>∗</m:t>
+                          </m:r>
+                        </m:sup>
+                      </m:sSubSup>
+                      <m:r>
+                        <a:rPr lang="en-US" b="0" i="1" smtClean="0">
+                          <a:latin typeface="Cambria Math" panose="02040503050406030204" pitchFamily="18" charset="0"/>
+                        </a:rPr>
+                        <m:t>+</m:t>
+                      </m:r>
+                      <m:sSup>
+                        <m:sSupPr>
+                          <m:ctrlPr>
+                            <a:rPr lang="en-US" b="0" i="1" smtClean="0">
+                              <a:latin typeface="Cambria Math" panose="02040503050406030204" pitchFamily="18" charset="0"/>
+                            </a:rPr>
+                          </m:ctrlPr>
+                        </m:sSupPr>
+                        <m:e>
+                          <m:r>
+                            <a:rPr lang="en-US" b="0" i="1" smtClean="0">
+                              <a:latin typeface="Cambria Math" panose="02040503050406030204" pitchFamily="18" charset="0"/>
+                            </a:rPr>
+                            <m:t>𝑃</m:t>
+                          </m:r>
+                        </m:e>
+                        <m:sup>
+                          <m:r>
+                            <a:rPr lang="en-US" b="0" i="1" smtClean="0">
+                              <a:latin typeface="Cambria Math" panose="02040503050406030204" pitchFamily="18" charset="0"/>
+                            </a:rPr>
+                            <m:t>′</m:t>
+                          </m:r>
+                        </m:sup>
+                      </m:sSup>
+                      <m:r>
+                        <a:rPr lang="en-US" b="0" i="1" smtClean="0">
+                          <a:latin typeface="Cambria Math" panose="02040503050406030204" pitchFamily="18" charset="0"/>
+                        </a:rPr>
+                        <m:t>,</m:t>
+                      </m:r>
+                      <m:r>
+                        <a:rPr lang="en-US" b="1" i="1" smtClean="0">
+                          <a:latin typeface="Cambria Math" panose="02040503050406030204" pitchFamily="18" charset="0"/>
+                        </a:rPr>
+                        <m:t>𝑼</m:t>
+                      </m:r>
+                      <m:r>
+                        <a:rPr lang="en-US" b="1" i="1" smtClean="0">
+                          <a:latin typeface="Cambria Math" panose="02040503050406030204" pitchFamily="18" charset="0"/>
+                        </a:rPr>
+                        <m:t>=</m:t>
+                      </m:r>
+                      <m:acc>
+                        <m:accPr>
+                          <m:chr m:val="̃"/>
+                          <m:ctrlPr>
+                            <a:rPr lang="en-US" b="0" i="1" smtClean="0">
+                              <a:latin typeface="Cambria Math" panose="02040503050406030204" pitchFamily="18" charset="0"/>
+                            </a:rPr>
+                          </m:ctrlPr>
+                        </m:accPr>
+                        <m:e>
+                          <m:r>
+                            <a:rPr lang="en-US" b="1" i="1" smtClean="0">
+                              <a:latin typeface="Cambria Math" panose="02040503050406030204" pitchFamily="18" charset="0"/>
+                            </a:rPr>
+                            <m:t>𝑼</m:t>
+                          </m:r>
+                        </m:e>
+                      </m:acc>
+                      <m:r>
+                        <a:rPr lang="en-US" b="1" i="1" smtClean="0">
+                          <a:latin typeface="Cambria Math" panose="02040503050406030204" pitchFamily="18" charset="0"/>
+                        </a:rPr>
+                        <m:t>+</m:t>
+                      </m:r>
+                      <m:sSup>
+                        <m:sSupPr>
+                          <m:ctrlPr>
+                            <a:rPr lang="en-US" b="1" i="1" smtClean="0">
+                              <a:latin typeface="Cambria Math" panose="02040503050406030204" pitchFamily="18" charset="0"/>
+                            </a:rPr>
+                          </m:ctrlPr>
+                        </m:sSupPr>
+                        <m:e>
+                          <m:r>
+                            <a:rPr lang="en-US" b="1" i="1" smtClean="0">
+                              <a:latin typeface="Cambria Math" panose="02040503050406030204" pitchFamily="18" charset="0"/>
+                            </a:rPr>
+                            <m:t>𝑼</m:t>
+                          </m:r>
+                        </m:e>
+                        <m:sup>
+                          <m:r>
+                            <a:rPr lang="en-US" b="1" i="1" smtClean="0">
+                              <a:latin typeface="Cambria Math" panose="02040503050406030204" pitchFamily="18" charset="0"/>
+                            </a:rPr>
+                            <m:t>′</m:t>
+                          </m:r>
+                        </m:sup>
+                      </m:sSup>
+                    </m:oMath>
+                  </m:oMathPara>
+                </a14:m>
+                <a:endParaRPr lang="en-US" b="1" dirty="0" smtClean="0"/>
+              </a:p>
+            </p:txBody>
+          </p:sp>
+        </mc:Choice>
+        <mc:Fallback>
+          <p:sp>
+            <p:nvSpPr>
+              <p:cNvPr id="6" name="文本框 5"/>
+              <p:cNvSpPr txBox="1">
+                <a:spLocks noRot="1" noChangeAspect="1" noMove="1" noResize="1" noEditPoints="1" noAdjustHandles="1" noChangeArrowheads="1" noChangeShapeType="1" noTextEdit="1"/>
+              </p:cNvSpPr>
+              <p:nvPr/>
+            </p:nvSpPr>
+            <p:spPr>
+              <a:xfrm>
+                <a:off x="4563587" y="431780"/>
+                <a:ext cx="7498912" cy="312650"/>
+              </a:xfrm>
+              <a:prstGeom prst="rect">
+                <a:avLst/>
+              </a:prstGeom>
+              <a:blipFill>
+                <a:blip r:embed="rId3"/>
+                <a:stretch>
+                  <a:fillRect l="-325" t="-21569" b="-19608"/>
+                </a:stretch>
+              </a:blipFill>
+            </p:spPr>
+            <p:txBody>
+              <a:bodyPr/>
+              <a:lstStyle/>
+              <a:p>
+                <a:r>
+                  <a:rPr lang="en-US">
+                    <a:noFill/>
+                  </a:rPr>
+                  <a:t> </a:t>
+                </a:r>
+              </a:p>
+            </p:txBody>
+          </p:sp>
+        </mc:Fallback>
+      </mc:AlternateContent>
+      <p:pic>
+        <p:nvPicPr>
+          <p:cNvPr id="7" name="图片 6"/>
+          <p:cNvPicPr>
+            <a:picLocks noChangeAspect="1"/>
+          </p:cNvPicPr>
+          <p:nvPr/>
+        </p:nvPicPr>
+        <p:blipFill>
+          <a:blip r:embed="rId4"/>
+          <a:stretch>
+            <a:fillRect/>
+          </a:stretch>
+        </p:blipFill>
+        <p:spPr>
+          <a:xfrm>
+            <a:off x="0" y="896830"/>
+            <a:ext cx="4370450" cy="2993179"/>
+          </a:xfrm>
+          <a:prstGeom prst="rect">
+            <a:avLst/>
+          </a:prstGeom>
+        </p:spPr>
+      </p:pic>
+      <p:pic>
+        <p:nvPicPr>
+          <p:cNvPr id="12" name="图片 11"/>
+          <p:cNvPicPr>
+            <a:picLocks noChangeAspect="1"/>
+          </p:cNvPicPr>
+          <p:nvPr/>
+        </p:nvPicPr>
+        <p:blipFill>
+          <a:blip r:embed="rId5"/>
+          <a:stretch>
+            <a:fillRect/>
+          </a:stretch>
+        </p:blipFill>
+        <p:spPr>
+          <a:xfrm>
+            <a:off x="4563587" y="896830"/>
+            <a:ext cx="4476405" cy="2993179"/>
+          </a:xfrm>
+          <a:prstGeom prst="rect">
+            <a:avLst/>
+          </a:prstGeom>
+        </p:spPr>
+      </p:pic>
+      <p:pic>
+        <p:nvPicPr>
+          <p:cNvPr id="13" name="图片 12"/>
+          <p:cNvPicPr>
+            <a:picLocks noChangeAspect="1"/>
+          </p:cNvPicPr>
+          <p:nvPr/>
+        </p:nvPicPr>
+        <p:blipFill>
+          <a:blip r:embed="rId6"/>
+          <a:stretch>
+            <a:fillRect/>
+          </a:stretch>
+        </p:blipFill>
+        <p:spPr>
+          <a:xfrm>
+            <a:off x="81280" y="3890009"/>
+            <a:ext cx="4289170" cy="2831600"/>
+          </a:xfrm>
+          <a:prstGeom prst="rect">
+            <a:avLst/>
+          </a:prstGeom>
+        </p:spPr>
+      </p:pic>
+      <p:pic>
+        <p:nvPicPr>
+          <p:cNvPr id="14" name="图片 13"/>
+          <p:cNvPicPr>
+            <a:picLocks noChangeAspect="1"/>
+          </p:cNvPicPr>
+          <p:nvPr/>
+        </p:nvPicPr>
+        <p:blipFill rotWithShape="1">
+          <a:blip r:embed="rId7">
+            <a:extLst>
+              <a:ext uri="{28A0092B-C50C-407E-A947-70E740481C1C}">
+                <a14:useLocalDpi xmlns:a14="http://schemas.microsoft.com/office/drawing/2010/main" val="0"/>
+              </a:ext>
+            </a:extLst>
+          </a:blip>
+          <a:srcRect l="5512" r="9482" b="3208"/>
+          <a:stretch/>
+        </p:blipFill>
+        <p:spPr>
+          <a:xfrm>
+            <a:off x="4838370" y="3783977"/>
+            <a:ext cx="5750561" cy="2815591"/>
+          </a:xfrm>
+          <a:prstGeom prst="rect">
+            <a:avLst/>
+          </a:prstGeom>
+        </p:spPr>
+      </p:pic>
+      <p:sp>
+        <p:nvSpPr>
+          <p:cNvPr id="16" name="矩形 15"/>
+          <p:cNvSpPr/>
+          <p:nvPr/>
+        </p:nvSpPr>
+        <p:spPr>
+          <a:xfrm>
+            <a:off x="4838370" y="6508988"/>
+            <a:ext cx="6413058" cy="369332"/>
+          </a:xfrm>
+          <a:prstGeom prst="rect">
+            <a:avLst/>
+          </a:prstGeom>
+        </p:spPr>
+        <p:txBody>
+          <a:bodyPr wrap="square">
+            <a:spAutoFit/>
+          </a:bodyPr>
+          <a:lstStyle/>
+          <a:p>
+            <a:pPr>
+              <a:defRPr/>
+            </a:pPr>
+            <a:r>
+              <a:rPr lang="pt-BR" b="1" dirty="0" smtClean="0"/>
+              <a:t>Run at n=64 </a:t>
+            </a:r>
+            <a:r>
+              <a:rPr lang="pt-BR" b="1" dirty="0"/>
+              <a:t>max_iter=50000 tol=1e-6 u_relax=0.3 </a:t>
+            </a:r>
+            <a:r>
+              <a:rPr lang="pt-BR" b="1" dirty="0" smtClean="0"/>
+              <a:t>p_relax=0.3</a:t>
+            </a:r>
+            <a:endParaRPr lang="pt-BR" b="1" dirty="0"/>
+          </a:p>
+        </p:txBody>
+      </p:sp>
+      <mc:AlternateContent xmlns:mc="http://schemas.openxmlformats.org/markup-compatibility/2006">
+        <mc:Choice xmlns:a14="http://schemas.microsoft.com/office/drawing/2010/main" Requires="a14">
+          <p:sp>
+            <p:nvSpPr>
+              <p:cNvPr id="17" name="矩形 16"/>
+              <p:cNvSpPr/>
+              <p:nvPr/>
+            </p:nvSpPr>
+            <p:spPr>
+              <a:xfrm>
+                <a:off x="9039992" y="3274570"/>
+                <a:ext cx="1528945" cy="369332"/>
+              </a:xfrm>
+              <a:prstGeom prst="rect">
+                <a:avLst/>
+              </a:prstGeom>
+            </p:spPr>
+            <p:txBody>
+              <a:bodyPr wrap="none">
+                <a:spAutoFit/>
+              </a:bodyPr>
+              <a:lstStyle/>
+              <a:p>
+                <a14:m>
+                  <m:oMath xmlns:m="http://schemas.openxmlformats.org/officeDocument/2006/math">
+                    <m:sSub>
+                      <m:sSubPr>
+                        <m:ctrlPr>
+                          <a:rPr lang="en-US" b="1" i="1" smtClean="0">
+                            <a:solidFill>
+                              <a:srgbClr val="FF0000"/>
+                            </a:solidFill>
+                            <a:latin typeface="Cambria Math" panose="02040503050406030204" pitchFamily="18" charset="0"/>
+                            <a:ea typeface="微软雅黑" panose="020B0503020204020204" pitchFamily="34" charset="-122"/>
+                            <a:cs typeface="Arial" panose="020B0604020202020204" pitchFamily="34" charset="0"/>
+                          </a:rPr>
+                        </m:ctrlPr>
+                      </m:sSubPr>
+                      <m:e>
+                        <m:r>
+                          <a:rPr lang="en-US" b="1" i="1" smtClean="0">
+                            <a:solidFill>
+                              <a:srgbClr val="FF0000"/>
+                            </a:solidFill>
+                            <a:latin typeface="Cambria Math" panose="02040503050406030204" pitchFamily="18" charset="0"/>
+                            <a:ea typeface="微软雅黑" panose="020B0503020204020204" pitchFamily="34" charset="-122"/>
+                            <a:cs typeface="Arial" panose="020B0604020202020204" pitchFamily="34" charset="0"/>
+                          </a:rPr>
+                          <m:t>𝒖</m:t>
+                        </m:r>
+                      </m:e>
+                      <m:sub>
+                        <m:r>
+                          <a:rPr lang="en-US" b="1" i="1" smtClean="0">
+                            <a:solidFill>
+                              <a:srgbClr val="FF0000"/>
+                            </a:solidFill>
+                            <a:latin typeface="Cambria Math" panose="02040503050406030204" pitchFamily="18" charset="0"/>
+                            <a:ea typeface="微软雅黑" panose="020B0503020204020204" pitchFamily="34" charset="-122"/>
+                            <a:cs typeface="Arial" panose="020B0604020202020204" pitchFamily="34" charset="0"/>
+                          </a:rPr>
+                          <m:t>𝑹</m:t>
+                        </m:r>
+                      </m:sub>
+                    </m:sSub>
+                  </m:oMath>
+                </a14:m>
+                <a:r>
+                  <a:rPr lang="en-US" b="1" dirty="0" smtClean="0">
+                    <a:solidFill>
+                      <a:srgbClr val="FF0000"/>
+                    </a:solidFill>
+                    <a:latin typeface="Arial" panose="020B0604020202020204" pitchFamily="34" charset="0"/>
+                    <a:ea typeface="微软雅黑" panose="020B0503020204020204" pitchFamily="34" charset="-122"/>
+                    <a:cs typeface="Arial" panose="020B0604020202020204" pitchFamily="34" charset="0"/>
+                  </a:rPr>
+                  <a:t> </a:t>
+                </a:r>
+                <a:r>
+                  <a:rPr lang="en-US" b="1" dirty="0" smtClean="0">
+                    <a:solidFill>
+                      <a:srgbClr val="FF0000"/>
+                    </a:solidFill>
+                    <a:latin typeface="Arial" panose="020B0604020202020204" pitchFamily="34" charset="0"/>
+                    <a:ea typeface="微软雅黑" panose="020B0503020204020204" pitchFamily="34" charset="-122"/>
+                    <a:cs typeface="Arial" panose="020B0604020202020204" pitchFamily="34" charset="0"/>
+                  </a:rPr>
+                  <a:t>Almost 0</a:t>
+                </a:r>
+                <a:endParaRPr lang="en-US" b="1" dirty="0">
+                  <a:solidFill>
+                    <a:srgbClr val="FF0000"/>
+                  </a:solidFill>
+                </a:endParaRPr>
+              </a:p>
+            </p:txBody>
+          </p:sp>
+        </mc:Choice>
+        <mc:Fallback>
+          <p:sp>
+            <p:nvSpPr>
+              <p:cNvPr id="17" name="矩形 16"/>
+              <p:cNvSpPr>
+                <a:spLocks noRot="1" noChangeAspect="1" noMove="1" noResize="1" noEditPoints="1" noAdjustHandles="1" noChangeArrowheads="1" noChangeShapeType="1" noTextEdit="1"/>
+              </p:cNvSpPr>
+              <p:nvPr/>
+            </p:nvSpPr>
+            <p:spPr>
+              <a:xfrm>
+                <a:off x="9039992" y="3274570"/>
+                <a:ext cx="1528945" cy="369332"/>
+              </a:xfrm>
+              <a:prstGeom prst="rect">
+                <a:avLst/>
+              </a:prstGeom>
+              <a:blipFill>
+                <a:blip r:embed="rId8"/>
+                <a:stretch>
+                  <a:fillRect t="-9836" b="-22951"/>
+                </a:stretch>
+              </a:blipFill>
+            </p:spPr>
+            <p:txBody>
+              <a:bodyPr/>
+              <a:lstStyle/>
+              <a:p>
+                <a:r>
+                  <a:rPr lang="en-US">
+                    <a:noFill/>
+                  </a:rPr>
+                  <a:t> </a:t>
+                </a:r>
+              </a:p>
+            </p:txBody>
+          </p:sp>
+        </mc:Fallback>
+      </mc:AlternateContent>
+      <p:sp>
+        <p:nvSpPr>
+          <p:cNvPr id="18" name="矩形 17"/>
+          <p:cNvSpPr/>
+          <p:nvPr/>
+        </p:nvSpPr>
+        <p:spPr>
+          <a:xfrm>
+            <a:off x="9276306" y="987902"/>
+            <a:ext cx="2666114" cy="369332"/>
+          </a:xfrm>
+          <a:prstGeom prst="rect">
+            <a:avLst/>
+          </a:prstGeom>
+        </p:spPr>
+        <p:txBody>
+          <a:bodyPr wrap="none">
+            <a:spAutoFit/>
+          </a:bodyPr>
+          <a:lstStyle/>
+          <a:p>
+            <a:r>
+              <a:rPr lang="en-US" b="1" dirty="0" smtClean="0">
+                <a:solidFill>
+                  <a:srgbClr val="FF0000"/>
+                </a:solidFill>
+                <a:latin typeface="Arial" panose="020B0604020202020204" pitchFamily="34" charset="0"/>
+                <a:ea typeface="微软雅黑" panose="020B0503020204020204" pitchFamily="34" charset="-122"/>
+                <a:cs typeface="Arial" panose="020B0604020202020204" pitchFamily="34" charset="0"/>
+              </a:rPr>
+              <a:t>Momentum </a:t>
+            </a:r>
+            <a:r>
+              <a:rPr lang="en-US" b="1" dirty="0" smtClean="0">
+                <a:solidFill>
+                  <a:srgbClr val="FF0000"/>
+                </a:solidFill>
+                <a:latin typeface="Arial" panose="020B0604020202020204" pitchFamily="34" charset="0"/>
+                <a:ea typeface="微软雅黑" panose="020B0503020204020204" pitchFamily="34" charset="-122"/>
+                <a:cs typeface="Arial" panose="020B0604020202020204" pitchFamily="34" charset="0"/>
+              </a:rPr>
+              <a:t>+ Pressure</a:t>
+            </a:r>
+            <a:endParaRPr lang="en-US" b="1" dirty="0">
+              <a:solidFill>
+                <a:srgbClr val="FF0000"/>
+              </a:solidFill>
+            </a:endParaRPr>
+          </a:p>
+        </p:txBody>
+      </p:sp>
+      <p:sp>
+        <p:nvSpPr>
+          <p:cNvPr id="19" name="矩形 18"/>
+          <p:cNvSpPr/>
+          <p:nvPr/>
+        </p:nvSpPr>
+        <p:spPr>
+          <a:xfrm>
+            <a:off x="9062910" y="1450207"/>
+            <a:ext cx="3052042" cy="1754326"/>
+          </a:xfrm>
+          <a:prstGeom prst="rect">
+            <a:avLst/>
+          </a:prstGeom>
+        </p:spPr>
+        <p:txBody>
+          <a:bodyPr wrap="square">
+            <a:spAutoFit/>
+          </a:bodyPr>
+          <a:lstStyle/>
+          <a:p>
+            <a:r>
+              <a:rPr lang="en-US" b="1" dirty="0" smtClean="0">
+                <a:latin typeface="Arial" panose="020B0604020202020204" pitchFamily="34" charset="0"/>
+                <a:ea typeface="微软雅黑" panose="020B0503020204020204" pitchFamily="34" charset="-122"/>
+                <a:cs typeface="Arial" panose="020B0604020202020204" pitchFamily="34" charset="0"/>
+              </a:rPr>
+              <a:t>to verify the validity of the </a:t>
+            </a:r>
+            <a:r>
+              <a:rPr lang="en-US" b="1" dirty="0" smtClean="0">
+                <a:latin typeface="Arial" panose="020B0604020202020204" pitchFamily="34" charset="0"/>
+                <a:ea typeface="微软雅黑" panose="020B0503020204020204" pitchFamily="34" charset="-122"/>
+                <a:cs typeface="Arial" panose="020B0604020202020204" pitchFamily="34" charset="0"/>
+              </a:rPr>
+              <a:t>whole DNS process, including the document and the script, except the solution of  Pressure Poisson eq.</a:t>
+            </a:r>
+            <a:endParaRPr lang="en-US" b="1" dirty="0">
+              <a:latin typeface="Arial" panose="020B0604020202020204" pitchFamily="34" charset="0"/>
+              <a:ea typeface="微软雅黑" panose="020B0503020204020204" pitchFamily="34" charset="-122"/>
+              <a:cs typeface="Arial" panose="020B0604020202020204" pitchFamily="34" charset="0"/>
+            </a:endParaRPr>
+          </a:p>
+        </p:txBody>
+      </p:sp>
+    </p:spTree>
+    <p:extLst>
+      <p:ext uri="{BB962C8B-B14F-4D97-AF65-F5344CB8AC3E}">
+        <p14:creationId xmlns:p14="http://schemas.microsoft.com/office/powerpoint/2010/main" val="3017835475"/>
+      </p:ext>
+    </p:extLst>
+  </p:cSld>
+  <p:clrMapOvr>
+    <a:masterClrMapping/>
+  </p:clrMapOvr>
+</p:sld>
+</file>
+
+<file path=ppt/slides/slide4.xml><?xml version="1.0" encoding="utf-8"?>
+<p:sld xmlns:a="http://schemas.openxmlformats.org/drawingml/2006/main" xmlns:r="http://schemas.openxmlformats.org/officeDocument/2006/relationships" xmlns:p="http://schemas.openxmlformats.org/presentationml/2006/main">
+  <p:cSld>
+    <p:spTree>
+      <p:nvGrpSpPr>
+        <p:cNvPr id="1" name=""/>
+        <p:cNvGrpSpPr/>
+        <p:nvPr/>
+      </p:nvGrpSpPr>
+      <p:grpSpPr>
+        <a:xfrm>
+          <a:off x="0" y="0"/>
+          <a:ext cx="0" cy="0"/>
+          <a:chOff x="0" y="0"/>
+          <a:chExt cx="0" cy="0"/>
+        </a:xfrm>
+      </p:grpSpPr>
+      <p:sp>
+        <p:nvSpPr>
+          <p:cNvPr id="4" name="矩形 3"/>
+          <p:cNvSpPr/>
+          <p:nvPr/>
+        </p:nvSpPr>
+        <p:spPr>
+          <a:xfrm>
+            <a:off x="0" y="3037609"/>
+            <a:ext cx="12360243" cy="523220"/>
+          </a:xfrm>
+          <a:prstGeom prst="rect">
+            <a:avLst/>
+          </a:prstGeom>
+        </p:spPr>
+        <p:txBody>
+          <a:bodyPr wrap="none">
+            <a:spAutoFit/>
+          </a:bodyPr>
+          <a:lstStyle/>
+          <a:p>
+            <a:r>
+              <a:rPr lang="en-US" sz="2800" b="1" dirty="0" smtClean="0">
+                <a:latin typeface="微软雅黑" panose="020B0503020204020204" pitchFamily="34" charset="-122"/>
+                <a:ea typeface="微软雅黑" panose="020B0503020204020204" pitchFamily="34" charset="-122"/>
+              </a:rPr>
+              <a:t>N</a:t>
+            </a:r>
+            <a:r>
+              <a:rPr lang="en-US" altLang="zh-CN" sz="2800" b="1" dirty="0" smtClean="0">
+                <a:latin typeface="微软雅黑" panose="020B0503020204020204" pitchFamily="34" charset="-122"/>
+                <a:ea typeface="微软雅黑" panose="020B0503020204020204" pitchFamily="34" charset="-122"/>
+              </a:rPr>
+              <a:t>ow, time for developing more powerful pressure update schemes</a:t>
+            </a:r>
+            <a:endParaRPr lang="en-US" sz="2800" b="1" dirty="0">
+              <a:latin typeface="微软雅黑" panose="020B0503020204020204" pitchFamily="34" charset="-122"/>
+              <a:ea typeface="微软雅黑" panose="020B0503020204020204" pitchFamily="34" charset="-122"/>
+            </a:endParaRPr>
+          </a:p>
+        </p:txBody>
+      </p:sp>
+    </p:spTree>
+    <p:extLst>
+      <p:ext uri="{BB962C8B-B14F-4D97-AF65-F5344CB8AC3E}">
+        <p14:creationId xmlns:p14="http://schemas.microsoft.com/office/powerpoint/2010/main" val="82999380"/>
       </p:ext>
     </p:extLst>
   </p:cSld>

--- a/CylindericalCoordinates/KeyResults.pptx
+++ b/CylindericalCoordinates/KeyResults.pptx
@@ -5,13 +5,14 @@
     <p:sldMasterId id="2147483648" r:id="rId1"/>
   </p:sldMasterIdLst>
   <p:notesMasterIdLst>
-    <p:notesMasterId r:id="rId6"/>
+    <p:notesMasterId r:id="rId7"/>
   </p:notesMasterIdLst>
   <p:sldIdLst>
     <p:sldId id="256" r:id="rId2"/>
     <p:sldId id="257" r:id="rId3"/>
     <p:sldId id="258" r:id="rId4"/>
     <p:sldId id="259" r:id="rId5"/>
+    <p:sldId id="260" r:id="rId6"/>
   </p:sldIdLst>
   <p:sldSz cx="12192000" cy="6858000"/>
   <p:notesSz cx="6858000" cy="9144000"/>
@@ -3931,19 +3932,7 @@
                         <a:rPr lang="en-US" b="0" i="1" smtClean="0">
                           <a:latin typeface="Cambria Math" panose="02040503050406030204" pitchFamily="18" charset="0"/>
                         </a:rPr>
-                        <m:t>=</m:t>
-                      </m:r>
-                      <m:r>
-                        <a:rPr lang="en-US" b="0" i="1" smtClean="0">
-                          <a:latin typeface="Cambria Math" panose="02040503050406030204" pitchFamily="18" charset="0"/>
-                        </a:rPr>
-                        <m:t>0</m:t>
-                      </m:r>
-                      <m:r>
-                        <a:rPr lang="en-US" b="0" i="1" smtClean="0">
-                          <a:latin typeface="Cambria Math" panose="02040503050406030204" pitchFamily="18" charset="0"/>
-                        </a:rPr>
-                        <m:t>,</m:t>
+                        <m:t>=0,</m:t>
                       </m:r>
                       <m:sSub>
                         <m:sSubPr>
@@ -3974,13 +3963,7 @@
                         <a:rPr lang="en-US" b="0" i="1" smtClean="0">
                           <a:latin typeface="Cambria Math" panose="02040503050406030204" pitchFamily="18" charset="0"/>
                         </a:rPr>
-                        <m:t>=</m:t>
-                      </m:r>
-                      <m:r>
-                        <a:rPr lang="en-US" b="0" i="1" smtClean="0">
-                          <a:latin typeface="Cambria Math" panose="02040503050406030204" pitchFamily="18" charset="0"/>
-                        </a:rPr>
-                        <m:t>0</m:t>
+                        <m:t>=0</m:t>
                       </m:r>
                     </m:oMath>
                   </m:oMathPara>
@@ -7064,54 +7047,6 @@
       </p:pic>
       <p:pic>
         <p:nvPicPr>
-          <p:cNvPr id="12" name="图片 11"/>
-          <p:cNvPicPr>
-            <a:picLocks noChangeAspect="1"/>
-          </p:cNvPicPr>
-          <p:nvPr/>
-        </p:nvPicPr>
-        <p:blipFill>
-          <a:blip r:embed="rId5"/>
-          <a:stretch>
-            <a:fillRect/>
-          </a:stretch>
-        </p:blipFill>
-        <p:spPr>
-          <a:xfrm>
-            <a:off x="4563587" y="896830"/>
-            <a:ext cx="4476405" cy="2993179"/>
-          </a:xfrm>
-          <a:prstGeom prst="rect">
-            <a:avLst/>
-          </a:prstGeom>
-        </p:spPr>
-      </p:pic>
-      <p:pic>
-        <p:nvPicPr>
-          <p:cNvPr id="13" name="图片 12"/>
-          <p:cNvPicPr>
-            <a:picLocks noChangeAspect="1"/>
-          </p:cNvPicPr>
-          <p:nvPr/>
-        </p:nvPicPr>
-        <p:blipFill>
-          <a:blip r:embed="rId6"/>
-          <a:stretch>
-            <a:fillRect/>
-          </a:stretch>
-        </p:blipFill>
-        <p:spPr>
-          <a:xfrm>
-            <a:off x="81280" y="3890009"/>
-            <a:ext cx="4289170" cy="2831600"/>
-          </a:xfrm>
-          <a:prstGeom prst="rect">
-            <a:avLst/>
-          </a:prstGeom>
-        </p:spPr>
-      </p:pic>
-      <p:pic>
-        <p:nvPicPr>
           <p:cNvPr id="14" name="图片 13"/>
           <p:cNvPicPr>
             <a:picLocks noChangeAspect="1"/>
@@ -7119,7 +7054,7 @@
           <p:nvPr/>
         </p:nvPicPr>
         <p:blipFill rotWithShape="1">
-          <a:blip r:embed="rId7">
+          <a:blip r:embed="rId5">
             <a:extLst>
               <a:ext uri="{28A0092B-C50C-407E-A947-70E740481C1C}">
                 <a14:useLocalDpi xmlns:a14="http://schemas.microsoft.com/office/drawing/2010/main" val="0"/>
@@ -7131,7 +7066,7 @@
         </p:blipFill>
         <p:spPr>
           <a:xfrm>
-            <a:off x="4838370" y="3783977"/>
+            <a:off x="5437762" y="3774012"/>
             <a:ext cx="5750561" cy="2815591"/>
           </a:xfrm>
           <a:prstGeom prst="rect">
@@ -7147,7 +7082,7 @@
         </p:nvSpPr>
         <p:spPr>
           <a:xfrm>
-            <a:off x="4838370" y="6508988"/>
+            <a:off x="5437762" y="6499023"/>
             <a:ext cx="6413058" cy="369332"/>
           </a:xfrm>
           <a:prstGeom prst="rect">
@@ -7295,7 +7230,7 @@
                 <a:avLst/>
               </a:prstGeom>
               <a:blipFill>
-                <a:blip r:embed="rId8"/>
+                <a:blip r:embed="rId6"/>
                 <a:stretch>
                   <a:fillRect t="-9836" b="-22951"/>
                 </a:stretch>
@@ -7375,8 +7310,8 @@
         </p:nvSpPr>
         <p:spPr>
           <a:xfrm>
-            <a:off x="9062910" y="1450207"/>
-            <a:ext cx="3052042" cy="1754326"/>
+            <a:off x="9062910" y="1520557"/>
+            <a:ext cx="3052042" cy="1477328"/>
           </a:xfrm>
           <a:prstGeom prst="rect">
             <a:avLst/>
@@ -7402,7 +7337,7 @@
                 <a:ea typeface="微软雅黑" panose="020B0503020204020204" pitchFamily="34" charset="-122"/>
                 <a:cs typeface="Arial" panose="020B0604020202020204" pitchFamily="34" charset="0"/>
               </a:rPr>
-              <a:t>whole DNS process, including the document and the script, except the solution of  Pressure Poisson eq.</a:t>
+              <a:t>whole DNS process, including the document and the script, except the solution of P’ Poisson eq.</a:t>
             </a:r>
             <a:endParaRPr lang="en-US" b="1" dirty="0">
               <a:latin typeface="Arial" panose="020B0604020202020204" pitchFamily="34" charset="0"/>
@@ -7412,6 +7347,803 @@
           </a:p>
         </p:txBody>
       </p:sp>
+      <p:pic>
+        <p:nvPicPr>
+          <p:cNvPr id="20" name="图片 19"/>
+          <p:cNvPicPr>
+            <a:picLocks noChangeAspect="1"/>
+          </p:cNvPicPr>
+          <p:nvPr/>
+        </p:nvPicPr>
+        <p:blipFill>
+          <a:blip r:embed="rId7"/>
+          <a:stretch>
+            <a:fillRect/>
+          </a:stretch>
+        </p:blipFill>
+        <p:spPr>
+          <a:xfrm>
+            <a:off x="4390770" y="896830"/>
+            <a:ext cx="4634159" cy="2919315"/>
+          </a:xfrm>
+          <a:prstGeom prst="rect">
+            <a:avLst/>
+          </a:prstGeom>
+        </p:spPr>
+      </p:pic>
+      <p:pic>
+        <p:nvPicPr>
+          <p:cNvPr id="21" name="图片 20"/>
+          <p:cNvPicPr>
+            <a:picLocks noChangeAspect="1"/>
+          </p:cNvPicPr>
+          <p:nvPr/>
+        </p:nvPicPr>
+        <p:blipFill>
+          <a:blip r:embed="rId8"/>
+          <a:stretch>
+            <a:fillRect/>
+          </a:stretch>
+        </p:blipFill>
+        <p:spPr>
+          <a:xfrm>
+            <a:off x="81056" y="3890009"/>
+            <a:ext cx="4694209" cy="2959790"/>
+          </a:xfrm>
+          <a:prstGeom prst="rect">
+            <a:avLst/>
+          </a:prstGeom>
+        </p:spPr>
+      </p:pic>
+      <mc:AlternateContent xmlns:mc="http://schemas.openxmlformats.org/markup-compatibility/2006">
+        <mc:Choice xmlns:a14="http://schemas.microsoft.com/office/drawing/2010/main" Requires="a14">
+          <p:sp>
+            <p:nvSpPr>
+              <p:cNvPr id="22" name="矩形 21"/>
+              <p:cNvSpPr/>
+              <p:nvPr/>
+            </p:nvSpPr>
+            <p:spPr>
+              <a:xfrm>
+                <a:off x="6078286" y="4818453"/>
+                <a:ext cx="1888466" cy="564835"/>
+              </a:xfrm>
+              <a:prstGeom prst="rect">
+                <a:avLst/>
+              </a:prstGeom>
+            </p:spPr>
+            <p:txBody>
+              <a:bodyPr wrap="none">
+                <a:spAutoFit/>
+              </a:bodyPr>
+              <a:lstStyle/>
+              <a:p>
+                <a:pPr/>
+                <a14:m>
+                  <m:oMathPara xmlns:m="http://schemas.openxmlformats.org/officeDocument/2006/math">
+                    <m:oMathParaPr>
+                      <m:jc m:val="centerGroup"/>
+                    </m:oMathParaPr>
+                    <m:oMath xmlns:m="http://schemas.openxmlformats.org/officeDocument/2006/math">
+                      <m:sSub>
+                        <m:sSubPr>
+                          <m:ctrlPr>
+                            <a:rPr lang="en-US" b="0" i="1" smtClean="0">
+                              <a:latin typeface="Cambria Math" panose="02040503050406030204" pitchFamily="18" charset="0"/>
+                            </a:rPr>
+                          </m:ctrlPr>
+                        </m:sSubPr>
+                        <m:e>
+                          <m:r>
+                            <a:rPr lang="en-US" b="0" i="1" smtClean="0">
+                              <a:latin typeface="Cambria Math" panose="02040503050406030204" pitchFamily="18" charset="0"/>
+                            </a:rPr>
+                            <m:t>𝑈</m:t>
+                          </m:r>
+                        </m:e>
+                        <m:sub>
+                          <m:r>
+                            <m:rPr>
+                              <m:sty m:val="p"/>
+                            </m:rPr>
+                            <a:rPr lang="en-US" b="0" i="0" smtClean="0">
+                              <a:latin typeface="Cambria Math" panose="02040503050406030204" pitchFamily="18" charset="0"/>
+                            </a:rPr>
+                            <m:t>Θ</m:t>
+                          </m:r>
+                          <m:r>
+                            <a:rPr lang="en-US" b="0" i="0" smtClean="0">
+                              <a:latin typeface="Cambria Math" panose="02040503050406030204" pitchFamily="18" charset="0"/>
+                            </a:rPr>
+                            <m:t>,</m:t>
+                          </m:r>
+                          <m:r>
+                            <m:rPr>
+                              <m:sty m:val="p"/>
+                            </m:rPr>
+                            <a:rPr lang="en-US" b="0" i="0" smtClean="0">
+                              <a:latin typeface="Cambria Math" panose="02040503050406030204" pitchFamily="18" charset="0"/>
+                            </a:rPr>
+                            <m:t>TH</m:t>
+                          </m:r>
+                        </m:sub>
+                      </m:sSub>
+                      <m:r>
+                        <a:rPr lang="en-US" b="0" i="1" smtClean="0">
+                          <a:latin typeface="Cambria Math" panose="02040503050406030204" pitchFamily="18" charset="0"/>
+                        </a:rPr>
+                        <m:t>=</m:t>
+                      </m:r>
+                      <m:f>
+                        <m:fPr>
+                          <m:ctrlPr>
+                            <a:rPr lang="en-US" b="0" i="1" smtClean="0">
+                              <a:latin typeface="Cambria Math" panose="02040503050406030204" pitchFamily="18" charset="0"/>
+                            </a:rPr>
+                          </m:ctrlPr>
+                        </m:fPr>
+                        <m:num>
+                          <m:sSub>
+                            <m:sSubPr>
+                              <m:ctrlPr>
+                                <a:rPr lang="en-US" b="0" i="1" smtClean="0">
+                                  <a:latin typeface="Cambria Math" panose="02040503050406030204" pitchFamily="18" charset="0"/>
+                                </a:rPr>
+                              </m:ctrlPr>
+                            </m:sSubPr>
+                            <m:e>
+                              <m:r>
+                                <a:rPr lang="en-US" b="0" i="1" smtClean="0">
+                                  <a:latin typeface="Cambria Math" panose="02040503050406030204" pitchFamily="18" charset="0"/>
+                                </a:rPr>
+                                <m:t>𝑐</m:t>
+                              </m:r>
+                            </m:e>
+                            <m:sub>
+                              <m:r>
+                                <a:rPr lang="en-US" b="0" i="1" smtClean="0">
+                                  <a:latin typeface="Cambria Math" panose="02040503050406030204" pitchFamily="18" charset="0"/>
+                                </a:rPr>
+                                <m:t>1</m:t>
+                              </m:r>
+                            </m:sub>
+                          </m:sSub>
+                        </m:num>
+                        <m:den>
+                          <m:acc>
+                            <m:accPr>
+                              <m:chr m:val="̂"/>
+                              <m:ctrlPr>
+                                <a:rPr lang="en-US" b="0" i="1" smtClean="0">
+                                  <a:latin typeface="Cambria Math" panose="02040503050406030204" pitchFamily="18" charset="0"/>
+                                </a:rPr>
+                              </m:ctrlPr>
+                            </m:accPr>
+                            <m:e>
+                              <m:r>
+                                <a:rPr lang="en-US" b="0" i="1" smtClean="0">
+                                  <a:latin typeface="Cambria Math" panose="02040503050406030204" pitchFamily="18" charset="0"/>
+                                </a:rPr>
+                                <m:t>𝑟</m:t>
+                              </m:r>
+                            </m:e>
+                          </m:acc>
+                        </m:den>
+                      </m:f>
+                      <m:r>
+                        <a:rPr lang="en-US" b="0" i="1" smtClean="0">
+                          <a:latin typeface="Cambria Math" panose="02040503050406030204" pitchFamily="18" charset="0"/>
+                        </a:rPr>
+                        <m:t>+</m:t>
+                      </m:r>
+                      <m:sSub>
+                        <m:sSubPr>
+                          <m:ctrlPr>
+                            <a:rPr lang="en-US" b="0" i="1" smtClean="0">
+                              <a:latin typeface="Cambria Math" panose="02040503050406030204" pitchFamily="18" charset="0"/>
+                            </a:rPr>
+                          </m:ctrlPr>
+                        </m:sSubPr>
+                        <m:e>
+                          <m:r>
+                            <a:rPr lang="en-US" b="0" i="1" smtClean="0">
+                              <a:latin typeface="Cambria Math" panose="02040503050406030204" pitchFamily="18" charset="0"/>
+                            </a:rPr>
+                            <m:t>𝑐</m:t>
+                          </m:r>
+                        </m:e>
+                        <m:sub>
+                          <m:r>
+                            <a:rPr lang="en-US" b="0" i="1" smtClean="0">
+                              <a:latin typeface="Cambria Math" panose="02040503050406030204" pitchFamily="18" charset="0"/>
+                            </a:rPr>
+                            <m:t>2</m:t>
+                          </m:r>
+                        </m:sub>
+                      </m:sSub>
+                      <m:acc>
+                        <m:accPr>
+                          <m:chr m:val="̂"/>
+                          <m:ctrlPr>
+                            <a:rPr lang="en-US" b="0" i="1" smtClean="0">
+                              <a:latin typeface="Cambria Math" panose="02040503050406030204" pitchFamily="18" charset="0"/>
+                            </a:rPr>
+                          </m:ctrlPr>
+                        </m:accPr>
+                        <m:e>
+                          <m:r>
+                            <a:rPr lang="en-US" b="0" i="1" smtClean="0">
+                              <a:latin typeface="Cambria Math" panose="02040503050406030204" pitchFamily="18" charset="0"/>
+                            </a:rPr>
+                            <m:t>𝑟</m:t>
+                          </m:r>
+                        </m:e>
+                      </m:acc>
+                    </m:oMath>
+                  </m:oMathPara>
+                </a14:m>
+                <a:endParaRPr lang="en-US" dirty="0"/>
+              </a:p>
+            </p:txBody>
+          </p:sp>
+        </mc:Choice>
+        <mc:Fallback>
+          <p:sp>
+            <p:nvSpPr>
+              <p:cNvPr id="22" name="矩形 21"/>
+              <p:cNvSpPr>
+                <a:spLocks noRot="1" noChangeAspect="1" noMove="1" noResize="1" noEditPoints="1" noAdjustHandles="1" noChangeArrowheads="1" noChangeShapeType="1" noTextEdit="1"/>
+              </p:cNvSpPr>
+              <p:nvPr/>
+            </p:nvSpPr>
+            <p:spPr>
+              <a:xfrm>
+                <a:off x="6078286" y="4818453"/>
+                <a:ext cx="1888466" cy="564835"/>
+              </a:xfrm>
+              <a:prstGeom prst="rect">
+                <a:avLst/>
+              </a:prstGeom>
+              <a:blipFill>
+                <a:blip r:embed="rId9"/>
+                <a:stretch>
+                  <a:fillRect/>
+                </a:stretch>
+              </a:blipFill>
+            </p:spPr>
+            <p:txBody>
+              <a:bodyPr/>
+              <a:lstStyle/>
+              <a:p>
+                <a:r>
+                  <a:rPr lang="en-US">
+                    <a:noFill/>
+                  </a:rPr>
+                  <a:t> </a:t>
+                </a:r>
+              </a:p>
+            </p:txBody>
+          </p:sp>
+        </mc:Fallback>
+      </mc:AlternateContent>
+      <mc:AlternateContent xmlns:mc="http://schemas.openxmlformats.org/markup-compatibility/2006">
+        <mc:Choice xmlns:a14="http://schemas.microsoft.com/office/drawing/2010/main" Requires="a14">
+          <p:sp>
+            <p:nvSpPr>
+              <p:cNvPr id="23" name="矩形 22"/>
+              <p:cNvSpPr/>
+              <p:nvPr/>
+            </p:nvSpPr>
+            <p:spPr>
+              <a:xfrm>
+                <a:off x="7548428" y="5383930"/>
+                <a:ext cx="1597617" cy="708207"/>
+              </a:xfrm>
+              <a:prstGeom prst="rect">
+                <a:avLst/>
+              </a:prstGeom>
+            </p:spPr>
+            <p:txBody>
+              <a:bodyPr wrap="none">
+                <a:spAutoFit/>
+              </a:bodyPr>
+              <a:lstStyle/>
+              <a:p>
+                <a:pPr/>
+                <a14:m>
+                  <m:oMathPara xmlns:m="http://schemas.openxmlformats.org/officeDocument/2006/math">
+                    <m:oMathParaPr>
+                      <m:jc m:val="centerGroup"/>
+                    </m:oMathParaPr>
+                    <m:oMath xmlns:m="http://schemas.openxmlformats.org/officeDocument/2006/math">
+                      <m:sSub>
+                        <m:sSubPr>
+                          <m:ctrlPr>
+                            <a:rPr lang="en-US" b="0" i="1" smtClean="0">
+                              <a:latin typeface="Cambria Math" panose="02040503050406030204" pitchFamily="18" charset="0"/>
+                            </a:rPr>
+                          </m:ctrlPr>
+                        </m:sSubPr>
+                        <m:e>
+                          <m:r>
+                            <a:rPr lang="en-US" b="0" i="1" smtClean="0">
+                              <a:latin typeface="Cambria Math" panose="02040503050406030204" pitchFamily="18" charset="0"/>
+                            </a:rPr>
+                            <m:t>𝑐</m:t>
+                          </m:r>
+                        </m:e>
+                        <m:sub>
+                          <m:r>
+                            <a:rPr lang="en-US" b="0" i="1" smtClean="0">
+                              <a:latin typeface="Cambria Math" panose="02040503050406030204" pitchFamily="18" charset="0"/>
+                            </a:rPr>
+                            <m:t>1</m:t>
+                          </m:r>
+                        </m:sub>
+                      </m:sSub>
+                      <m:r>
+                        <a:rPr lang="en-US" b="0" i="1" smtClean="0">
+                          <a:latin typeface="Cambria Math" panose="02040503050406030204" pitchFamily="18" charset="0"/>
+                        </a:rPr>
+                        <m:t>=</m:t>
+                      </m:r>
+                      <m:f>
+                        <m:fPr>
+                          <m:ctrlPr>
+                            <a:rPr lang="en-US" b="0" i="1" smtClean="0">
+                              <a:latin typeface="Cambria Math" panose="02040503050406030204" pitchFamily="18" charset="0"/>
+                            </a:rPr>
+                          </m:ctrlPr>
+                        </m:fPr>
+                        <m:num>
+                          <m:r>
+                            <m:rPr>
+                              <m:sty m:val="p"/>
+                            </m:rPr>
+                            <a:rPr lang="en-US" b="0" i="0" smtClean="0">
+                              <a:latin typeface="Cambria Math" panose="02040503050406030204" pitchFamily="18" charset="0"/>
+                            </a:rPr>
+                            <m:t>Δ</m:t>
+                          </m:r>
+                          <m:r>
+                            <a:rPr lang="en-US" b="0" i="1" smtClean="0">
+                              <a:latin typeface="Cambria Math" panose="02040503050406030204" pitchFamily="18" charset="0"/>
+                            </a:rPr>
+                            <m:t>𝑅</m:t>
+                          </m:r>
+                          <m:sSub>
+                            <m:sSubPr>
+                              <m:ctrlPr>
+                                <a:rPr lang="en-US" b="0" i="1" smtClean="0">
+                                  <a:latin typeface="Cambria Math" panose="02040503050406030204" pitchFamily="18" charset="0"/>
+                                </a:rPr>
+                              </m:ctrlPr>
+                            </m:sSubPr>
+                            <m:e>
+                              <m:r>
+                                <a:rPr lang="en-US" b="0" i="1" smtClean="0">
+                                  <a:latin typeface="Cambria Math" panose="02040503050406030204" pitchFamily="18" charset="0"/>
+                                </a:rPr>
+                                <m:t>𝑅</m:t>
+                              </m:r>
+                            </m:e>
+                            <m:sub>
+                              <m:r>
+                                <a:rPr lang="en-US" b="0" i="1" smtClean="0">
+                                  <a:latin typeface="Cambria Math" panose="02040503050406030204" pitchFamily="18" charset="0"/>
+                                </a:rPr>
+                                <m:t>𝑠</m:t>
+                              </m:r>
+                            </m:sub>
+                          </m:sSub>
+                        </m:num>
+                        <m:den>
+                          <m:sSubSup>
+                            <m:sSubSupPr>
+                              <m:ctrlPr>
+                                <a:rPr lang="en-US" b="0" i="1" smtClean="0">
+                                  <a:latin typeface="Cambria Math" panose="02040503050406030204" pitchFamily="18" charset="0"/>
+                                </a:rPr>
+                              </m:ctrlPr>
+                            </m:sSubSupPr>
+                            <m:e>
+                              <m:r>
+                                <a:rPr lang="en-US" b="0" i="1" smtClean="0">
+                                  <a:latin typeface="Cambria Math" panose="02040503050406030204" pitchFamily="18" charset="0"/>
+                                </a:rPr>
+                                <m:t>𝑅</m:t>
+                              </m:r>
+                            </m:e>
+                            <m:sub>
+                              <m:r>
+                                <a:rPr lang="en-US" b="0" i="1" smtClean="0">
+                                  <a:latin typeface="Cambria Math" panose="02040503050406030204" pitchFamily="18" charset="0"/>
+                                </a:rPr>
+                                <m:t>𝑠</m:t>
+                              </m:r>
+                            </m:sub>
+                            <m:sup>
+                              <m:r>
+                                <a:rPr lang="en-US" b="0" i="1" smtClean="0">
+                                  <a:latin typeface="Cambria Math" panose="02040503050406030204" pitchFamily="18" charset="0"/>
+                                </a:rPr>
+                                <m:t>2</m:t>
+                              </m:r>
+                            </m:sup>
+                          </m:sSubSup>
+                          <m:r>
+                            <a:rPr lang="en-US" b="0" i="1" smtClean="0">
+                              <a:latin typeface="Cambria Math" panose="02040503050406030204" pitchFamily="18" charset="0"/>
+                            </a:rPr>
+                            <m:t>−</m:t>
+                          </m:r>
+                          <m:sSubSup>
+                            <m:sSubSupPr>
+                              <m:ctrlPr>
+                                <a:rPr lang="en-US" b="0" i="1" smtClean="0">
+                                  <a:latin typeface="Cambria Math" panose="02040503050406030204" pitchFamily="18" charset="0"/>
+                                </a:rPr>
+                              </m:ctrlPr>
+                            </m:sSubSupPr>
+                            <m:e>
+                              <m:r>
+                                <a:rPr lang="en-US" b="0" i="1" smtClean="0">
+                                  <a:latin typeface="Cambria Math" panose="02040503050406030204" pitchFamily="18" charset="0"/>
+                                </a:rPr>
+                                <m:t>𝑅</m:t>
+                              </m:r>
+                            </m:e>
+                            <m:sub>
+                              <m:r>
+                                <a:rPr lang="en-US" b="0" i="1" smtClean="0">
+                                  <a:latin typeface="Cambria Math" panose="02040503050406030204" pitchFamily="18" charset="0"/>
+                                </a:rPr>
+                                <m:t>h</m:t>
+                              </m:r>
+                            </m:sub>
+                            <m:sup>
+                              <m:r>
+                                <a:rPr lang="en-US" b="0" i="1" smtClean="0">
+                                  <a:latin typeface="Cambria Math" panose="02040503050406030204" pitchFamily="18" charset="0"/>
+                                </a:rPr>
+                                <m:t>2</m:t>
+                              </m:r>
+                            </m:sup>
+                          </m:sSubSup>
+                        </m:den>
+                      </m:f>
+                    </m:oMath>
+                  </m:oMathPara>
+                </a14:m>
+                <a:endParaRPr lang="en-US" dirty="0"/>
+              </a:p>
+            </p:txBody>
+          </p:sp>
+        </mc:Choice>
+        <mc:Fallback>
+          <p:sp>
+            <p:nvSpPr>
+              <p:cNvPr id="23" name="矩形 22"/>
+              <p:cNvSpPr>
+                <a:spLocks noRot="1" noChangeAspect="1" noMove="1" noResize="1" noEditPoints="1" noAdjustHandles="1" noChangeArrowheads="1" noChangeShapeType="1" noTextEdit="1"/>
+              </p:cNvSpPr>
+              <p:nvPr/>
+            </p:nvSpPr>
+            <p:spPr>
+              <a:xfrm>
+                <a:off x="7548428" y="5383930"/>
+                <a:ext cx="1597617" cy="708207"/>
+              </a:xfrm>
+              <a:prstGeom prst="rect">
+                <a:avLst/>
+              </a:prstGeom>
+              <a:blipFill>
+                <a:blip r:embed="rId10"/>
+                <a:stretch>
+                  <a:fillRect/>
+                </a:stretch>
+              </a:blipFill>
+            </p:spPr>
+            <p:txBody>
+              <a:bodyPr/>
+              <a:lstStyle/>
+              <a:p>
+                <a:r>
+                  <a:rPr lang="en-US">
+                    <a:noFill/>
+                  </a:rPr>
+                  <a:t> </a:t>
+                </a:r>
+              </a:p>
+            </p:txBody>
+          </p:sp>
+        </mc:Fallback>
+      </mc:AlternateContent>
+      <mc:AlternateContent xmlns:mc="http://schemas.openxmlformats.org/markup-compatibility/2006">
+        <mc:Choice xmlns:a14="http://schemas.microsoft.com/office/drawing/2010/main" Requires="a14">
+          <p:sp>
+            <p:nvSpPr>
+              <p:cNvPr id="24" name="矩形 23"/>
+              <p:cNvSpPr/>
+              <p:nvPr/>
+            </p:nvSpPr>
+            <p:spPr>
+              <a:xfrm>
+                <a:off x="9049572" y="5294272"/>
+                <a:ext cx="1875770" cy="726353"/>
+              </a:xfrm>
+              <a:prstGeom prst="rect">
+                <a:avLst/>
+              </a:prstGeom>
+            </p:spPr>
+            <p:txBody>
+              <a:bodyPr wrap="none">
+                <a:spAutoFit/>
+              </a:bodyPr>
+              <a:lstStyle/>
+              <a:p>
+                <a:pPr/>
+                <a14:m>
+                  <m:oMathPara xmlns:m="http://schemas.openxmlformats.org/officeDocument/2006/math">
+                    <m:oMathParaPr>
+                      <m:jc m:val="centerGroup"/>
+                    </m:oMathParaPr>
+                    <m:oMath xmlns:m="http://schemas.openxmlformats.org/officeDocument/2006/math">
+                      <m:sSub>
+                        <m:sSubPr>
+                          <m:ctrlPr>
+                            <a:rPr lang="en-US" b="0" i="1" smtClean="0">
+                              <a:latin typeface="Cambria Math" panose="02040503050406030204" pitchFamily="18" charset="0"/>
+                            </a:rPr>
+                          </m:ctrlPr>
+                        </m:sSubPr>
+                        <m:e>
+                          <m:r>
+                            <a:rPr lang="en-US" b="0" i="1" smtClean="0">
+                              <a:latin typeface="Cambria Math" panose="02040503050406030204" pitchFamily="18" charset="0"/>
+                            </a:rPr>
+                            <m:t>𝑐</m:t>
+                          </m:r>
+                        </m:e>
+                        <m:sub>
+                          <m:r>
+                            <a:rPr lang="en-US" b="0" i="1" smtClean="0">
+                              <a:latin typeface="Cambria Math" panose="02040503050406030204" pitchFamily="18" charset="0"/>
+                            </a:rPr>
+                            <m:t>2</m:t>
+                          </m:r>
+                        </m:sub>
+                      </m:sSub>
+                      <m:r>
+                        <a:rPr lang="en-US" b="0" i="1" smtClean="0">
+                          <a:latin typeface="Cambria Math" panose="02040503050406030204" pitchFamily="18" charset="0"/>
+                        </a:rPr>
+                        <m:t>=</m:t>
+                      </m:r>
+                      <m:f>
+                        <m:fPr>
+                          <m:ctrlPr>
+                            <a:rPr lang="en-US" b="0" i="1" smtClean="0">
+                              <a:latin typeface="Cambria Math" panose="02040503050406030204" pitchFamily="18" charset="0"/>
+                            </a:rPr>
+                          </m:ctrlPr>
+                        </m:fPr>
+                        <m:num>
+                          <m:r>
+                            <a:rPr lang="en-US" b="0" i="1" smtClean="0">
+                              <a:latin typeface="Cambria Math" panose="02040503050406030204" pitchFamily="18" charset="0"/>
+                            </a:rPr>
+                            <m:t>1</m:t>
+                          </m:r>
+                        </m:num>
+                        <m:den>
+                          <m:r>
+                            <m:rPr>
+                              <m:sty m:val="p"/>
+                            </m:rPr>
+                            <a:rPr lang="en-US" b="0" i="0" smtClean="0">
+                              <a:latin typeface="Cambria Math" panose="02040503050406030204" pitchFamily="18" charset="0"/>
+                            </a:rPr>
+                            <m:t>Δ</m:t>
+                          </m:r>
+                          <m:r>
+                            <a:rPr lang="en-US" b="0" i="1" smtClean="0">
+                              <a:latin typeface="Cambria Math" panose="02040503050406030204" pitchFamily="18" charset="0"/>
+                            </a:rPr>
+                            <m:t>𝑅</m:t>
+                          </m:r>
+                        </m:den>
+                      </m:f>
+                      <m:f>
+                        <m:fPr>
+                          <m:ctrlPr>
+                            <a:rPr lang="en-US" b="0" i="1" smtClean="0">
+                              <a:latin typeface="Cambria Math" panose="02040503050406030204" pitchFamily="18" charset="0"/>
+                            </a:rPr>
+                          </m:ctrlPr>
+                        </m:fPr>
+                        <m:num>
+                          <m:sSub>
+                            <m:sSubPr>
+                              <m:ctrlPr>
+                                <a:rPr lang="en-US" b="0" i="1" smtClean="0">
+                                  <a:latin typeface="Cambria Math" panose="02040503050406030204" pitchFamily="18" charset="0"/>
+                                </a:rPr>
+                              </m:ctrlPr>
+                            </m:sSubPr>
+                            <m:e>
+                              <m:r>
+                                <a:rPr lang="en-US" b="0" i="1" smtClean="0">
+                                  <a:latin typeface="Cambria Math" panose="02040503050406030204" pitchFamily="18" charset="0"/>
+                                </a:rPr>
+                                <m:t>𝑅</m:t>
+                              </m:r>
+                            </m:e>
+                            <m:sub>
+                              <m:r>
+                                <a:rPr lang="en-US" b="0" i="1" smtClean="0">
+                                  <a:latin typeface="Cambria Math" panose="02040503050406030204" pitchFamily="18" charset="0"/>
+                                </a:rPr>
+                                <m:t>𝑠</m:t>
+                              </m:r>
+                            </m:sub>
+                          </m:sSub>
+                          <m:sSubSup>
+                            <m:sSubSupPr>
+                              <m:ctrlPr>
+                                <a:rPr lang="en-US" b="0" i="1" smtClean="0">
+                                  <a:latin typeface="Cambria Math" panose="02040503050406030204" pitchFamily="18" charset="0"/>
+                                </a:rPr>
+                              </m:ctrlPr>
+                            </m:sSubSupPr>
+                            <m:e>
+                              <m:r>
+                                <a:rPr lang="en-US" b="0" i="1" smtClean="0">
+                                  <a:latin typeface="Cambria Math" panose="02040503050406030204" pitchFamily="18" charset="0"/>
+                                </a:rPr>
+                                <m:t>𝑅</m:t>
+                              </m:r>
+                            </m:e>
+                            <m:sub>
+                              <m:r>
+                                <a:rPr lang="en-US" b="0" i="1" smtClean="0">
+                                  <a:latin typeface="Cambria Math" panose="02040503050406030204" pitchFamily="18" charset="0"/>
+                                </a:rPr>
+                                <m:t>h</m:t>
+                              </m:r>
+                            </m:sub>
+                            <m:sup>
+                              <m:r>
+                                <a:rPr lang="en-US" b="0" i="1" smtClean="0">
+                                  <a:latin typeface="Cambria Math" panose="02040503050406030204" pitchFamily="18" charset="0"/>
+                                </a:rPr>
+                                <m:t>2</m:t>
+                              </m:r>
+                            </m:sup>
+                          </m:sSubSup>
+                        </m:num>
+                        <m:den>
+                          <m:sSubSup>
+                            <m:sSubSupPr>
+                              <m:ctrlPr>
+                                <a:rPr lang="en-US" b="0" i="1" smtClean="0">
+                                  <a:latin typeface="Cambria Math" panose="02040503050406030204" pitchFamily="18" charset="0"/>
+                                </a:rPr>
+                              </m:ctrlPr>
+                            </m:sSubSupPr>
+                            <m:e>
+                              <m:r>
+                                <a:rPr lang="en-US" b="0" i="1" smtClean="0">
+                                  <a:latin typeface="Cambria Math" panose="02040503050406030204" pitchFamily="18" charset="0"/>
+                                </a:rPr>
+                                <m:t>𝑅</m:t>
+                              </m:r>
+                            </m:e>
+                            <m:sub>
+                              <m:r>
+                                <a:rPr lang="en-US" b="0" i="1" smtClean="0">
+                                  <a:latin typeface="Cambria Math" panose="02040503050406030204" pitchFamily="18" charset="0"/>
+                                </a:rPr>
+                                <m:t>𝑠</m:t>
+                              </m:r>
+                            </m:sub>
+                            <m:sup>
+                              <m:r>
+                                <a:rPr lang="en-US" b="0" i="1" smtClean="0">
+                                  <a:latin typeface="Cambria Math" panose="02040503050406030204" pitchFamily="18" charset="0"/>
+                                </a:rPr>
+                                <m:t>2</m:t>
+                              </m:r>
+                            </m:sup>
+                          </m:sSubSup>
+                          <m:r>
+                            <a:rPr lang="en-US" b="0" i="1" smtClean="0">
+                              <a:latin typeface="Cambria Math" panose="02040503050406030204" pitchFamily="18" charset="0"/>
+                            </a:rPr>
+                            <m:t>−</m:t>
+                          </m:r>
+                          <m:sSubSup>
+                            <m:sSubSupPr>
+                              <m:ctrlPr>
+                                <a:rPr lang="en-US" b="0" i="1" smtClean="0">
+                                  <a:latin typeface="Cambria Math" panose="02040503050406030204" pitchFamily="18" charset="0"/>
+                                </a:rPr>
+                              </m:ctrlPr>
+                            </m:sSubSupPr>
+                            <m:e>
+                              <m:r>
+                                <a:rPr lang="en-US" b="0" i="1" smtClean="0">
+                                  <a:latin typeface="Cambria Math" panose="02040503050406030204" pitchFamily="18" charset="0"/>
+                                </a:rPr>
+                                <m:t>𝑅</m:t>
+                              </m:r>
+                            </m:e>
+                            <m:sub>
+                              <m:r>
+                                <a:rPr lang="en-US" b="0" i="1" smtClean="0">
+                                  <a:latin typeface="Cambria Math" panose="02040503050406030204" pitchFamily="18" charset="0"/>
+                                </a:rPr>
+                                <m:t>h</m:t>
+                              </m:r>
+                            </m:sub>
+                            <m:sup>
+                              <m:r>
+                                <a:rPr lang="en-US" b="0" i="1" smtClean="0">
+                                  <a:latin typeface="Cambria Math" panose="02040503050406030204" pitchFamily="18" charset="0"/>
+                                </a:rPr>
+                                <m:t>2</m:t>
+                              </m:r>
+                            </m:sup>
+                          </m:sSubSup>
+                        </m:den>
+                      </m:f>
+                    </m:oMath>
+                  </m:oMathPara>
+                </a14:m>
+                <a:endParaRPr lang="en-US" dirty="0"/>
+              </a:p>
+            </p:txBody>
+          </p:sp>
+        </mc:Choice>
+        <mc:Fallback>
+          <p:sp>
+            <p:nvSpPr>
+              <p:cNvPr id="24" name="矩形 23"/>
+              <p:cNvSpPr>
+                <a:spLocks noRot="1" noChangeAspect="1" noMove="1" noResize="1" noEditPoints="1" noAdjustHandles="1" noChangeArrowheads="1" noChangeShapeType="1" noTextEdit="1"/>
+              </p:cNvSpPr>
+              <p:nvPr/>
+            </p:nvSpPr>
+            <p:spPr>
+              <a:xfrm>
+                <a:off x="9049572" y="5294272"/>
+                <a:ext cx="1875770" cy="726353"/>
+              </a:xfrm>
+              <a:prstGeom prst="rect">
+                <a:avLst/>
+              </a:prstGeom>
+              <a:blipFill>
+                <a:blip r:embed="rId11"/>
+                <a:stretch>
+                  <a:fillRect/>
+                </a:stretch>
+              </a:blipFill>
+            </p:spPr>
+            <p:txBody>
+              <a:bodyPr/>
+              <a:lstStyle/>
+              <a:p>
+                <a:r>
+                  <a:rPr lang="en-US">
+                    <a:noFill/>
+                  </a:rPr>
+                  <a:t> </a:t>
+                </a:r>
+              </a:p>
+            </p:txBody>
+          </p:sp>
+        </mc:Fallback>
+      </mc:AlternateContent>
     </p:spTree>
     <p:extLst>
       <p:ext uri="{BB962C8B-B14F-4D97-AF65-F5344CB8AC3E}">
@@ -7488,6 +8220,36 @@
     <p:extLst>
       <p:ext uri="{BB962C8B-B14F-4D97-AF65-F5344CB8AC3E}">
         <p14:creationId xmlns:p14="http://schemas.microsoft.com/office/powerpoint/2010/main" val="82999380"/>
+      </p:ext>
+    </p:extLst>
+  </p:cSld>
+  <p:clrMapOvr>
+    <a:masterClrMapping/>
+  </p:clrMapOvr>
+</p:sld>
+</file>
+
+<file path=ppt/slides/slide5.xml><?xml version="1.0" encoding="utf-8"?>
+<p:sld xmlns:a="http://schemas.openxmlformats.org/drawingml/2006/main" xmlns:r="http://schemas.openxmlformats.org/officeDocument/2006/relationships" xmlns:p="http://schemas.openxmlformats.org/presentationml/2006/main">
+  <p:cSld>
+    <p:spTree>
+      <p:nvGrpSpPr>
+        <p:cNvPr id="1" name=""/>
+        <p:cNvGrpSpPr/>
+        <p:nvPr/>
+      </p:nvGrpSpPr>
+      <p:grpSpPr>
+        <a:xfrm>
+          <a:off x="0" y="0"/>
+          <a:ext cx="0" cy="0"/>
+          <a:chOff x="0" y="0"/>
+          <a:chExt cx="0" cy="0"/>
+        </a:xfrm>
+      </p:grpSpPr>
+    </p:spTree>
+    <p:extLst>
+      <p:ext uri="{BB962C8B-B14F-4D97-AF65-F5344CB8AC3E}">
+        <p14:creationId xmlns:p14="http://schemas.microsoft.com/office/powerpoint/2010/main" val="88329402"/>
       </p:ext>
     </p:extLst>
   </p:cSld>

--- a/CylindericalCoordinates/KeyResults.pptx
+++ b/CylindericalCoordinates/KeyResults.pptx
@@ -201,7 +201,7 @@
           <a:p>
             <a:fld id="{6FD21F14-B943-4974-AF6C-853DF08CC6F6}" type="datetimeFigureOut">
               <a:rPr lang="en-US" smtClean="0"/>
-              <a:t>4/14/2026</a:t>
+              <a:t>4/15/2026</a:t>
             </a:fld>
             <a:endParaRPr lang="en-US"/>
           </a:p>
@@ -852,7 +852,7 @@
           <a:p>
             <a:fld id="{D11745D4-1722-44D0-992A-94FF939BE44E}" type="datetimeFigureOut">
               <a:rPr lang="en-US" smtClean="0"/>
-              <a:t>4/14/2026</a:t>
+              <a:t>4/15/2026</a:t>
             </a:fld>
             <a:endParaRPr lang="en-US"/>
           </a:p>
@@ -1022,7 +1022,7 @@
           <a:p>
             <a:fld id="{D11745D4-1722-44D0-992A-94FF939BE44E}" type="datetimeFigureOut">
               <a:rPr lang="en-US" smtClean="0"/>
-              <a:t>4/14/2026</a:t>
+              <a:t>4/15/2026</a:t>
             </a:fld>
             <a:endParaRPr lang="en-US"/>
           </a:p>
@@ -1202,7 +1202,7 @@
           <a:p>
             <a:fld id="{D11745D4-1722-44D0-992A-94FF939BE44E}" type="datetimeFigureOut">
               <a:rPr lang="en-US" smtClean="0"/>
-              <a:t>4/14/2026</a:t>
+              <a:t>4/15/2026</a:t>
             </a:fld>
             <a:endParaRPr lang="en-US"/>
           </a:p>
@@ -1372,7 +1372,7 @@
           <a:p>
             <a:fld id="{D11745D4-1722-44D0-992A-94FF939BE44E}" type="datetimeFigureOut">
               <a:rPr lang="en-US" smtClean="0"/>
-              <a:t>4/14/2026</a:t>
+              <a:t>4/15/2026</a:t>
             </a:fld>
             <a:endParaRPr lang="en-US"/>
           </a:p>
@@ -1618,7 +1618,7 @@
           <a:p>
             <a:fld id="{D11745D4-1722-44D0-992A-94FF939BE44E}" type="datetimeFigureOut">
               <a:rPr lang="en-US" smtClean="0"/>
-              <a:t>4/14/2026</a:t>
+              <a:t>4/15/2026</a:t>
             </a:fld>
             <a:endParaRPr lang="en-US"/>
           </a:p>
@@ -1850,7 +1850,7 @@
           <a:p>
             <a:fld id="{D11745D4-1722-44D0-992A-94FF939BE44E}" type="datetimeFigureOut">
               <a:rPr lang="en-US" smtClean="0"/>
-              <a:t>4/14/2026</a:t>
+              <a:t>4/15/2026</a:t>
             </a:fld>
             <a:endParaRPr lang="en-US"/>
           </a:p>
@@ -2217,7 +2217,7 @@
           <a:p>
             <a:fld id="{D11745D4-1722-44D0-992A-94FF939BE44E}" type="datetimeFigureOut">
               <a:rPr lang="en-US" smtClean="0"/>
-              <a:t>4/14/2026</a:t>
+              <a:t>4/15/2026</a:t>
             </a:fld>
             <a:endParaRPr lang="en-US"/>
           </a:p>
@@ -2335,7 +2335,7 @@
           <a:p>
             <a:fld id="{D11745D4-1722-44D0-992A-94FF939BE44E}" type="datetimeFigureOut">
               <a:rPr lang="en-US" smtClean="0"/>
-              <a:t>4/14/2026</a:t>
+              <a:t>4/15/2026</a:t>
             </a:fld>
             <a:endParaRPr lang="en-US"/>
           </a:p>
@@ -2430,7 +2430,7 @@
           <a:p>
             <a:fld id="{D11745D4-1722-44D0-992A-94FF939BE44E}" type="datetimeFigureOut">
               <a:rPr lang="en-US" smtClean="0"/>
-              <a:t>4/14/2026</a:t>
+              <a:t>4/15/2026</a:t>
             </a:fld>
             <a:endParaRPr lang="en-US"/>
           </a:p>
@@ -2707,7 +2707,7 @@
           <a:p>
             <a:fld id="{D11745D4-1722-44D0-992A-94FF939BE44E}" type="datetimeFigureOut">
               <a:rPr lang="en-US" smtClean="0"/>
-              <a:t>4/14/2026</a:t>
+              <a:t>4/15/2026</a:t>
             </a:fld>
             <a:endParaRPr lang="en-US"/>
           </a:p>
@@ -2960,7 +2960,7 @@
           <a:p>
             <a:fld id="{D11745D4-1722-44D0-992A-94FF939BE44E}" type="datetimeFigureOut">
               <a:rPr lang="en-US" smtClean="0"/>
-              <a:t>4/14/2026</a:t>
+              <a:t>4/15/2026</a:t>
             </a:fld>
             <a:endParaRPr lang="en-US"/>
           </a:p>
@@ -3173,7 +3173,7 @@
           <a:p>
             <a:fld id="{D11745D4-1722-44D0-992A-94FF939BE44E}" type="datetimeFigureOut">
               <a:rPr lang="en-US" smtClean="0"/>
-              <a:t>4/14/2026</a:t>
+              <a:t>4/15/2026</a:t>
             </a:fld>
             <a:endParaRPr lang="en-US"/>
           </a:p>
@@ -5607,8 +5607,8 @@
           </a:p>
         </p:txBody>
       </p:sp>
-      <mc:AlternateContent xmlns:mc="http://schemas.openxmlformats.org/markup-compatibility/2006">
-        <mc:Choice xmlns:a14="http://schemas.microsoft.com/office/drawing/2010/main" Requires="a14">
+      <mc:AlternateContent xmlns:mc="http://schemas.openxmlformats.org/markup-compatibility/2006" xmlns:a14="http://schemas.microsoft.com/office/drawing/2010/main">
+        <mc:Choice Requires="a14">
           <p:sp>
             <p:nvSpPr>
               <p:cNvPr id="13" name="矩形 12"/>
@@ -5694,7 +5694,7 @@
             </p:txBody>
           </p:sp>
         </mc:Choice>
-        <mc:Fallback>
+        <mc:Fallback xmlns="">
           <p:sp>
             <p:nvSpPr>
               <p:cNvPr id="13" name="矩形 12"/>
@@ -6545,21 +6545,7 @@
                 <a:latin typeface="微软雅黑" panose="020B0503020204020204" pitchFamily="34" charset="-122"/>
                 <a:ea typeface="微软雅黑" panose="020B0503020204020204" pitchFamily="34" charset="-122"/>
               </a:rPr>
-              <a:t>bug </a:t>
-            </a:r>
-            <a:r>
-              <a:rPr lang="en-US" altLang="zh-CN" sz="2800" b="1" dirty="0" smtClean="0">
-                <a:latin typeface="微软雅黑" panose="020B0503020204020204" pitchFamily="34" charset="-122"/>
-                <a:ea typeface="微软雅黑" panose="020B0503020204020204" pitchFamily="34" charset="-122"/>
-              </a:rPr>
-              <a:t>2P </a:t>
-            </a:r>
-            <a:r>
-              <a:rPr lang="en-US" altLang="zh-CN" sz="2800" b="1" dirty="0" smtClean="0">
-                <a:latin typeface="微软雅黑" panose="020B0503020204020204" pitchFamily="34" charset="-122"/>
-                <a:ea typeface="微软雅黑" panose="020B0503020204020204" pitchFamily="34" charset="-122"/>
-              </a:rPr>
-              <a:t>Result</a:t>
+              <a:t>bug 2P Result</a:t>
             </a:r>
             <a:endParaRPr lang="en-US" sz="2800" b="1" dirty="0">
               <a:latin typeface="微软雅黑" panose="020B0503020204020204" pitchFamily="34" charset="-122"/>
@@ -6577,7 +6563,7 @@
         <p:spPr>
           <a:xfrm>
             <a:off x="3220562" y="18091"/>
-            <a:ext cx="8986178" cy="369332"/>
+            <a:ext cx="8922058" cy="369332"/>
           </a:xfrm>
           <a:prstGeom prst="rect">
             <a:avLst/>
@@ -6605,8 +6591,8 @@
           </a:p>
         </p:txBody>
       </p:sp>
-      <mc:AlternateContent xmlns:mc="http://schemas.openxmlformats.org/markup-compatibility/2006">
-        <mc:Choice xmlns:a14="http://schemas.microsoft.com/office/drawing/2010/main" Requires="a14">
+      <mc:AlternateContent xmlns:mc="http://schemas.openxmlformats.org/markup-compatibility/2006" xmlns:a14="http://schemas.microsoft.com/office/drawing/2010/main">
+        <mc:Choice Requires="a14">
           <p:sp>
             <p:nvSpPr>
               <p:cNvPr id="6" name="文本框 5"/>
@@ -6796,7 +6782,7 @@
                       <m:d>
                         <m:dPr>
                           <m:ctrlPr>
-                            <a:rPr lang="en-US" b="0" i="0" smtClean="0">
+                            <a:rPr lang="en-US" b="0" i="1" smtClean="0">
                               <a:latin typeface="Cambria Math" panose="02040503050406030204" pitchFamily="18" charset="0"/>
                             </a:rPr>
                           </m:ctrlPr>
@@ -6982,7 +6968,7 @@
             </p:txBody>
           </p:sp>
         </mc:Choice>
-        <mc:Fallback>
+        <mc:Fallback xmlns="">
           <p:sp>
             <p:nvSpPr>
               <p:cNvPr id="6" name="文本框 5"/>
@@ -7114,8 +7100,8 @@
           </a:p>
         </p:txBody>
       </p:sp>
-      <mc:AlternateContent xmlns:mc="http://schemas.openxmlformats.org/markup-compatibility/2006">
-        <mc:Choice xmlns:a14="http://schemas.microsoft.com/office/drawing/2010/main" Requires="a14">
+      <mc:AlternateContent xmlns:mc="http://schemas.openxmlformats.org/markup-compatibility/2006" xmlns:a14="http://schemas.microsoft.com/office/drawing/2010/main">
+        <mc:Choice Requires="a14">
           <p:sp>
             <p:nvSpPr>
               <p:cNvPr id="17" name="矩形 16"/>
@@ -7190,18 +7176,7 @@
                     <a:ea typeface="微软雅黑" panose="020B0503020204020204" pitchFamily="34" charset="-122"/>
                     <a:cs typeface="Arial" panose="020B0604020202020204" pitchFamily="34" charset="0"/>
                   </a:rPr>
-                  <a:t> </a:t>
-                </a:r>
-                <a:r>
-                  <a:rPr lang="en-US" b="1" dirty="0" smtClean="0">
-                    <a:solidFill>
-                      <a:srgbClr val="FF0000"/>
-                    </a:solidFill>
-                    <a:latin typeface="Arial" panose="020B0604020202020204" pitchFamily="34" charset="0"/>
-                    <a:ea typeface="微软雅黑" panose="020B0503020204020204" pitchFamily="34" charset="-122"/>
-                    <a:cs typeface="Arial" panose="020B0604020202020204" pitchFamily="34" charset="0"/>
-                  </a:rPr>
-                  <a:t>Almost 0</a:t>
+                  <a:t> Almost 0</a:t>
                 </a:r>
                 <a:endParaRPr lang="en-US" b="1" dirty="0">
                   <a:solidFill>
@@ -7212,7 +7187,7 @@
             </p:txBody>
           </p:sp>
         </mc:Choice>
-        <mc:Fallback>
+        <mc:Fallback xmlns="">
           <p:sp>
             <p:nvSpPr>
               <p:cNvPr id="17" name="矩形 16"/>
@@ -7281,18 +7256,7 @@
                 <a:ea typeface="微软雅黑" panose="020B0503020204020204" pitchFamily="34" charset="-122"/>
                 <a:cs typeface="Arial" panose="020B0604020202020204" pitchFamily="34" charset="0"/>
               </a:rPr>
-              <a:t>Momentum </a:t>
-            </a:r>
-            <a:r>
-              <a:rPr lang="en-US" b="1" dirty="0" smtClean="0">
-                <a:solidFill>
-                  <a:srgbClr val="FF0000"/>
-                </a:solidFill>
-                <a:latin typeface="Arial" panose="020B0604020202020204" pitchFamily="34" charset="0"/>
-                <a:ea typeface="微软雅黑" panose="020B0503020204020204" pitchFamily="34" charset="-122"/>
-                <a:cs typeface="Arial" panose="020B0604020202020204" pitchFamily="34" charset="0"/>
-              </a:rPr>
-              <a:t>+ Pressure</a:t>
+              <a:t>Momentum + Pressure</a:t>
             </a:r>
             <a:endParaRPr lang="en-US" b="1" dirty="0">
               <a:solidFill>
@@ -7329,15 +7293,7 @@
                 <a:ea typeface="微软雅黑" panose="020B0503020204020204" pitchFamily="34" charset="-122"/>
                 <a:cs typeface="Arial" panose="020B0604020202020204" pitchFamily="34" charset="0"/>
               </a:rPr>
-              <a:t>to verify the validity of the </a:t>
-            </a:r>
-            <a:r>
-              <a:rPr lang="en-US" b="1" dirty="0" smtClean="0">
-                <a:latin typeface="Arial" panose="020B0604020202020204" pitchFamily="34" charset="0"/>
-                <a:ea typeface="微软雅黑" panose="020B0503020204020204" pitchFamily="34" charset="-122"/>
-                <a:cs typeface="Arial" panose="020B0604020202020204" pitchFamily="34" charset="0"/>
-              </a:rPr>
-              <a:t>whole DNS process, including the document and the script, except the solution of P’ Poisson eq.</a:t>
+              <a:t>to verify the validity of the whole DNS process, including the document and the script, except the solution of P’ Poisson eq.</a:t>
             </a:r>
             <a:endParaRPr lang="en-US" b="1" dirty="0">
               <a:latin typeface="Arial" panose="020B0604020202020204" pitchFamily="34" charset="0"/>
@@ -7395,8 +7351,8 @@
           </a:prstGeom>
         </p:spPr>
       </p:pic>
-      <mc:AlternateContent xmlns:mc="http://schemas.openxmlformats.org/markup-compatibility/2006">
-        <mc:Choice xmlns:a14="http://schemas.microsoft.com/office/drawing/2010/main" Requires="a14">
+      <mc:AlternateContent xmlns:mc="http://schemas.openxmlformats.org/markup-compatibility/2006" xmlns:a14="http://schemas.microsoft.com/office/drawing/2010/main">
+        <mc:Choice Requires="a14">
           <p:sp>
             <p:nvSpPr>
               <p:cNvPr id="22" name="矩形 21"/>
@@ -7587,7 +7543,7 @@
             </p:txBody>
           </p:sp>
         </mc:Choice>
-        <mc:Fallback>
+        <mc:Fallback xmlns="">
           <p:sp>
             <p:nvSpPr>
               <p:cNvPr id="22" name="矩形 21"/>
@@ -7626,8 +7582,8 @@
           </p:sp>
         </mc:Fallback>
       </mc:AlternateContent>
-      <mc:AlternateContent xmlns:mc="http://schemas.openxmlformats.org/markup-compatibility/2006">
-        <mc:Choice xmlns:a14="http://schemas.microsoft.com/office/drawing/2010/main" Requires="a14">
+      <mc:AlternateContent xmlns:mc="http://schemas.openxmlformats.org/markup-compatibility/2006" xmlns:a14="http://schemas.microsoft.com/office/drawing/2010/main">
+        <mc:Choice Requires="a14">
           <p:sp>
             <p:nvSpPr>
               <p:cNvPr id="23" name="矩形 22"/>
@@ -7820,7 +7776,7 @@
             </p:txBody>
           </p:sp>
         </mc:Choice>
-        <mc:Fallback>
+        <mc:Fallback xmlns="">
           <p:sp>
             <p:nvSpPr>
               <p:cNvPr id="23" name="矩形 22"/>
@@ -7859,8 +7815,8 @@
           </p:sp>
         </mc:Fallback>
       </mc:AlternateContent>
-      <mc:AlternateContent xmlns:mc="http://schemas.openxmlformats.org/markup-compatibility/2006">
-        <mc:Choice xmlns:a14="http://schemas.microsoft.com/office/drawing/2010/main" Requires="a14">
+      <mc:AlternateContent xmlns:mc="http://schemas.openxmlformats.org/markup-compatibility/2006" xmlns:a14="http://schemas.microsoft.com/office/drawing/2010/main">
+        <mc:Choice Requires="a14">
           <p:sp>
             <p:nvSpPr>
               <p:cNvPr id="24" name="矩形 23"/>
@@ -8105,7 +8061,7 @@
             </p:txBody>
           </p:sp>
         </mc:Choice>
-        <mc:Fallback>
+        <mc:Fallback xmlns="">
           <p:sp>
             <p:nvSpPr>
               <p:cNvPr id="24" name="矩形 23"/>
@@ -8246,6 +8202,907 @@
           <a:chExt cx="0" cy="0"/>
         </a:xfrm>
       </p:grpSpPr>
+      <p:sp>
+        <p:nvSpPr>
+          <p:cNvPr id="2" name="矩形 1"/>
+          <p:cNvSpPr/>
+          <p:nvPr/>
+        </p:nvSpPr>
+        <p:spPr>
+          <a:xfrm>
+            <a:off x="0" y="0"/>
+            <a:ext cx="11014618" cy="523220"/>
+          </a:xfrm>
+          <a:prstGeom prst="rect">
+            <a:avLst/>
+          </a:prstGeom>
+        </p:spPr>
+        <p:txBody>
+          <a:bodyPr wrap="none">
+            <a:spAutoFit/>
+          </a:bodyPr>
+          <a:lstStyle/>
+          <a:p>
+            <a:r>
+              <a:rPr lang="en-US" sz="2800" b="1" dirty="0" smtClean="0">
+                <a:latin typeface="微软雅黑" panose="020B0503020204020204" pitchFamily="34" charset="-122"/>
+                <a:ea typeface="微软雅黑" panose="020B0503020204020204" pitchFamily="34" charset="-122"/>
+              </a:rPr>
+              <a:t>Formal Result: Jacobi Preconditioner + </a:t>
+            </a:r>
+            <a:r>
+              <a:rPr lang="en-US" sz="2800" b="1" dirty="0" err="1" smtClean="0">
+                <a:latin typeface="微软雅黑" panose="020B0503020204020204" pitchFamily="34" charset="-122"/>
+                <a:ea typeface="微软雅黑" panose="020B0503020204020204" pitchFamily="34" charset="-122"/>
+              </a:rPr>
+              <a:t>B</a:t>
+            </a:r>
+            <a:r>
+              <a:rPr lang="en-US" altLang="zh-CN" sz="2800" b="1" dirty="0" err="1" smtClean="0">
+                <a:latin typeface="微软雅黑" panose="020B0503020204020204" pitchFamily="34" charset="-122"/>
+                <a:ea typeface="微软雅黑" panose="020B0503020204020204" pitchFamily="34" charset="-122"/>
+              </a:rPr>
+              <a:t>iCG</a:t>
+            </a:r>
+            <a:r>
+              <a:rPr lang="en-US" altLang="zh-CN" sz="2800" b="1" dirty="0" smtClean="0">
+                <a:latin typeface="微软雅黑" panose="020B0503020204020204" pitchFamily="34" charset="-122"/>
+                <a:ea typeface="微软雅黑" panose="020B0503020204020204" pitchFamily="34" charset="-122"/>
+              </a:rPr>
+              <a:t> Pressure Solver</a:t>
+            </a:r>
+            <a:endParaRPr lang="en-US" sz="2800" b="1" dirty="0" smtClean="0">
+              <a:latin typeface="微软雅黑" panose="020B0503020204020204" pitchFamily="34" charset="-122"/>
+              <a:ea typeface="微软雅黑" panose="020B0503020204020204" pitchFamily="34" charset="-122"/>
+            </a:endParaRPr>
+          </a:p>
+        </p:txBody>
+      </p:sp>
+      <p:pic>
+        <p:nvPicPr>
+          <p:cNvPr id="3" name="图片 2"/>
+          <p:cNvPicPr>
+            <a:picLocks noChangeAspect="1"/>
+          </p:cNvPicPr>
+          <p:nvPr/>
+        </p:nvPicPr>
+        <p:blipFill>
+          <a:blip r:embed="rId2"/>
+          <a:stretch>
+            <a:fillRect/>
+          </a:stretch>
+        </p:blipFill>
+        <p:spPr>
+          <a:xfrm>
+            <a:off x="0" y="597111"/>
+            <a:ext cx="4323610" cy="2995835"/>
+          </a:xfrm>
+          <a:prstGeom prst="rect">
+            <a:avLst/>
+          </a:prstGeom>
+        </p:spPr>
+      </p:pic>
+      <p:pic>
+        <p:nvPicPr>
+          <p:cNvPr id="4" name="图片 3"/>
+          <p:cNvPicPr>
+            <a:picLocks noChangeAspect="1"/>
+          </p:cNvPicPr>
+          <p:nvPr/>
+        </p:nvPicPr>
+        <p:blipFill>
+          <a:blip r:embed="rId3"/>
+          <a:stretch>
+            <a:fillRect/>
+          </a:stretch>
+        </p:blipFill>
+        <p:spPr>
+          <a:xfrm>
+            <a:off x="4323610" y="597111"/>
+            <a:ext cx="4606867" cy="2995835"/>
+          </a:xfrm>
+          <a:prstGeom prst="rect">
+            <a:avLst/>
+          </a:prstGeom>
+        </p:spPr>
+      </p:pic>
+      <p:pic>
+        <p:nvPicPr>
+          <p:cNvPr id="5" name="图片 4"/>
+          <p:cNvPicPr>
+            <a:picLocks noChangeAspect="1"/>
+          </p:cNvPicPr>
+          <p:nvPr/>
+        </p:nvPicPr>
+        <p:blipFill>
+          <a:blip r:embed="rId4"/>
+          <a:stretch>
+            <a:fillRect/>
+          </a:stretch>
+        </p:blipFill>
+        <p:spPr>
+          <a:xfrm>
+            <a:off x="0" y="3592946"/>
+            <a:ext cx="4323610" cy="2970418"/>
+          </a:xfrm>
+          <a:prstGeom prst="rect">
+            <a:avLst/>
+          </a:prstGeom>
+        </p:spPr>
+      </p:pic>
+      <p:pic>
+        <p:nvPicPr>
+          <p:cNvPr id="6" name="图片 5"/>
+          <p:cNvPicPr>
+            <a:picLocks noChangeAspect="1"/>
+          </p:cNvPicPr>
+          <p:nvPr/>
+        </p:nvPicPr>
+        <p:blipFill>
+          <a:blip r:embed="rId5"/>
+          <a:stretch>
+            <a:fillRect/>
+          </a:stretch>
+        </p:blipFill>
+        <p:spPr>
+          <a:xfrm>
+            <a:off x="4323610" y="3592946"/>
+            <a:ext cx="6492803" cy="3265054"/>
+          </a:xfrm>
+          <a:prstGeom prst="rect">
+            <a:avLst/>
+          </a:prstGeom>
+        </p:spPr>
+      </p:pic>
+      <mc:AlternateContent xmlns:mc="http://schemas.openxmlformats.org/markup-compatibility/2006">
+        <mc:Choice xmlns:a14="http://schemas.microsoft.com/office/drawing/2010/main" Requires="a14">
+          <p:sp>
+            <p:nvSpPr>
+              <p:cNvPr id="7" name="矩形 6"/>
+              <p:cNvSpPr/>
+              <p:nvPr/>
+            </p:nvSpPr>
+            <p:spPr>
+              <a:xfrm>
+                <a:off x="5265486" y="4818453"/>
+                <a:ext cx="1888466" cy="564835"/>
+              </a:xfrm>
+              <a:prstGeom prst="rect">
+                <a:avLst/>
+              </a:prstGeom>
+            </p:spPr>
+            <p:txBody>
+              <a:bodyPr wrap="none">
+                <a:spAutoFit/>
+              </a:bodyPr>
+              <a:lstStyle/>
+              <a:p>
+                <a:pPr/>
+                <a14:m>
+                  <m:oMathPara xmlns:m="http://schemas.openxmlformats.org/officeDocument/2006/math">
+                    <m:oMathParaPr>
+                      <m:jc m:val="centerGroup"/>
+                    </m:oMathParaPr>
+                    <m:oMath xmlns:m="http://schemas.openxmlformats.org/officeDocument/2006/math">
+                      <m:sSub>
+                        <m:sSubPr>
+                          <m:ctrlPr>
+                            <a:rPr lang="en-US" b="0" i="1" smtClean="0">
+                              <a:latin typeface="Cambria Math" panose="02040503050406030204" pitchFamily="18" charset="0"/>
+                            </a:rPr>
+                          </m:ctrlPr>
+                        </m:sSubPr>
+                        <m:e>
+                          <m:r>
+                            <a:rPr lang="en-US" b="0" i="1" smtClean="0">
+                              <a:latin typeface="Cambria Math" panose="02040503050406030204" pitchFamily="18" charset="0"/>
+                            </a:rPr>
+                            <m:t>𝑈</m:t>
+                          </m:r>
+                        </m:e>
+                        <m:sub>
+                          <m:r>
+                            <m:rPr>
+                              <m:sty m:val="p"/>
+                            </m:rPr>
+                            <a:rPr lang="en-US" b="0" i="0" smtClean="0">
+                              <a:latin typeface="Cambria Math" panose="02040503050406030204" pitchFamily="18" charset="0"/>
+                            </a:rPr>
+                            <m:t>Θ</m:t>
+                          </m:r>
+                          <m:r>
+                            <a:rPr lang="en-US" b="0" i="0" smtClean="0">
+                              <a:latin typeface="Cambria Math" panose="02040503050406030204" pitchFamily="18" charset="0"/>
+                            </a:rPr>
+                            <m:t>,</m:t>
+                          </m:r>
+                          <m:r>
+                            <m:rPr>
+                              <m:sty m:val="p"/>
+                            </m:rPr>
+                            <a:rPr lang="en-US" b="0" i="0" smtClean="0">
+                              <a:latin typeface="Cambria Math" panose="02040503050406030204" pitchFamily="18" charset="0"/>
+                            </a:rPr>
+                            <m:t>TH</m:t>
+                          </m:r>
+                        </m:sub>
+                      </m:sSub>
+                      <m:r>
+                        <a:rPr lang="en-US" b="0" i="1" smtClean="0">
+                          <a:latin typeface="Cambria Math" panose="02040503050406030204" pitchFamily="18" charset="0"/>
+                        </a:rPr>
+                        <m:t>=</m:t>
+                      </m:r>
+                      <m:f>
+                        <m:fPr>
+                          <m:ctrlPr>
+                            <a:rPr lang="en-US" b="0" i="1" smtClean="0">
+                              <a:latin typeface="Cambria Math" panose="02040503050406030204" pitchFamily="18" charset="0"/>
+                            </a:rPr>
+                          </m:ctrlPr>
+                        </m:fPr>
+                        <m:num>
+                          <m:sSub>
+                            <m:sSubPr>
+                              <m:ctrlPr>
+                                <a:rPr lang="en-US" b="0" i="1" smtClean="0">
+                                  <a:latin typeface="Cambria Math" panose="02040503050406030204" pitchFamily="18" charset="0"/>
+                                </a:rPr>
+                              </m:ctrlPr>
+                            </m:sSubPr>
+                            <m:e>
+                              <m:r>
+                                <a:rPr lang="en-US" b="0" i="1" smtClean="0">
+                                  <a:latin typeface="Cambria Math" panose="02040503050406030204" pitchFamily="18" charset="0"/>
+                                </a:rPr>
+                                <m:t>𝑐</m:t>
+                              </m:r>
+                            </m:e>
+                            <m:sub>
+                              <m:r>
+                                <a:rPr lang="en-US" b="0" i="1" smtClean="0">
+                                  <a:latin typeface="Cambria Math" panose="02040503050406030204" pitchFamily="18" charset="0"/>
+                                </a:rPr>
+                                <m:t>1</m:t>
+                              </m:r>
+                            </m:sub>
+                          </m:sSub>
+                        </m:num>
+                        <m:den>
+                          <m:acc>
+                            <m:accPr>
+                              <m:chr m:val="̂"/>
+                              <m:ctrlPr>
+                                <a:rPr lang="en-US" b="0" i="1" smtClean="0">
+                                  <a:latin typeface="Cambria Math" panose="02040503050406030204" pitchFamily="18" charset="0"/>
+                                </a:rPr>
+                              </m:ctrlPr>
+                            </m:accPr>
+                            <m:e>
+                              <m:r>
+                                <a:rPr lang="en-US" b="0" i="1" smtClean="0">
+                                  <a:latin typeface="Cambria Math" panose="02040503050406030204" pitchFamily="18" charset="0"/>
+                                </a:rPr>
+                                <m:t>𝑟</m:t>
+                              </m:r>
+                            </m:e>
+                          </m:acc>
+                        </m:den>
+                      </m:f>
+                      <m:r>
+                        <a:rPr lang="en-US" b="0" i="1" smtClean="0">
+                          <a:latin typeface="Cambria Math" panose="02040503050406030204" pitchFamily="18" charset="0"/>
+                        </a:rPr>
+                        <m:t>+</m:t>
+                      </m:r>
+                      <m:sSub>
+                        <m:sSubPr>
+                          <m:ctrlPr>
+                            <a:rPr lang="en-US" b="0" i="1" smtClean="0">
+                              <a:latin typeface="Cambria Math" panose="02040503050406030204" pitchFamily="18" charset="0"/>
+                            </a:rPr>
+                          </m:ctrlPr>
+                        </m:sSubPr>
+                        <m:e>
+                          <m:r>
+                            <a:rPr lang="en-US" b="0" i="1" smtClean="0">
+                              <a:latin typeface="Cambria Math" panose="02040503050406030204" pitchFamily="18" charset="0"/>
+                            </a:rPr>
+                            <m:t>𝑐</m:t>
+                          </m:r>
+                        </m:e>
+                        <m:sub>
+                          <m:r>
+                            <a:rPr lang="en-US" b="0" i="1" smtClean="0">
+                              <a:latin typeface="Cambria Math" panose="02040503050406030204" pitchFamily="18" charset="0"/>
+                            </a:rPr>
+                            <m:t>2</m:t>
+                          </m:r>
+                        </m:sub>
+                      </m:sSub>
+                      <m:acc>
+                        <m:accPr>
+                          <m:chr m:val="̂"/>
+                          <m:ctrlPr>
+                            <a:rPr lang="en-US" b="0" i="1" smtClean="0">
+                              <a:latin typeface="Cambria Math" panose="02040503050406030204" pitchFamily="18" charset="0"/>
+                            </a:rPr>
+                          </m:ctrlPr>
+                        </m:accPr>
+                        <m:e>
+                          <m:r>
+                            <a:rPr lang="en-US" b="0" i="1" smtClean="0">
+                              <a:latin typeface="Cambria Math" panose="02040503050406030204" pitchFamily="18" charset="0"/>
+                            </a:rPr>
+                            <m:t>𝑟</m:t>
+                          </m:r>
+                        </m:e>
+                      </m:acc>
+                    </m:oMath>
+                  </m:oMathPara>
+                </a14:m>
+                <a:endParaRPr lang="en-US" dirty="0"/>
+              </a:p>
+            </p:txBody>
+          </p:sp>
+        </mc:Choice>
+        <mc:Fallback>
+          <p:sp>
+            <p:nvSpPr>
+              <p:cNvPr id="7" name="矩形 6"/>
+              <p:cNvSpPr>
+                <a:spLocks noRot="1" noChangeAspect="1" noMove="1" noResize="1" noEditPoints="1" noAdjustHandles="1" noChangeArrowheads="1" noChangeShapeType="1" noTextEdit="1"/>
+              </p:cNvSpPr>
+              <p:nvPr/>
+            </p:nvSpPr>
+            <p:spPr>
+              <a:xfrm>
+                <a:off x="5265486" y="4818453"/>
+                <a:ext cx="1888466" cy="564835"/>
+              </a:xfrm>
+              <a:prstGeom prst="rect">
+                <a:avLst/>
+              </a:prstGeom>
+              <a:blipFill>
+                <a:blip r:embed="rId6"/>
+                <a:stretch>
+                  <a:fillRect/>
+                </a:stretch>
+              </a:blipFill>
+            </p:spPr>
+            <p:txBody>
+              <a:bodyPr/>
+              <a:lstStyle/>
+              <a:p>
+                <a:r>
+                  <a:rPr lang="en-US">
+                    <a:noFill/>
+                  </a:rPr>
+                  <a:t> </a:t>
+                </a:r>
+              </a:p>
+            </p:txBody>
+          </p:sp>
+        </mc:Fallback>
+      </mc:AlternateContent>
+      <mc:AlternateContent xmlns:mc="http://schemas.openxmlformats.org/markup-compatibility/2006">
+        <mc:Choice xmlns:a14="http://schemas.microsoft.com/office/drawing/2010/main" Requires="a14">
+          <p:sp>
+            <p:nvSpPr>
+              <p:cNvPr id="8" name="矩形 7"/>
+              <p:cNvSpPr/>
+              <p:nvPr/>
+            </p:nvSpPr>
+            <p:spPr>
+              <a:xfrm>
+                <a:off x="6735628" y="5383930"/>
+                <a:ext cx="1597617" cy="708207"/>
+              </a:xfrm>
+              <a:prstGeom prst="rect">
+                <a:avLst/>
+              </a:prstGeom>
+            </p:spPr>
+            <p:txBody>
+              <a:bodyPr wrap="none">
+                <a:spAutoFit/>
+              </a:bodyPr>
+              <a:lstStyle/>
+              <a:p>
+                <a:pPr/>
+                <a14:m>
+                  <m:oMathPara xmlns:m="http://schemas.openxmlformats.org/officeDocument/2006/math">
+                    <m:oMathParaPr>
+                      <m:jc m:val="centerGroup"/>
+                    </m:oMathParaPr>
+                    <m:oMath xmlns:m="http://schemas.openxmlformats.org/officeDocument/2006/math">
+                      <m:sSub>
+                        <m:sSubPr>
+                          <m:ctrlPr>
+                            <a:rPr lang="en-US" b="0" i="1" smtClean="0">
+                              <a:latin typeface="Cambria Math" panose="02040503050406030204" pitchFamily="18" charset="0"/>
+                            </a:rPr>
+                          </m:ctrlPr>
+                        </m:sSubPr>
+                        <m:e>
+                          <m:r>
+                            <a:rPr lang="en-US" b="0" i="1" smtClean="0">
+                              <a:latin typeface="Cambria Math" panose="02040503050406030204" pitchFamily="18" charset="0"/>
+                            </a:rPr>
+                            <m:t>𝑐</m:t>
+                          </m:r>
+                        </m:e>
+                        <m:sub>
+                          <m:r>
+                            <a:rPr lang="en-US" b="0" i="1" smtClean="0">
+                              <a:latin typeface="Cambria Math" panose="02040503050406030204" pitchFamily="18" charset="0"/>
+                            </a:rPr>
+                            <m:t>1</m:t>
+                          </m:r>
+                        </m:sub>
+                      </m:sSub>
+                      <m:r>
+                        <a:rPr lang="en-US" b="0" i="1" smtClean="0">
+                          <a:latin typeface="Cambria Math" panose="02040503050406030204" pitchFamily="18" charset="0"/>
+                        </a:rPr>
+                        <m:t>=</m:t>
+                      </m:r>
+                      <m:f>
+                        <m:fPr>
+                          <m:ctrlPr>
+                            <a:rPr lang="en-US" b="0" i="1" smtClean="0">
+                              <a:latin typeface="Cambria Math" panose="02040503050406030204" pitchFamily="18" charset="0"/>
+                            </a:rPr>
+                          </m:ctrlPr>
+                        </m:fPr>
+                        <m:num>
+                          <m:r>
+                            <m:rPr>
+                              <m:sty m:val="p"/>
+                            </m:rPr>
+                            <a:rPr lang="en-US" b="0" i="0" smtClean="0">
+                              <a:latin typeface="Cambria Math" panose="02040503050406030204" pitchFamily="18" charset="0"/>
+                            </a:rPr>
+                            <m:t>Δ</m:t>
+                          </m:r>
+                          <m:r>
+                            <a:rPr lang="en-US" b="0" i="1" smtClean="0">
+                              <a:latin typeface="Cambria Math" panose="02040503050406030204" pitchFamily="18" charset="0"/>
+                            </a:rPr>
+                            <m:t>𝑅</m:t>
+                          </m:r>
+                          <m:sSub>
+                            <m:sSubPr>
+                              <m:ctrlPr>
+                                <a:rPr lang="en-US" b="0" i="1" smtClean="0">
+                                  <a:latin typeface="Cambria Math" panose="02040503050406030204" pitchFamily="18" charset="0"/>
+                                </a:rPr>
+                              </m:ctrlPr>
+                            </m:sSubPr>
+                            <m:e>
+                              <m:r>
+                                <a:rPr lang="en-US" b="0" i="1" smtClean="0">
+                                  <a:latin typeface="Cambria Math" panose="02040503050406030204" pitchFamily="18" charset="0"/>
+                                </a:rPr>
+                                <m:t>𝑅</m:t>
+                              </m:r>
+                            </m:e>
+                            <m:sub>
+                              <m:r>
+                                <a:rPr lang="en-US" b="0" i="1" smtClean="0">
+                                  <a:latin typeface="Cambria Math" panose="02040503050406030204" pitchFamily="18" charset="0"/>
+                                </a:rPr>
+                                <m:t>𝑠</m:t>
+                              </m:r>
+                            </m:sub>
+                          </m:sSub>
+                        </m:num>
+                        <m:den>
+                          <m:sSubSup>
+                            <m:sSubSupPr>
+                              <m:ctrlPr>
+                                <a:rPr lang="en-US" b="0" i="1" smtClean="0">
+                                  <a:latin typeface="Cambria Math" panose="02040503050406030204" pitchFamily="18" charset="0"/>
+                                </a:rPr>
+                              </m:ctrlPr>
+                            </m:sSubSupPr>
+                            <m:e>
+                              <m:r>
+                                <a:rPr lang="en-US" b="0" i="1" smtClean="0">
+                                  <a:latin typeface="Cambria Math" panose="02040503050406030204" pitchFamily="18" charset="0"/>
+                                </a:rPr>
+                                <m:t>𝑅</m:t>
+                              </m:r>
+                            </m:e>
+                            <m:sub>
+                              <m:r>
+                                <a:rPr lang="en-US" b="0" i="1" smtClean="0">
+                                  <a:latin typeface="Cambria Math" panose="02040503050406030204" pitchFamily="18" charset="0"/>
+                                </a:rPr>
+                                <m:t>𝑠</m:t>
+                              </m:r>
+                            </m:sub>
+                            <m:sup>
+                              <m:r>
+                                <a:rPr lang="en-US" b="0" i="1" smtClean="0">
+                                  <a:latin typeface="Cambria Math" panose="02040503050406030204" pitchFamily="18" charset="0"/>
+                                </a:rPr>
+                                <m:t>2</m:t>
+                              </m:r>
+                            </m:sup>
+                          </m:sSubSup>
+                          <m:r>
+                            <a:rPr lang="en-US" b="0" i="1" smtClean="0">
+                              <a:latin typeface="Cambria Math" panose="02040503050406030204" pitchFamily="18" charset="0"/>
+                            </a:rPr>
+                            <m:t>−</m:t>
+                          </m:r>
+                          <m:sSubSup>
+                            <m:sSubSupPr>
+                              <m:ctrlPr>
+                                <a:rPr lang="en-US" b="0" i="1" smtClean="0">
+                                  <a:latin typeface="Cambria Math" panose="02040503050406030204" pitchFamily="18" charset="0"/>
+                                </a:rPr>
+                              </m:ctrlPr>
+                            </m:sSubSupPr>
+                            <m:e>
+                              <m:r>
+                                <a:rPr lang="en-US" b="0" i="1" smtClean="0">
+                                  <a:latin typeface="Cambria Math" panose="02040503050406030204" pitchFamily="18" charset="0"/>
+                                </a:rPr>
+                                <m:t>𝑅</m:t>
+                              </m:r>
+                            </m:e>
+                            <m:sub>
+                              <m:r>
+                                <a:rPr lang="en-US" b="0" i="1" smtClean="0">
+                                  <a:latin typeface="Cambria Math" panose="02040503050406030204" pitchFamily="18" charset="0"/>
+                                </a:rPr>
+                                <m:t>h</m:t>
+                              </m:r>
+                            </m:sub>
+                            <m:sup>
+                              <m:r>
+                                <a:rPr lang="en-US" b="0" i="1" smtClean="0">
+                                  <a:latin typeface="Cambria Math" panose="02040503050406030204" pitchFamily="18" charset="0"/>
+                                </a:rPr>
+                                <m:t>2</m:t>
+                              </m:r>
+                            </m:sup>
+                          </m:sSubSup>
+                        </m:den>
+                      </m:f>
+                    </m:oMath>
+                  </m:oMathPara>
+                </a14:m>
+                <a:endParaRPr lang="en-US" dirty="0"/>
+              </a:p>
+            </p:txBody>
+          </p:sp>
+        </mc:Choice>
+        <mc:Fallback>
+          <p:sp>
+            <p:nvSpPr>
+              <p:cNvPr id="8" name="矩形 7"/>
+              <p:cNvSpPr>
+                <a:spLocks noRot="1" noChangeAspect="1" noMove="1" noResize="1" noEditPoints="1" noAdjustHandles="1" noChangeArrowheads="1" noChangeShapeType="1" noTextEdit="1"/>
+              </p:cNvSpPr>
+              <p:nvPr/>
+            </p:nvSpPr>
+            <p:spPr>
+              <a:xfrm>
+                <a:off x="6735628" y="5383930"/>
+                <a:ext cx="1597617" cy="708207"/>
+              </a:xfrm>
+              <a:prstGeom prst="rect">
+                <a:avLst/>
+              </a:prstGeom>
+              <a:blipFill>
+                <a:blip r:embed="rId7"/>
+                <a:stretch>
+                  <a:fillRect/>
+                </a:stretch>
+              </a:blipFill>
+            </p:spPr>
+            <p:txBody>
+              <a:bodyPr/>
+              <a:lstStyle/>
+              <a:p>
+                <a:r>
+                  <a:rPr lang="en-US">
+                    <a:noFill/>
+                  </a:rPr>
+                  <a:t> </a:t>
+                </a:r>
+              </a:p>
+            </p:txBody>
+          </p:sp>
+        </mc:Fallback>
+      </mc:AlternateContent>
+      <mc:AlternateContent xmlns:mc="http://schemas.openxmlformats.org/markup-compatibility/2006">
+        <mc:Choice xmlns:a14="http://schemas.microsoft.com/office/drawing/2010/main" Requires="a14">
+          <p:sp>
+            <p:nvSpPr>
+              <p:cNvPr id="9" name="矩形 8"/>
+              <p:cNvSpPr/>
+              <p:nvPr/>
+            </p:nvSpPr>
+            <p:spPr>
+              <a:xfrm>
+                <a:off x="8236772" y="5294272"/>
+                <a:ext cx="1875770" cy="726353"/>
+              </a:xfrm>
+              <a:prstGeom prst="rect">
+                <a:avLst/>
+              </a:prstGeom>
+            </p:spPr>
+            <p:txBody>
+              <a:bodyPr wrap="none">
+                <a:spAutoFit/>
+              </a:bodyPr>
+              <a:lstStyle/>
+              <a:p>
+                <a:pPr/>
+                <a14:m>
+                  <m:oMathPara xmlns:m="http://schemas.openxmlformats.org/officeDocument/2006/math">
+                    <m:oMathParaPr>
+                      <m:jc m:val="centerGroup"/>
+                    </m:oMathParaPr>
+                    <m:oMath xmlns:m="http://schemas.openxmlformats.org/officeDocument/2006/math">
+                      <m:sSub>
+                        <m:sSubPr>
+                          <m:ctrlPr>
+                            <a:rPr lang="en-US" b="0" i="1" smtClean="0">
+                              <a:latin typeface="Cambria Math" panose="02040503050406030204" pitchFamily="18" charset="0"/>
+                            </a:rPr>
+                          </m:ctrlPr>
+                        </m:sSubPr>
+                        <m:e>
+                          <m:r>
+                            <a:rPr lang="en-US" b="0" i="1" smtClean="0">
+                              <a:latin typeface="Cambria Math" panose="02040503050406030204" pitchFamily="18" charset="0"/>
+                            </a:rPr>
+                            <m:t>𝑐</m:t>
+                          </m:r>
+                        </m:e>
+                        <m:sub>
+                          <m:r>
+                            <a:rPr lang="en-US" b="0" i="1" smtClean="0">
+                              <a:latin typeface="Cambria Math" panose="02040503050406030204" pitchFamily="18" charset="0"/>
+                            </a:rPr>
+                            <m:t>2</m:t>
+                          </m:r>
+                        </m:sub>
+                      </m:sSub>
+                      <m:r>
+                        <a:rPr lang="en-US" b="0" i="1" smtClean="0">
+                          <a:latin typeface="Cambria Math" panose="02040503050406030204" pitchFamily="18" charset="0"/>
+                        </a:rPr>
+                        <m:t>=</m:t>
+                      </m:r>
+                      <m:f>
+                        <m:fPr>
+                          <m:ctrlPr>
+                            <a:rPr lang="en-US" b="0" i="1" smtClean="0">
+                              <a:latin typeface="Cambria Math" panose="02040503050406030204" pitchFamily="18" charset="0"/>
+                            </a:rPr>
+                          </m:ctrlPr>
+                        </m:fPr>
+                        <m:num>
+                          <m:r>
+                            <a:rPr lang="en-US" b="0" i="1" smtClean="0">
+                              <a:latin typeface="Cambria Math" panose="02040503050406030204" pitchFamily="18" charset="0"/>
+                            </a:rPr>
+                            <m:t>1</m:t>
+                          </m:r>
+                        </m:num>
+                        <m:den>
+                          <m:r>
+                            <m:rPr>
+                              <m:sty m:val="p"/>
+                            </m:rPr>
+                            <a:rPr lang="en-US" b="0" i="0" smtClean="0">
+                              <a:latin typeface="Cambria Math" panose="02040503050406030204" pitchFamily="18" charset="0"/>
+                            </a:rPr>
+                            <m:t>Δ</m:t>
+                          </m:r>
+                          <m:r>
+                            <a:rPr lang="en-US" b="0" i="1" smtClean="0">
+                              <a:latin typeface="Cambria Math" panose="02040503050406030204" pitchFamily="18" charset="0"/>
+                            </a:rPr>
+                            <m:t>𝑅</m:t>
+                          </m:r>
+                        </m:den>
+                      </m:f>
+                      <m:f>
+                        <m:fPr>
+                          <m:ctrlPr>
+                            <a:rPr lang="en-US" b="0" i="1" smtClean="0">
+                              <a:latin typeface="Cambria Math" panose="02040503050406030204" pitchFamily="18" charset="0"/>
+                            </a:rPr>
+                          </m:ctrlPr>
+                        </m:fPr>
+                        <m:num>
+                          <m:sSub>
+                            <m:sSubPr>
+                              <m:ctrlPr>
+                                <a:rPr lang="en-US" b="0" i="1" smtClean="0">
+                                  <a:latin typeface="Cambria Math" panose="02040503050406030204" pitchFamily="18" charset="0"/>
+                                </a:rPr>
+                              </m:ctrlPr>
+                            </m:sSubPr>
+                            <m:e>
+                              <m:r>
+                                <a:rPr lang="en-US" b="0" i="1" smtClean="0">
+                                  <a:latin typeface="Cambria Math" panose="02040503050406030204" pitchFamily="18" charset="0"/>
+                                </a:rPr>
+                                <m:t>𝑅</m:t>
+                              </m:r>
+                            </m:e>
+                            <m:sub>
+                              <m:r>
+                                <a:rPr lang="en-US" b="0" i="1" smtClean="0">
+                                  <a:latin typeface="Cambria Math" panose="02040503050406030204" pitchFamily="18" charset="0"/>
+                                </a:rPr>
+                                <m:t>𝑠</m:t>
+                              </m:r>
+                            </m:sub>
+                          </m:sSub>
+                          <m:sSubSup>
+                            <m:sSubSupPr>
+                              <m:ctrlPr>
+                                <a:rPr lang="en-US" b="0" i="1" smtClean="0">
+                                  <a:latin typeface="Cambria Math" panose="02040503050406030204" pitchFamily="18" charset="0"/>
+                                </a:rPr>
+                              </m:ctrlPr>
+                            </m:sSubSupPr>
+                            <m:e>
+                              <m:r>
+                                <a:rPr lang="en-US" b="0" i="1" smtClean="0">
+                                  <a:latin typeface="Cambria Math" panose="02040503050406030204" pitchFamily="18" charset="0"/>
+                                </a:rPr>
+                                <m:t>𝑅</m:t>
+                              </m:r>
+                            </m:e>
+                            <m:sub>
+                              <m:r>
+                                <a:rPr lang="en-US" b="0" i="1" smtClean="0">
+                                  <a:latin typeface="Cambria Math" panose="02040503050406030204" pitchFamily="18" charset="0"/>
+                                </a:rPr>
+                                <m:t>h</m:t>
+                              </m:r>
+                            </m:sub>
+                            <m:sup>
+                              <m:r>
+                                <a:rPr lang="en-US" b="0" i="1" smtClean="0">
+                                  <a:latin typeface="Cambria Math" panose="02040503050406030204" pitchFamily="18" charset="0"/>
+                                </a:rPr>
+                                <m:t>2</m:t>
+                              </m:r>
+                            </m:sup>
+                          </m:sSubSup>
+                        </m:num>
+                        <m:den>
+                          <m:sSubSup>
+                            <m:sSubSupPr>
+                              <m:ctrlPr>
+                                <a:rPr lang="en-US" b="0" i="1" smtClean="0">
+                                  <a:latin typeface="Cambria Math" panose="02040503050406030204" pitchFamily="18" charset="0"/>
+                                </a:rPr>
+                              </m:ctrlPr>
+                            </m:sSubSupPr>
+                            <m:e>
+                              <m:r>
+                                <a:rPr lang="en-US" b="0" i="1" smtClean="0">
+                                  <a:latin typeface="Cambria Math" panose="02040503050406030204" pitchFamily="18" charset="0"/>
+                                </a:rPr>
+                                <m:t>𝑅</m:t>
+                              </m:r>
+                            </m:e>
+                            <m:sub>
+                              <m:r>
+                                <a:rPr lang="en-US" b="0" i="1" smtClean="0">
+                                  <a:latin typeface="Cambria Math" panose="02040503050406030204" pitchFamily="18" charset="0"/>
+                                </a:rPr>
+                                <m:t>𝑠</m:t>
+                              </m:r>
+                            </m:sub>
+                            <m:sup>
+                              <m:r>
+                                <a:rPr lang="en-US" b="0" i="1" smtClean="0">
+                                  <a:latin typeface="Cambria Math" panose="02040503050406030204" pitchFamily="18" charset="0"/>
+                                </a:rPr>
+                                <m:t>2</m:t>
+                              </m:r>
+                            </m:sup>
+                          </m:sSubSup>
+                          <m:r>
+                            <a:rPr lang="en-US" b="0" i="1" smtClean="0">
+                              <a:latin typeface="Cambria Math" panose="02040503050406030204" pitchFamily="18" charset="0"/>
+                            </a:rPr>
+                            <m:t>−</m:t>
+                          </m:r>
+                          <m:sSubSup>
+                            <m:sSubSupPr>
+                              <m:ctrlPr>
+                                <a:rPr lang="en-US" b="0" i="1" smtClean="0">
+                                  <a:latin typeface="Cambria Math" panose="02040503050406030204" pitchFamily="18" charset="0"/>
+                                </a:rPr>
+                              </m:ctrlPr>
+                            </m:sSubSupPr>
+                            <m:e>
+                              <m:r>
+                                <a:rPr lang="en-US" b="0" i="1" smtClean="0">
+                                  <a:latin typeface="Cambria Math" panose="02040503050406030204" pitchFamily="18" charset="0"/>
+                                </a:rPr>
+                                <m:t>𝑅</m:t>
+                              </m:r>
+                            </m:e>
+                            <m:sub>
+                              <m:r>
+                                <a:rPr lang="en-US" b="0" i="1" smtClean="0">
+                                  <a:latin typeface="Cambria Math" panose="02040503050406030204" pitchFamily="18" charset="0"/>
+                                </a:rPr>
+                                <m:t>h</m:t>
+                              </m:r>
+                            </m:sub>
+                            <m:sup>
+                              <m:r>
+                                <a:rPr lang="en-US" b="0" i="1" smtClean="0">
+                                  <a:latin typeface="Cambria Math" panose="02040503050406030204" pitchFamily="18" charset="0"/>
+                                </a:rPr>
+                                <m:t>2</m:t>
+                              </m:r>
+                            </m:sup>
+                          </m:sSubSup>
+                        </m:den>
+                      </m:f>
+                    </m:oMath>
+                  </m:oMathPara>
+                </a14:m>
+                <a:endParaRPr lang="en-US" dirty="0"/>
+              </a:p>
+            </p:txBody>
+          </p:sp>
+        </mc:Choice>
+        <mc:Fallback>
+          <p:sp>
+            <p:nvSpPr>
+              <p:cNvPr id="9" name="矩形 8"/>
+              <p:cNvSpPr>
+                <a:spLocks noRot="1" noChangeAspect="1" noMove="1" noResize="1" noEditPoints="1" noAdjustHandles="1" noChangeArrowheads="1" noChangeShapeType="1" noTextEdit="1"/>
+              </p:cNvSpPr>
+              <p:nvPr/>
+            </p:nvSpPr>
+            <p:spPr>
+              <a:xfrm>
+                <a:off x="8236772" y="5294272"/>
+                <a:ext cx="1875770" cy="726353"/>
+              </a:xfrm>
+              <a:prstGeom prst="rect">
+                <a:avLst/>
+              </a:prstGeom>
+              <a:blipFill>
+                <a:blip r:embed="rId8"/>
+                <a:stretch>
+                  <a:fillRect/>
+                </a:stretch>
+              </a:blipFill>
+            </p:spPr>
+            <p:txBody>
+              <a:bodyPr/>
+              <a:lstStyle/>
+              <a:p>
+                <a:r>
+                  <a:rPr lang="en-US">
+                    <a:noFill/>
+                  </a:rPr>
+                  <a:t> </a:t>
+                </a:r>
+              </a:p>
+            </p:txBody>
+          </p:sp>
+        </mc:Fallback>
+      </mc:AlternateContent>
     </p:spTree>
     <p:extLst>
       <p:ext uri="{BB962C8B-B14F-4D97-AF65-F5344CB8AC3E}">

--- a/CylindericalCoordinates/KeyResults.pptx
+++ b/CylindericalCoordinates/KeyResults.pptx
@@ -5,7 +5,7 @@
     <p:sldMasterId id="2147483648" r:id="rId1"/>
   </p:sldMasterIdLst>
   <p:notesMasterIdLst>
-    <p:notesMasterId r:id="rId7"/>
+    <p:notesMasterId r:id="rId8"/>
   </p:notesMasterIdLst>
   <p:sldIdLst>
     <p:sldId id="256" r:id="rId2"/>
@@ -13,6 +13,7 @@
     <p:sldId id="258" r:id="rId4"/>
     <p:sldId id="259" r:id="rId5"/>
     <p:sldId id="260" r:id="rId6"/>
+    <p:sldId id="261" r:id="rId7"/>
   </p:sldIdLst>
   <p:sldSz cx="12192000" cy="6858000"/>
   <p:notesSz cx="6858000" cy="9144000"/>
@@ -201,7 +202,7 @@
           <a:p>
             <a:fld id="{6FD21F14-B943-4974-AF6C-853DF08CC6F6}" type="datetimeFigureOut">
               <a:rPr lang="en-US" smtClean="0"/>
-              <a:t>4/15/2026</a:t>
+              <a:t>4/21/2026</a:t>
             </a:fld>
             <a:endParaRPr lang="en-US"/>
           </a:p>
@@ -721,6 +722,102 @@
 </p:notes>
 </file>
 
+<file path=ppt/notesSlides/notesSlide4.xml><?xml version="1.0" encoding="utf-8"?>
+<p:notes xmlns:a="http://schemas.openxmlformats.org/drawingml/2006/main" xmlns:r="http://schemas.openxmlformats.org/officeDocument/2006/relationships" xmlns:p="http://schemas.openxmlformats.org/presentationml/2006/main">
+  <p:cSld>
+    <p:spTree>
+      <p:nvGrpSpPr>
+        <p:cNvPr id="1" name=""/>
+        <p:cNvGrpSpPr/>
+        <p:nvPr/>
+      </p:nvGrpSpPr>
+      <p:grpSpPr>
+        <a:xfrm>
+          <a:off x="0" y="0"/>
+          <a:ext cx="0" cy="0"/>
+          <a:chOff x="0" y="0"/>
+          <a:chExt cx="0" cy="0"/>
+        </a:xfrm>
+      </p:grpSpPr>
+      <p:sp>
+        <p:nvSpPr>
+          <p:cNvPr id="2" name="幻灯片图像占位符 1"/>
+          <p:cNvSpPr>
+            <a:spLocks noGrp="1" noRot="1" noChangeAspect="1"/>
+          </p:cNvSpPr>
+          <p:nvPr>
+            <p:ph type="sldImg"/>
+          </p:nvPr>
+        </p:nvSpPr>
+        <p:spPr/>
+      </p:sp>
+      <p:sp>
+        <p:nvSpPr>
+          <p:cNvPr id="3" name="备注占位符 2"/>
+          <p:cNvSpPr>
+            <a:spLocks noGrp="1"/>
+          </p:cNvSpPr>
+          <p:nvPr>
+            <p:ph type="body" idx="1"/>
+          </p:nvPr>
+        </p:nvSpPr>
+        <p:spPr/>
+        <p:txBody>
+          <a:bodyPr/>
+          <a:lstStyle/>
+          <a:p>
+            <a:r>
+              <a:rPr lang="en-US" dirty="0" smtClean="0"/>
+              <a:t>Due to</a:t>
+            </a:r>
+            <a:r>
+              <a:rPr lang="en-US" baseline="0" dirty="0" smtClean="0"/>
+              <a:t> in the Annular Coette Flow the pressure and velocities are decoupled, sometimes the pressure converge to a constant </a:t>
+            </a:r>
+            <a:r>
+              <a:rPr lang="en-US" baseline="0" smtClean="0"/>
+              <a:t>trivial solution.</a:t>
+            </a:r>
+            <a:endParaRPr lang="en-US" dirty="0"/>
+          </a:p>
+        </p:txBody>
+      </p:sp>
+      <p:sp>
+        <p:nvSpPr>
+          <p:cNvPr id="4" name="灯片编号占位符 3"/>
+          <p:cNvSpPr>
+            <a:spLocks noGrp="1"/>
+          </p:cNvSpPr>
+          <p:nvPr>
+            <p:ph type="sldNum" sz="quarter" idx="10"/>
+          </p:nvPr>
+        </p:nvSpPr>
+        <p:spPr/>
+        <p:txBody>
+          <a:bodyPr/>
+          <a:lstStyle/>
+          <a:p>
+            <a:fld id="{CBC3B015-18F1-43D5-A014-E13F769175C4}" type="slidenum">
+              <a:rPr lang="en-US" smtClean="0"/>
+              <a:t>6</a:t>
+            </a:fld>
+            <a:endParaRPr lang="en-US"/>
+          </a:p>
+        </p:txBody>
+      </p:sp>
+    </p:spTree>
+    <p:extLst>
+      <p:ext uri="{BB962C8B-B14F-4D97-AF65-F5344CB8AC3E}">
+        <p14:creationId xmlns:p14="http://schemas.microsoft.com/office/powerpoint/2010/main" val="1921078466"/>
+      </p:ext>
+    </p:extLst>
+  </p:cSld>
+  <p:clrMapOvr>
+    <a:masterClrMapping/>
+  </p:clrMapOvr>
+</p:notes>
+</file>
+
 <file path=ppt/slideLayouts/slideLayout1.xml><?xml version="1.0" encoding="utf-8"?>
 <p:sldLayout xmlns:a="http://schemas.openxmlformats.org/drawingml/2006/main" xmlns:r="http://schemas.openxmlformats.org/officeDocument/2006/relationships" xmlns:p="http://schemas.openxmlformats.org/presentationml/2006/main" type="title" preserve="1">
   <p:cSld name="标题幻灯片">
@@ -852,7 +949,7 @@
           <a:p>
             <a:fld id="{D11745D4-1722-44D0-992A-94FF939BE44E}" type="datetimeFigureOut">
               <a:rPr lang="en-US" smtClean="0"/>
-              <a:t>4/15/2026</a:t>
+              <a:t>4/21/2026</a:t>
             </a:fld>
             <a:endParaRPr lang="en-US"/>
           </a:p>
@@ -1022,7 +1119,7 @@
           <a:p>
             <a:fld id="{D11745D4-1722-44D0-992A-94FF939BE44E}" type="datetimeFigureOut">
               <a:rPr lang="en-US" smtClean="0"/>
-              <a:t>4/15/2026</a:t>
+              <a:t>4/21/2026</a:t>
             </a:fld>
             <a:endParaRPr lang="en-US"/>
           </a:p>
@@ -1202,7 +1299,7 @@
           <a:p>
             <a:fld id="{D11745D4-1722-44D0-992A-94FF939BE44E}" type="datetimeFigureOut">
               <a:rPr lang="en-US" smtClean="0"/>
-              <a:t>4/15/2026</a:t>
+              <a:t>4/21/2026</a:t>
             </a:fld>
             <a:endParaRPr lang="en-US"/>
           </a:p>
@@ -1372,7 +1469,7 @@
           <a:p>
             <a:fld id="{D11745D4-1722-44D0-992A-94FF939BE44E}" type="datetimeFigureOut">
               <a:rPr lang="en-US" smtClean="0"/>
-              <a:t>4/15/2026</a:t>
+              <a:t>4/21/2026</a:t>
             </a:fld>
             <a:endParaRPr lang="en-US"/>
           </a:p>
@@ -1618,7 +1715,7 @@
           <a:p>
             <a:fld id="{D11745D4-1722-44D0-992A-94FF939BE44E}" type="datetimeFigureOut">
               <a:rPr lang="en-US" smtClean="0"/>
-              <a:t>4/15/2026</a:t>
+              <a:t>4/21/2026</a:t>
             </a:fld>
             <a:endParaRPr lang="en-US"/>
           </a:p>
@@ -1850,7 +1947,7 @@
           <a:p>
             <a:fld id="{D11745D4-1722-44D0-992A-94FF939BE44E}" type="datetimeFigureOut">
               <a:rPr lang="en-US" smtClean="0"/>
-              <a:t>4/15/2026</a:t>
+              <a:t>4/21/2026</a:t>
             </a:fld>
             <a:endParaRPr lang="en-US"/>
           </a:p>
@@ -2217,7 +2314,7 @@
           <a:p>
             <a:fld id="{D11745D4-1722-44D0-992A-94FF939BE44E}" type="datetimeFigureOut">
               <a:rPr lang="en-US" smtClean="0"/>
-              <a:t>4/15/2026</a:t>
+              <a:t>4/21/2026</a:t>
             </a:fld>
             <a:endParaRPr lang="en-US"/>
           </a:p>
@@ -2335,7 +2432,7 @@
           <a:p>
             <a:fld id="{D11745D4-1722-44D0-992A-94FF939BE44E}" type="datetimeFigureOut">
               <a:rPr lang="en-US" smtClean="0"/>
-              <a:t>4/15/2026</a:t>
+              <a:t>4/21/2026</a:t>
             </a:fld>
             <a:endParaRPr lang="en-US"/>
           </a:p>
@@ -2430,7 +2527,7 @@
           <a:p>
             <a:fld id="{D11745D4-1722-44D0-992A-94FF939BE44E}" type="datetimeFigureOut">
               <a:rPr lang="en-US" smtClean="0"/>
-              <a:t>4/15/2026</a:t>
+              <a:t>4/21/2026</a:t>
             </a:fld>
             <a:endParaRPr lang="en-US"/>
           </a:p>
@@ -2707,7 +2804,7 @@
           <a:p>
             <a:fld id="{D11745D4-1722-44D0-992A-94FF939BE44E}" type="datetimeFigureOut">
               <a:rPr lang="en-US" smtClean="0"/>
-              <a:t>4/15/2026</a:t>
+              <a:t>4/21/2026</a:t>
             </a:fld>
             <a:endParaRPr lang="en-US"/>
           </a:p>
@@ -2960,7 +3057,7 @@
           <a:p>
             <a:fld id="{D11745D4-1722-44D0-992A-94FF939BE44E}" type="datetimeFigureOut">
               <a:rPr lang="en-US" smtClean="0"/>
-              <a:t>4/15/2026</a:t>
+              <a:t>4/21/2026</a:t>
             </a:fld>
             <a:endParaRPr lang="en-US"/>
           </a:p>
@@ -3173,7 +3270,7 @@
           <a:p>
             <a:fld id="{D11745D4-1722-44D0-992A-94FF939BE44E}" type="datetimeFigureOut">
               <a:rPr lang="en-US" smtClean="0"/>
-              <a:t>4/15/2026</a:t>
+              <a:t>4/21/2026</a:t>
             </a:fld>
             <a:endParaRPr lang="en-US"/>
           </a:p>
@@ -8354,8 +8451,8 @@
           </a:prstGeom>
         </p:spPr>
       </p:pic>
-      <mc:AlternateContent xmlns:mc="http://schemas.openxmlformats.org/markup-compatibility/2006">
-        <mc:Choice xmlns:a14="http://schemas.microsoft.com/office/drawing/2010/main" Requires="a14">
+      <mc:AlternateContent xmlns:mc="http://schemas.openxmlformats.org/markup-compatibility/2006" xmlns:a14="http://schemas.microsoft.com/office/drawing/2010/main">
+        <mc:Choice Requires="a14">
           <p:sp>
             <p:nvSpPr>
               <p:cNvPr id="7" name="矩形 6"/>
@@ -8546,7 +8643,7 @@
             </p:txBody>
           </p:sp>
         </mc:Choice>
-        <mc:Fallback>
+        <mc:Fallback xmlns="">
           <p:sp>
             <p:nvSpPr>
               <p:cNvPr id="7" name="矩形 6"/>
@@ -8585,8 +8682,8 @@
           </p:sp>
         </mc:Fallback>
       </mc:AlternateContent>
-      <mc:AlternateContent xmlns:mc="http://schemas.openxmlformats.org/markup-compatibility/2006">
-        <mc:Choice xmlns:a14="http://schemas.microsoft.com/office/drawing/2010/main" Requires="a14">
+      <mc:AlternateContent xmlns:mc="http://schemas.openxmlformats.org/markup-compatibility/2006" xmlns:a14="http://schemas.microsoft.com/office/drawing/2010/main">
+        <mc:Choice Requires="a14">
           <p:sp>
             <p:nvSpPr>
               <p:cNvPr id="8" name="矩形 7"/>
@@ -8779,7 +8876,7 @@
             </p:txBody>
           </p:sp>
         </mc:Choice>
-        <mc:Fallback>
+        <mc:Fallback xmlns="">
           <p:sp>
             <p:nvSpPr>
               <p:cNvPr id="8" name="矩形 7"/>
@@ -8818,8 +8915,8 @@
           </p:sp>
         </mc:Fallback>
       </mc:AlternateContent>
-      <mc:AlternateContent xmlns:mc="http://schemas.openxmlformats.org/markup-compatibility/2006">
-        <mc:Choice xmlns:a14="http://schemas.microsoft.com/office/drawing/2010/main" Requires="a14">
+      <mc:AlternateContent xmlns:mc="http://schemas.openxmlformats.org/markup-compatibility/2006" xmlns:a14="http://schemas.microsoft.com/office/drawing/2010/main">
+        <mc:Choice Requires="a14">
           <p:sp>
             <p:nvSpPr>
               <p:cNvPr id="9" name="矩形 8"/>
@@ -9064,7 +9161,7 @@
             </p:txBody>
           </p:sp>
         </mc:Choice>
-        <mc:Fallback>
+        <mc:Fallback xmlns="">
           <p:sp>
             <p:nvSpPr>
               <p:cNvPr id="9" name="矩形 8"/>
@@ -9107,6 +9204,188 @@
     <p:extLst>
       <p:ext uri="{BB962C8B-B14F-4D97-AF65-F5344CB8AC3E}">
         <p14:creationId xmlns:p14="http://schemas.microsoft.com/office/powerpoint/2010/main" val="88329402"/>
+      </p:ext>
+    </p:extLst>
+  </p:cSld>
+  <p:clrMapOvr>
+    <a:masterClrMapping/>
+  </p:clrMapOvr>
+</p:sld>
+</file>
+
+<file path=ppt/slides/slide6.xml><?xml version="1.0" encoding="utf-8"?>
+<p:sld xmlns:a="http://schemas.openxmlformats.org/drawingml/2006/main" xmlns:r="http://schemas.openxmlformats.org/officeDocument/2006/relationships" xmlns:p="http://schemas.openxmlformats.org/presentationml/2006/main">
+  <p:cSld>
+    <p:spTree>
+      <p:nvGrpSpPr>
+        <p:cNvPr id="1" name=""/>
+        <p:cNvGrpSpPr/>
+        <p:nvPr/>
+      </p:nvGrpSpPr>
+      <p:grpSpPr>
+        <a:xfrm>
+          <a:off x="0" y="0"/>
+          <a:ext cx="0" cy="0"/>
+          <a:chOff x="0" y="0"/>
+          <a:chExt cx="0" cy="0"/>
+        </a:xfrm>
+      </p:grpSpPr>
+      <p:sp>
+        <p:nvSpPr>
+          <p:cNvPr id="2" name="矩形 1"/>
+          <p:cNvSpPr/>
+          <p:nvPr/>
+        </p:nvSpPr>
+        <p:spPr>
+          <a:xfrm>
+            <a:off x="0" y="0"/>
+            <a:ext cx="11296939" cy="523220"/>
+          </a:xfrm>
+          <a:prstGeom prst="rect">
+            <a:avLst/>
+          </a:prstGeom>
+        </p:spPr>
+        <p:txBody>
+          <a:bodyPr wrap="none">
+            <a:spAutoFit/>
+          </a:bodyPr>
+          <a:lstStyle/>
+          <a:p>
+            <a:r>
+              <a:rPr lang="en-US" sz="2800" b="1" dirty="0" smtClean="0">
+                <a:latin typeface="微软雅黑" panose="020B0503020204020204" pitchFamily="34" charset="-122"/>
+                <a:ea typeface="微软雅黑" panose="020B0503020204020204" pitchFamily="34" charset="-122"/>
+              </a:rPr>
+              <a:t>Formal Result: Jacobi Preconditioner + </a:t>
+            </a:r>
+            <a:r>
+              <a:rPr lang="en-US" sz="2800" b="1" dirty="0" smtClean="0">
+                <a:latin typeface="微软雅黑" panose="020B0503020204020204" pitchFamily="34" charset="-122"/>
+                <a:ea typeface="微软雅黑" panose="020B0503020204020204" pitchFamily="34" charset="-122"/>
+              </a:rPr>
+              <a:t>GMG</a:t>
+            </a:r>
+            <a:r>
+              <a:rPr lang="en-US" altLang="zh-CN" sz="2800" b="1" dirty="0" smtClean="0">
+                <a:latin typeface="微软雅黑" panose="020B0503020204020204" pitchFamily="34" charset="-122"/>
+                <a:ea typeface="微软雅黑" panose="020B0503020204020204" pitchFamily="34" charset="-122"/>
+              </a:rPr>
+              <a:t> </a:t>
+            </a:r>
+            <a:r>
+              <a:rPr lang="en-US" altLang="zh-CN" sz="2800" b="1" dirty="0" smtClean="0">
+                <a:latin typeface="微软雅黑" panose="020B0503020204020204" pitchFamily="34" charset="-122"/>
+                <a:ea typeface="微软雅黑" panose="020B0503020204020204" pitchFamily="34" charset="-122"/>
+              </a:rPr>
+              <a:t>Pressure Solver</a:t>
+            </a:r>
+            <a:endParaRPr lang="en-US" sz="2800" b="1" dirty="0" smtClean="0">
+              <a:latin typeface="微软雅黑" panose="020B0503020204020204" pitchFamily="34" charset="-122"/>
+              <a:ea typeface="微软雅黑" panose="020B0503020204020204" pitchFamily="34" charset="-122"/>
+            </a:endParaRPr>
+          </a:p>
+        </p:txBody>
+      </p:sp>
+      <p:pic>
+        <p:nvPicPr>
+          <p:cNvPr id="3" name="图片 2"/>
+          <p:cNvPicPr>
+            <a:picLocks noChangeAspect="1"/>
+          </p:cNvPicPr>
+          <p:nvPr/>
+        </p:nvPicPr>
+        <p:blipFill>
+          <a:blip r:embed="rId3"/>
+          <a:stretch>
+            <a:fillRect/>
+          </a:stretch>
+        </p:blipFill>
+        <p:spPr>
+          <a:xfrm>
+            <a:off x="0" y="523220"/>
+            <a:ext cx="4823878" cy="3284505"/>
+          </a:xfrm>
+          <a:prstGeom prst="rect">
+            <a:avLst/>
+          </a:prstGeom>
+        </p:spPr>
+      </p:pic>
+      <p:pic>
+        <p:nvPicPr>
+          <p:cNvPr id="4" name="图片 3"/>
+          <p:cNvPicPr>
+            <a:picLocks noChangeAspect="1"/>
+          </p:cNvPicPr>
+          <p:nvPr/>
+        </p:nvPicPr>
+        <p:blipFill>
+          <a:blip r:embed="rId4"/>
+          <a:stretch>
+            <a:fillRect/>
+          </a:stretch>
+        </p:blipFill>
+        <p:spPr>
+          <a:xfrm>
+            <a:off x="4823878" y="523219"/>
+            <a:ext cx="5027462" cy="3284505"/>
+          </a:xfrm>
+          <a:prstGeom prst="rect">
+            <a:avLst/>
+          </a:prstGeom>
+        </p:spPr>
+      </p:pic>
+      <p:pic>
+        <p:nvPicPr>
+          <p:cNvPr id="5" name="图片 4"/>
+          <p:cNvPicPr>
+            <a:picLocks noChangeAspect="1"/>
+          </p:cNvPicPr>
+          <p:nvPr/>
+        </p:nvPicPr>
+        <p:blipFill>
+          <a:blip r:embed="rId5"/>
+          <a:stretch>
+            <a:fillRect/>
+          </a:stretch>
+        </p:blipFill>
+        <p:spPr>
+          <a:xfrm>
+            <a:off x="1" y="3807724"/>
+            <a:ext cx="4823878" cy="3199219"/>
+          </a:xfrm>
+          <a:prstGeom prst="rect">
+            <a:avLst/>
+          </a:prstGeom>
+        </p:spPr>
+      </p:pic>
+      <p:pic>
+        <p:nvPicPr>
+          <p:cNvPr id="6" name="图片 5"/>
+          <p:cNvPicPr>
+            <a:picLocks noChangeAspect="1"/>
+          </p:cNvPicPr>
+          <p:nvPr/>
+        </p:nvPicPr>
+        <p:blipFill>
+          <a:blip r:embed="rId6"/>
+          <a:stretch>
+            <a:fillRect/>
+          </a:stretch>
+        </p:blipFill>
+        <p:spPr>
+          <a:xfrm>
+            <a:off x="4823877" y="3807724"/>
+            <a:ext cx="5027463" cy="3195649"/>
+          </a:xfrm>
+          <a:prstGeom prst="rect">
+            <a:avLst/>
+          </a:prstGeom>
+        </p:spPr>
+      </p:pic>
+    </p:spTree>
+    <p:extLst>
+      <p:ext uri="{BB962C8B-B14F-4D97-AF65-F5344CB8AC3E}">
+        <p14:creationId xmlns:p14="http://schemas.microsoft.com/office/powerpoint/2010/main" val="163889322"/>
       </p:ext>
     </p:extLst>
   </p:cSld>
